--- a/src/assets/downloads/example-deck-modern.pptx
+++ b/src/assets/downloads/example-deck-modern.pptx
@@ -16,9 +16,10 @@
     <p:sldId id="264" r:id="rId10"/>
     <p:sldId id="265" r:id="rId11"/>
     <p:sldId id="266" r:id="rId12"/>
+    <p:sldId id="267" r:id="rId13"/>
   </p:sldIdLst>
   <p:notesMasterIdLst>
-    <p:notesMasterId r:id="rId13"/>
+    <p:notesMasterId r:id="rId14"/>
   </p:notesMasterIdLst>
   <p:sldSz cx="12192000" cy="6858000"/>
   <p:notesSz cx="6858000" cy="12192000"/>
@@ -2537,6 +2538,94 @@
 </p:notes>
 </file>
 
+<file path=ppt/notesSlides/notesSlide12.xml><?xml version="1.0" encoding="utf-8"?>
+<p:notes xmlns:a="http://schemas.openxmlformats.org/drawingml/2006/main" xmlns:r="http://schemas.openxmlformats.org/officeDocument/2006/relationships" xmlns:p="http://schemas.openxmlformats.org/presentationml/2006/main">
+  <p:cSld>
+    <p:spTree>
+      <p:nvGrpSpPr>
+        <p:cNvPr id="1" name=""/>
+        <p:cNvGrpSpPr/>
+        <p:nvPr/>
+      </p:nvGrpSpPr>
+      <p:grpSpPr>
+        <a:xfrm>
+          <a:off x="0" y="0"/>
+          <a:ext cx="0" cy="0"/>
+          <a:chOff x="0" y="0"/>
+          <a:chExt cx="0" cy="0"/>
+        </a:xfrm>
+      </p:grpSpPr>
+      <p:sp>
+        <p:nvSpPr>
+          <p:cNvPr id="2" name="Slide Image Placeholder 1"/>
+          <p:cNvSpPr>
+            <a:spLocks noGrp="1" noRot="1" noChangeAspect="1"/>
+          </p:cNvSpPr>
+          <p:nvPr>
+            <p:ph type="sldImg"/>
+          </p:nvPr>
+        </p:nvSpPr>
+        <p:spPr/>
+      </p:sp>
+      <p:sp>
+        <p:nvSpPr>
+          <p:cNvPr id="3" name="Notes Placeholder 2"/>
+          <p:cNvSpPr>
+            <a:spLocks noGrp="1"/>
+          </p:cNvSpPr>
+          <p:nvPr>
+            <p:ph type="body" idx="1"/>
+          </p:nvPr>
+        </p:nvSpPr>
+        <p:spPr/>
+        <p:txBody>
+          <a:bodyPr/>
+          <a:lstStyle/>
+          <a:p>
+            <a:r>
+              <a:rPr lang="en-US" dirty="0"/>
+              <a:t/>
+            </a:r>
+            <a:endParaRPr lang="en-US" dirty="0"/>
+          </a:p>
+        </p:txBody>
+      </p:sp>
+      <p:sp>
+        <p:nvSpPr>
+          <p:cNvPr id="4" name="Slide Number Placeholder 3"/>
+          <p:cNvSpPr>
+            <a:spLocks noGrp="1"/>
+          </p:cNvSpPr>
+          <p:nvPr>
+            <p:ph type="sldNum" sz="quarter" idx="10"/>
+          </p:nvPr>
+        </p:nvSpPr>
+        <p:spPr/>
+        <p:txBody>
+          <a:bodyPr/>
+          <a:lstStyle/>
+          <a:p>
+            <a:fld id="{F7021451-1387-4CA6-816F-3879F97B5CBC}" type="slidenum">
+              <a:rPr lang="en-US"/>
+              <a:t>12</a:t>
+            </a:fld>
+            <a:endParaRPr lang="en-US"/>
+          </a:p>
+        </p:txBody>
+      </p:sp>
+    </p:spTree>
+    <p:extLst>
+      <p:ext uri="{BB962C8B-B14F-4D97-AF65-F5344CB8AC3E}">
+        <p14:creationId xmlns:p14="http://schemas.microsoft.com/office/powerpoint/2010/main" val="1024086991"/>
+      </p:ext>
+    </p:extLst>
+  </p:cSld>
+  <p:clrMapOvr>
+    <a:masterClrMapping/>
+  </p:clrMapOvr>
+</p:notes>
+</file>
+
 <file path=ppt/notesSlides/notesSlide2.xml><?xml version="1.0" encoding="utf-8"?>
 <p:notes xmlns:a="http://schemas.openxmlformats.org/drawingml/2006/main" xmlns:r="http://schemas.openxmlformats.org/officeDocument/2006/relationships" xmlns:p="http://schemas.openxmlformats.org/presentationml/2006/main">
   <p:cSld>
@@ -3574,7 +3663,7 @@
       </p:grpSpPr>
       <p:pic>
         <p:nvPicPr>
-          <p:cNvPr id="2" name="Image 0" descr="/var/folders/lw/rmylcyvd5rjfxk9g1z9rrm8w0000gq/T/showship-deck-JidNvZ/logo_trimmed.png">    </p:cNvPr>
+          <p:cNvPr id="2" name="Image 0" descr="/var/folders/lw/rmylcyvd5rjfxk9g1z9rrm8w0000gq/T/showship-deck-WqaFdu/logo_trimmed.png">    </p:cNvPr>
           <p:cNvPicPr>
             <a:picLocks noChangeAspect="1"/>
           </p:cNvPicPr>
@@ -3600,7 +3689,7 @@
       </p:pic>
       <p:pic>
         <p:nvPicPr>
-          <p:cNvPr id="3" name="Image 1" descr="/var/folders/lw/rmylcyvd5rjfxk9g1z9rrm8w0000gq/T/showship-deck-JidNvZ/logo_trimmed.png">    </p:cNvPr>
+          <p:cNvPr id="3" name="Image 1" descr="/var/folders/lw/rmylcyvd5rjfxk9g1z9rrm8w0000gq/T/showship-deck-WqaFdu/logo_trimmed.png">    </p:cNvPr>
           <p:cNvPicPr>
             <a:picLocks noChangeAspect="1"/>
           </p:cNvPicPr>
@@ -3972,7 +4061,7 @@
                 <a:ea typeface="Calibri" pitchFamily="34" charset="-122"/>
                 <a:cs typeface="Calibri" pitchFamily="34" charset="-120"/>
               </a:rPr>
-              <a:t>Looking Ahead</a:t>
+              <a:t>Engineering Activity · GitHub</a:t>
             </a:r>
             <a:endParaRPr lang="en-US" sz="1300" dirty="0"/>
           </a:p>
@@ -4005,7 +4094,7 @@
               <a:buNone/>
             </a:pPr>
             <a:r>
-              <a:rPr lang="en-US" sz="3000" b="1" dirty="0">
+              <a:rPr lang="en-US" sz="2800" b="1" dirty="0">
                 <a:solidFill>
                   <a:srgbClr val="141412"/>
                 </a:solidFill>
@@ -4013,15 +4102,521 @@
                 <a:ea typeface="Cambria" pitchFamily="34" charset="-122"/>
                 <a:cs typeface="Cambria" pitchFamily="34" charset="-120"/>
               </a:rPr>
-              <a:t>Next Week's Plan</a:t>
-            </a:r>
-            <a:endParaRPr lang="en-US" sz="3000" dirty="0"/>
-          </a:p>
-        </p:txBody>
+              <a:t>Team Delivery Activity This Week</a:t>
+            </a:r>
+            <a:endParaRPr lang="en-US" sz="2800" dirty="0"/>
+          </a:p>
+        </p:txBody>
+      </p:sp>
+      <p:sp>
+        <p:nvSpPr>
+          <p:cNvPr id="4" name="Shape 2"/>
+          <p:cNvSpPr/>
+          <p:nvPr/>
+        </p:nvSpPr>
+        <p:spPr>
+          <a:xfrm>
+            <a:off x="640080" y="1783080"/>
+            <a:ext cx="7680960" cy="4434840"/>
+          </a:xfrm>
+          <a:prstGeom prst="roundRect">
+            <a:avLst>
+              <a:gd name="adj" fmla="val 1649"/>
+            </a:avLst>
+          </a:prstGeom>
+          <a:solidFill>
+            <a:srgbClr val="F6F7F1"/>
+          </a:solidFill>
+          <a:ln/>
+          <a:effectLst>
+            <a:outerShdw sx="100000" sy="100000" kx="0" ky="0" algn="bl" rotWithShape="0" blurRad="76200" dist="25400" dir="5400000">
+              <a:srgbClr val="000000">
+                <a:alpha val="8000"/>
+              </a:srgbClr>
+            </a:outerShdw>
+          </a:effectLst>
+        </p:spPr>
       </p:sp>
       <p:graphicFrame>
         <p:nvGraphicFramePr>
-          <p:cNvPr id="11" name="Table 0"/>
+          <p:cNvPr id="5" name="Chart 0" descr=""/>
+          <p:cNvGraphicFramePr/>
+          <p:nvPr/>
+        </p:nvGraphicFramePr>
+        <p:xfrm>
+          <a:off x="777240" y="1965960"/>
+          <a:ext cx="7406640" cy="3749040"/>
+        </p:xfrm>
+        <a:graphic xmlns:a="http://schemas.openxmlformats.org/drawingml/2006/main">
+          <a:graphicData uri="http://schemas.openxmlformats.org/drawingml/2006/chart">
+            <c:chart xmlns:c="http://schemas.openxmlformats.org/drawingml/2006/chart" r:id="rId1"/>
+          </a:graphicData>
+        </a:graphic>
+      </p:graphicFrame>
+      <p:sp>
+        <p:nvSpPr>
+          <p:cNvPr id="6" name="Text 3"/>
+          <p:cNvSpPr/>
+          <p:nvPr/>
+        </p:nvSpPr>
+        <p:spPr>
+          <a:xfrm>
+            <a:off x="914400" y="5760720"/>
+            <a:ext cx="7132320" cy="320040"/>
+          </a:xfrm>
+          <a:prstGeom prst="rect">
+            <a:avLst/>
+          </a:prstGeom>
+          <a:noFill/>
+          <a:ln/>
+        </p:spPr>
+        <p:txBody>
+          <a:bodyPr wrap="square" lIns="0" tIns="0" rIns="0" bIns="0" rtlCol="0" anchor="ctr"/>
+          <a:lstStyle/>
+          <a:p>
+            <a:pPr indent="0" marL="0">
+              <a:buNone/>
+            </a:pPr>
+            <a:r>
+              <a:rPr lang="en-US" sz="1100" i="1" dirty="0">
+                <a:solidFill>
+                  <a:srgbClr val="58584F"/>
+                </a:solidFill>
+                <a:latin typeface="Calibri" pitchFamily="34" charset="0"/>
+                <a:ea typeface="Calibri" pitchFamily="34" charset="-122"/>
+                <a:cs typeface="Calibri" pitchFamily="34" charset="-120"/>
+              </a:rPr>
+              <a:t>Source: GitHub activity this week.</a:t>
+            </a:r>
+            <a:endParaRPr lang="en-US" sz="1100" dirty="0"/>
+          </a:p>
+        </p:txBody>
+      </p:sp>
+      <p:sp>
+        <p:nvSpPr>
+          <p:cNvPr id="7" name="Shape 4"/>
+          <p:cNvSpPr/>
+          <p:nvPr/>
+        </p:nvSpPr>
+        <p:spPr>
+          <a:xfrm>
+            <a:off x="8641080" y="1783080"/>
+            <a:ext cx="2907792" cy="1356360"/>
+          </a:xfrm>
+          <a:prstGeom prst="roundRect">
+            <a:avLst>
+              <a:gd name="adj" fmla="val 5393"/>
+            </a:avLst>
+          </a:prstGeom>
+          <a:solidFill>
+            <a:srgbClr val="141412"/>
+          </a:solidFill>
+          <a:ln/>
+        </p:spPr>
+      </p:sp>
+      <p:sp>
+        <p:nvSpPr>
+          <p:cNvPr id="8" name="Text 5"/>
+          <p:cNvSpPr/>
+          <p:nvPr/>
+        </p:nvSpPr>
+        <p:spPr>
+          <a:xfrm>
+            <a:off x="8869680" y="1892808"/>
+            <a:ext cx="2450592" cy="745998"/>
+          </a:xfrm>
+          <a:prstGeom prst="rect">
+            <a:avLst/>
+          </a:prstGeom>
+          <a:noFill/>
+          <a:ln/>
+        </p:spPr>
+        <p:txBody>
+          <a:bodyPr wrap="square" lIns="0" tIns="0" rIns="0" bIns="0" rtlCol="0" anchor="b"/>
+          <a:lstStyle/>
+          <a:p>
+            <a:pPr indent="0" marL="0">
+              <a:buNone/>
+            </a:pPr>
+            <a:r>
+              <a:rPr lang="en-US" sz="3200" b="1" dirty="0">
+                <a:solidFill>
+                  <a:srgbClr val="A8CC3A"/>
+                </a:solidFill>
+                <a:latin typeface="Cambria" pitchFamily="34" charset="0"/>
+                <a:ea typeface="Cambria" pitchFamily="34" charset="-122"/>
+                <a:cs typeface="Cambria" pitchFamily="34" charset="-120"/>
+              </a:rPr>
+              <a:t>3</a:t>
+            </a:r>
+            <a:endParaRPr lang="en-US" sz="3200" dirty="0"/>
+          </a:p>
+        </p:txBody>
+      </p:sp>
+      <p:sp>
+        <p:nvSpPr>
+          <p:cNvPr id="9" name="Text 6"/>
+          <p:cNvSpPr/>
+          <p:nvPr/>
+        </p:nvSpPr>
+        <p:spPr>
+          <a:xfrm>
+            <a:off x="8869680" y="2596896"/>
+            <a:ext cx="2450592" cy="474726"/>
+          </a:xfrm>
+          <a:prstGeom prst="rect">
+            <a:avLst/>
+          </a:prstGeom>
+          <a:noFill/>
+          <a:ln/>
+        </p:spPr>
+        <p:txBody>
+          <a:bodyPr wrap="square" lIns="0" tIns="0" rIns="0" bIns="0" rtlCol="0" anchor="t"/>
+          <a:lstStyle/>
+          <a:p>
+            <a:pPr indent="0" marL="0">
+              <a:buNone/>
+            </a:pPr>
+            <a:r>
+              <a:rPr lang="en-US" sz="1200" b="1" dirty="0">
+                <a:solidFill>
+                  <a:srgbClr val="D8D8D2"/>
+                </a:solidFill>
+                <a:latin typeface="Calibri" pitchFamily="34" charset="0"/>
+                <a:ea typeface="Calibri" pitchFamily="34" charset="-122"/>
+                <a:cs typeface="Calibri" pitchFamily="34" charset="-120"/>
+              </a:rPr>
+              <a:t>Features approved</a:t>
+            </a:r>
+            <a:endParaRPr lang="en-US" sz="1200" dirty="0"/>
+          </a:p>
+        </p:txBody>
+      </p:sp>
+      <p:sp>
+        <p:nvSpPr>
+          <p:cNvPr id="10" name="Shape 7"/>
+          <p:cNvSpPr/>
+          <p:nvPr/>
+        </p:nvSpPr>
+        <p:spPr>
+          <a:xfrm>
+            <a:off x="8641080" y="3322320"/>
+            <a:ext cx="2907792" cy="1356360"/>
+          </a:xfrm>
+          <a:prstGeom prst="roundRect">
+            <a:avLst>
+              <a:gd name="adj" fmla="val 5393"/>
+            </a:avLst>
+          </a:prstGeom>
+          <a:solidFill>
+            <a:srgbClr val="FFFFFF"/>
+          </a:solidFill>
+          <a:ln w="12700">
+            <a:solidFill>
+              <a:srgbClr val="E6E8DF"/>
+            </a:solidFill>
+            <a:prstDash val="solid"/>
+          </a:ln>
+        </p:spPr>
+      </p:sp>
+      <p:sp>
+        <p:nvSpPr>
+          <p:cNvPr id="11" name="Text 8"/>
+          <p:cNvSpPr/>
+          <p:nvPr/>
+        </p:nvSpPr>
+        <p:spPr>
+          <a:xfrm>
+            <a:off x="8869680" y="3432048"/>
+            <a:ext cx="2450592" cy="745998"/>
+          </a:xfrm>
+          <a:prstGeom prst="rect">
+            <a:avLst/>
+          </a:prstGeom>
+          <a:noFill/>
+          <a:ln/>
+        </p:spPr>
+        <p:txBody>
+          <a:bodyPr wrap="square" lIns="0" tIns="0" rIns="0" bIns="0" rtlCol="0" anchor="b"/>
+          <a:lstStyle/>
+          <a:p>
+            <a:pPr indent="0" marL="0">
+              <a:buNone/>
+            </a:pPr>
+            <a:r>
+              <a:rPr lang="en-US" sz="3200" b="1" dirty="0">
+                <a:solidFill>
+                  <a:srgbClr val="141412"/>
+                </a:solidFill>
+                <a:latin typeface="Cambria" pitchFamily="34" charset="0"/>
+                <a:ea typeface="Cambria" pitchFamily="34" charset="-122"/>
+                <a:cs typeface="Cambria" pitchFamily="34" charset="-120"/>
+              </a:rPr>
+              <a:t>2</a:t>
+            </a:r>
+            <a:endParaRPr lang="en-US" sz="3200" dirty="0"/>
+          </a:p>
+        </p:txBody>
+      </p:sp>
+      <p:sp>
+        <p:nvSpPr>
+          <p:cNvPr id="12" name="Text 9"/>
+          <p:cNvSpPr/>
+          <p:nvPr/>
+        </p:nvSpPr>
+        <p:spPr>
+          <a:xfrm>
+            <a:off x="8869680" y="4136136"/>
+            <a:ext cx="2450592" cy="474726"/>
+          </a:xfrm>
+          <a:prstGeom prst="rect">
+            <a:avLst/>
+          </a:prstGeom>
+          <a:noFill/>
+          <a:ln/>
+        </p:spPr>
+        <p:txBody>
+          <a:bodyPr wrap="square" lIns="0" tIns="0" rIns="0" bIns="0" rtlCol="0" anchor="t"/>
+          <a:lstStyle/>
+          <a:p>
+            <a:pPr indent="0" marL="0">
+              <a:buNone/>
+            </a:pPr>
+            <a:r>
+              <a:rPr lang="en-US" sz="1200" b="1" dirty="0">
+                <a:solidFill>
+                  <a:srgbClr val="58584F"/>
+                </a:solidFill>
+                <a:latin typeface="Calibri" pitchFamily="34" charset="0"/>
+                <a:ea typeface="Calibri" pitchFamily="34" charset="-122"/>
+                <a:cs typeface="Calibri" pitchFamily="34" charset="-120"/>
+              </a:rPr>
+              <a:t>In final review</a:t>
+            </a:r>
+            <a:endParaRPr lang="en-US" sz="1200" dirty="0"/>
+          </a:p>
+        </p:txBody>
+      </p:sp>
+      <p:sp>
+        <p:nvSpPr>
+          <p:cNvPr id="13" name="Shape 10"/>
+          <p:cNvSpPr/>
+          <p:nvPr/>
+        </p:nvSpPr>
+        <p:spPr>
+          <a:xfrm>
+            <a:off x="8641080" y="4861560"/>
+            <a:ext cx="2907792" cy="1356360"/>
+          </a:xfrm>
+          <a:prstGeom prst="roundRect">
+            <a:avLst>
+              <a:gd name="adj" fmla="val 5393"/>
+            </a:avLst>
+          </a:prstGeom>
+          <a:solidFill>
+            <a:srgbClr val="FFFFFF"/>
+          </a:solidFill>
+          <a:ln w="12700">
+            <a:solidFill>
+              <a:srgbClr val="E6E8DF"/>
+            </a:solidFill>
+            <a:prstDash val="solid"/>
+          </a:ln>
+        </p:spPr>
+      </p:sp>
+      <p:sp>
+        <p:nvSpPr>
+          <p:cNvPr id="14" name="Text 11"/>
+          <p:cNvSpPr/>
+          <p:nvPr/>
+        </p:nvSpPr>
+        <p:spPr>
+          <a:xfrm>
+            <a:off x="8869680" y="4971288"/>
+            <a:ext cx="2450592" cy="745998"/>
+          </a:xfrm>
+          <a:prstGeom prst="rect">
+            <a:avLst/>
+          </a:prstGeom>
+          <a:noFill/>
+          <a:ln/>
+        </p:spPr>
+        <p:txBody>
+          <a:bodyPr wrap="square" lIns="0" tIns="0" rIns="0" bIns="0" rtlCol="0" anchor="b"/>
+          <a:lstStyle/>
+          <a:p>
+            <a:pPr indent="0" marL="0">
+              <a:buNone/>
+            </a:pPr>
+            <a:r>
+              <a:rPr lang="en-US" sz="3200" b="1" dirty="0">
+                <a:solidFill>
+                  <a:srgbClr val="141412"/>
+                </a:solidFill>
+                <a:latin typeface="Cambria" pitchFamily="34" charset="0"/>
+                <a:ea typeface="Cambria" pitchFamily="34" charset="-122"/>
+                <a:cs typeface="Cambria" pitchFamily="34" charset="-120"/>
+              </a:rPr>
+              <a:t>7</a:t>
+            </a:r>
+            <a:endParaRPr lang="en-US" sz="3200" dirty="0"/>
+          </a:p>
+        </p:txBody>
+      </p:sp>
+      <p:sp>
+        <p:nvSpPr>
+          <p:cNvPr id="15" name="Text 12"/>
+          <p:cNvSpPr/>
+          <p:nvPr/>
+        </p:nvSpPr>
+        <p:spPr>
+          <a:xfrm>
+            <a:off x="8869680" y="5675376"/>
+            <a:ext cx="2450592" cy="474726"/>
+          </a:xfrm>
+          <a:prstGeom prst="rect">
+            <a:avLst/>
+          </a:prstGeom>
+          <a:noFill/>
+          <a:ln/>
+        </p:spPr>
+        <p:txBody>
+          <a:bodyPr wrap="square" lIns="0" tIns="0" rIns="0" bIns="0" rtlCol="0" anchor="t"/>
+          <a:lstStyle/>
+          <a:p>
+            <a:pPr indent="0" marL="0">
+              <a:buNone/>
+            </a:pPr>
+            <a:r>
+              <a:rPr lang="en-US" sz="1200" b="1" dirty="0">
+                <a:solidFill>
+                  <a:srgbClr val="58584F"/>
+                </a:solidFill>
+                <a:latin typeface="Calibri" pitchFamily="34" charset="0"/>
+                <a:ea typeface="Calibri" pitchFamily="34" charset="-122"/>
+                <a:cs typeface="Calibri" pitchFamily="34" charset="-120"/>
+              </a:rPr>
+              <a:t>Code reviews completed</a:t>
+            </a:r>
+            <a:endParaRPr lang="en-US" sz="1200" dirty="0"/>
+          </a:p>
+        </p:txBody>
+      </p:sp>
+    </p:spTree>
+  </p:cSld>
+  <p:clrMapOvr>
+    <a:masterClrMapping/>
+  </p:clrMapOvr>
+</p:sld>
+</file>
+
+<file path=ppt/slides/slide11.xml><?xml version="1.0" encoding="utf-8"?>
+<p:sld xmlns:a="http://schemas.openxmlformats.org/drawingml/2006/main" xmlns:r="http://schemas.openxmlformats.org/officeDocument/2006/relationships" xmlns:p="http://schemas.openxmlformats.org/presentationml/2006/main">
+  <p:cSld name="Slide 11">
+    <p:bg>
+      <p:bgPr>
+        <a:solidFill>
+          <a:srgbClr val="FFFFFF"/>
+        </a:solidFill>
+      </p:bgPr>
+    </p:bg>
+    <p:spTree>
+      <p:nvGrpSpPr>
+        <p:cNvPr id="1" name=""/>
+        <p:cNvGrpSpPr/>
+        <p:nvPr/>
+      </p:nvGrpSpPr>
+      <p:grpSpPr>
+        <a:xfrm>
+          <a:off x="0" y="0"/>
+          <a:ext cx="0" cy="0"/>
+          <a:chOff x="0" y="0"/>
+          <a:chExt cx="0" cy="0"/>
+        </a:xfrm>
+      </p:grpSpPr>
+      <p:sp>
+        <p:nvSpPr>
+          <p:cNvPr id="2" name="Text 0"/>
+          <p:cNvSpPr/>
+          <p:nvPr/>
+        </p:nvSpPr>
+        <p:spPr>
+          <a:xfrm>
+            <a:off x="640080" y="502920"/>
+            <a:ext cx="10881360" cy="320040"/>
+          </a:xfrm>
+          <a:prstGeom prst="rect">
+            <a:avLst/>
+          </a:prstGeom>
+          <a:noFill/>
+          <a:ln/>
+        </p:spPr>
+        <p:txBody>
+          <a:bodyPr wrap="square" lIns="0" tIns="0" rIns="0" bIns="0" rtlCol="0" anchor="ctr"/>
+          <a:lstStyle/>
+          <a:p>
+            <a:pPr indent="0" marL="0">
+              <a:buNone/>
+            </a:pPr>
+            <a:r>
+              <a:rPr lang="en-US" sz="1300" b="1" dirty="0">
+                <a:solidFill>
+                  <a:srgbClr val="A8CC3A"/>
+                </a:solidFill>
+                <a:latin typeface="Calibri" pitchFamily="34" charset="0"/>
+                <a:ea typeface="Calibri" pitchFamily="34" charset="-122"/>
+                <a:cs typeface="Calibri" pitchFamily="34" charset="-120"/>
+              </a:rPr>
+              <a:t>Looking Ahead</a:t>
+            </a:r>
+            <a:endParaRPr lang="en-US" sz="1300" dirty="0"/>
+          </a:p>
+        </p:txBody>
+      </p:sp>
+      <p:sp>
+        <p:nvSpPr>
+          <p:cNvPr id="3" name="Text 1"/>
+          <p:cNvSpPr/>
+          <p:nvPr/>
+        </p:nvSpPr>
+        <p:spPr>
+          <a:xfrm>
+            <a:off x="640080" y="822960"/>
+            <a:ext cx="10881360" cy="685800"/>
+          </a:xfrm>
+          <a:prstGeom prst="rect">
+            <a:avLst/>
+          </a:prstGeom>
+          <a:noFill/>
+          <a:ln/>
+        </p:spPr>
+        <p:txBody>
+          <a:bodyPr wrap="square" lIns="0" tIns="0" rIns="0" bIns="0" rtlCol="0" anchor="ctr">
+            <a:normAutofit/>
+          </a:bodyPr>
+          <a:lstStyle/>
+          <a:p>
+            <a:pPr indent="0" marL="0">
+              <a:buNone/>
+            </a:pPr>
+            <a:r>
+              <a:rPr lang="en-US" sz="3000" b="1" dirty="0">
+                <a:solidFill>
+                  <a:srgbClr val="141412"/>
+                </a:solidFill>
+                <a:latin typeface="Cambria" pitchFamily="34" charset="0"/>
+                <a:ea typeface="Cambria" pitchFamily="34" charset="-122"/>
+                <a:cs typeface="Cambria" pitchFamily="34" charset="-120"/>
+              </a:rPr>
+              <a:t>Next Week's Plan</a:t>
+            </a:r>
+            <a:endParaRPr lang="en-US" sz="3000" dirty="0"/>
+          </a:p>
+        </p:txBody>
+      </p:sp>
+      <p:graphicFrame>
+        <p:nvGraphicFramePr>
+          <p:cNvPr id="12" name="Table 0"/>
           <p:cNvGraphicFramePr>
             <a:graphicFrameLocks noGrp="1"/>
           </p:cNvGraphicFramePr>
@@ -5393,9 +5988,9 @@
 </p:sld>
 </file>
 
-<file path=ppt/slides/slide11.xml><?xml version="1.0" encoding="utf-8"?>
+<file path=ppt/slides/slide12.xml><?xml version="1.0" encoding="utf-8"?>
 <p:sld xmlns:a="http://schemas.openxmlformats.org/drawingml/2006/main" xmlns:r="http://schemas.openxmlformats.org/officeDocument/2006/relationships" xmlns:p="http://schemas.openxmlformats.org/presentationml/2006/main">
-  <p:cSld name="Slide 11">
+  <p:cSld name="Slide 12">
     <p:bg>
       <p:bgPr>
         <a:solidFill>
@@ -5419,7 +6014,7 @@
       </p:grpSpPr>
       <p:pic>
         <p:nvPicPr>
-          <p:cNvPr id="2" name="Image 0" descr="/var/folders/lw/rmylcyvd5rjfxk9g1z9rrm8w0000gq/T/showship-deck-JidNvZ/logo_trimmed.png">    </p:cNvPr>
+          <p:cNvPr id="2" name="Image 0" descr="/var/folders/lw/rmylcyvd5rjfxk9g1z9rrm8w0000gq/T/showship-deck-WqaFdu/logo_trimmed.png">    </p:cNvPr>
           <p:cNvPicPr>
             <a:picLocks noChangeAspect="1"/>
           </p:cNvPicPr>
@@ -5445,7 +6040,7 @@
       </p:pic>
       <p:pic>
         <p:nvPicPr>
-          <p:cNvPr id="3" name="Image 1" descr="/var/folders/lw/rmylcyvd5rjfxk9g1z9rrm8w0000gq/T/showship-deck-JidNvZ/logo_trimmed.png">    </p:cNvPr>
+          <p:cNvPr id="3" name="Image 1" descr="/var/folders/lw/rmylcyvd5rjfxk9g1z9rrm8w0000gq/T/showship-deck-WqaFdu/logo_trimmed.png">    </p:cNvPr>
           <p:cNvPicPr>
             <a:picLocks noChangeAspect="1"/>
           </p:cNvPicPr>
@@ -9235,7 +9830,7 @@
                 <a:ea typeface="Calibri" pitchFamily="34" charset="-122"/>
                 <a:cs typeface="Calibri" pitchFamily="34" charset="-120"/>
               </a:rPr>
-              <a:t>Quality · Code Review</a:t>
+              <a:t>ClinicBook · Patient App</a:t>
             </a:r>
             <a:endParaRPr lang="en-US" sz="1300" dirty="0"/>
           </a:p>
@@ -9276,7 +9871,7 @@
                 <a:ea typeface="Cambria" pitchFamily="34" charset="-122"/>
                 <a:cs typeface="Cambria" pitchFamily="34" charset="-120"/>
               </a:rPr>
-              <a:t>Quality Check: Issues Caught Before Release</a:t>
+              <a:t>ClinicBook: What Was Done on Each Task</a:t>
             </a:r>
             <a:endParaRPr lang="en-US" sz="2800" dirty="0"/>
           </a:p>
@@ -9291,313 +9886,11 @@
         <p:spPr>
           <a:xfrm>
             <a:off x="640080" y="1783080"/>
-            <a:ext cx="3017520" cy="4434840"/>
+            <a:ext cx="3453384" cy="4160520"/>
           </a:xfrm>
           <a:prstGeom prst="roundRect">
             <a:avLst>
-              <a:gd name="adj" fmla="val 2424"/>
-            </a:avLst>
-          </a:prstGeom>
-          <a:solidFill>
-            <a:srgbClr val="141412"/>
-          </a:solidFill>
-          <a:ln/>
-        </p:spPr>
-      </p:sp>
-      <p:sp>
-        <p:nvSpPr>
-          <p:cNvPr id="5" name="Text 3"/>
-          <p:cNvSpPr/>
-          <p:nvPr/>
-        </p:nvSpPr>
-        <p:spPr>
-          <a:xfrm>
-            <a:off x="914400" y="2011680"/>
-            <a:ext cx="2468880" cy="769010"/>
-          </a:xfrm>
-          <a:prstGeom prst="rect">
-            <a:avLst/>
-          </a:prstGeom>
-          <a:noFill/>
-          <a:ln/>
-        </p:spPr>
-        <p:txBody>
-          <a:bodyPr wrap="square" lIns="0" tIns="0" rIns="0" bIns="0" rtlCol="0" anchor="b"/>
-          <a:lstStyle/>
-          <a:p>
-            <a:pPr indent="0" marL="0">
-              <a:buNone/>
-            </a:pPr>
-            <a:r>
-              <a:rPr lang="en-US" sz="3400" b="1" dirty="0">
-                <a:solidFill>
-                  <a:srgbClr val="A8CC3A"/>
-                </a:solidFill>
-                <a:latin typeface="Cambria" pitchFamily="34" charset="0"/>
-                <a:ea typeface="Cambria" pitchFamily="34" charset="-122"/>
-                <a:cs typeface="Cambria" pitchFamily="34" charset="-120"/>
-              </a:rPr>
-              <a:t>3</a:t>
-            </a:r>
-            <a:endParaRPr lang="en-US" sz="3400" dirty="0"/>
-          </a:p>
-        </p:txBody>
-      </p:sp>
-      <p:sp>
-        <p:nvSpPr>
-          <p:cNvPr id="6" name="Text 4"/>
-          <p:cNvSpPr/>
-          <p:nvPr/>
-        </p:nvSpPr>
-        <p:spPr>
-          <a:xfrm>
-            <a:off x="914400" y="2807208"/>
-            <a:ext cx="2468880" cy="477317"/>
-          </a:xfrm>
-          <a:prstGeom prst="rect">
-            <a:avLst/>
-          </a:prstGeom>
-          <a:noFill/>
-          <a:ln/>
-        </p:spPr>
-        <p:txBody>
-          <a:bodyPr wrap="square" lIns="0" tIns="0" rIns="0" bIns="0" rtlCol="0" anchor="t"/>
-          <a:lstStyle/>
-          <a:p>
-            <a:pPr indent="0" marL="0">
-              <a:buNone/>
-            </a:pPr>
-            <a:r>
-              <a:rPr lang="en-US" sz="1200" b="1" dirty="0">
-                <a:solidFill>
-                  <a:srgbClr val="D8D8D2"/>
-                </a:solidFill>
-                <a:latin typeface="Calibri" pitchFamily="34" charset="0"/>
-                <a:ea typeface="Calibri" pitchFamily="34" charset="-122"/>
-                <a:cs typeface="Calibri" pitchFamily="34" charset="-120"/>
-              </a:rPr>
-              <a:t>Features reviewed this week</a:t>
-            </a:r>
-            <a:endParaRPr lang="en-US" sz="1200" dirty="0"/>
-          </a:p>
-        </p:txBody>
-      </p:sp>
-      <p:sp>
-        <p:nvSpPr>
-          <p:cNvPr id="7" name="Shape 5"/>
-          <p:cNvSpPr/>
-          <p:nvPr/>
-        </p:nvSpPr>
-        <p:spPr>
-          <a:xfrm>
-            <a:off x="914400" y="3319272"/>
-            <a:ext cx="2468880" cy="0"/>
-          </a:xfrm>
-          <a:prstGeom prst="line">
-            <a:avLst/>
-          </a:prstGeom>
-          <a:noFill/>
-          <a:ln w="9525">
-            <a:solidFill>
-              <a:srgbClr val="3A3A34"/>
-            </a:solidFill>
-            <a:prstDash val="solid"/>
-          </a:ln>
-        </p:spPr>
-      </p:sp>
-      <p:sp>
-        <p:nvSpPr>
-          <p:cNvPr id="8" name="Text 6"/>
-          <p:cNvSpPr/>
-          <p:nvPr/>
-        </p:nvSpPr>
-        <p:spPr>
-          <a:xfrm>
-            <a:off x="914400" y="3337560"/>
-            <a:ext cx="2468880" cy="769010"/>
-          </a:xfrm>
-          <a:prstGeom prst="rect">
-            <a:avLst/>
-          </a:prstGeom>
-          <a:noFill/>
-          <a:ln/>
-        </p:spPr>
-        <p:txBody>
-          <a:bodyPr wrap="square" lIns="0" tIns="0" rIns="0" bIns="0" rtlCol="0" anchor="b"/>
-          <a:lstStyle/>
-          <a:p>
-            <a:pPr indent="0" marL="0">
-              <a:buNone/>
-            </a:pPr>
-            <a:r>
-              <a:rPr lang="en-US" sz="3400" b="1" dirty="0">
-                <a:solidFill>
-                  <a:srgbClr val="FFFFFF"/>
-                </a:solidFill>
-                <a:latin typeface="Cambria" pitchFamily="34" charset="0"/>
-                <a:ea typeface="Cambria" pitchFamily="34" charset="-122"/>
-                <a:cs typeface="Cambria" pitchFamily="34" charset="-120"/>
-              </a:rPr>
-              <a:t>2</a:t>
-            </a:r>
-            <a:endParaRPr lang="en-US" sz="3400" dirty="0"/>
-          </a:p>
-        </p:txBody>
-      </p:sp>
-      <p:sp>
-        <p:nvSpPr>
-          <p:cNvPr id="9" name="Text 7"/>
-          <p:cNvSpPr/>
-          <p:nvPr/>
-        </p:nvSpPr>
-        <p:spPr>
-          <a:xfrm>
-            <a:off x="914400" y="4133088"/>
-            <a:ext cx="2468880" cy="477317"/>
-          </a:xfrm>
-          <a:prstGeom prst="rect">
-            <a:avLst/>
-          </a:prstGeom>
-          <a:noFill/>
-          <a:ln/>
-        </p:spPr>
-        <p:txBody>
-          <a:bodyPr wrap="square" lIns="0" tIns="0" rIns="0" bIns="0" rtlCol="0" anchor="t"/>
-          <a:lstStyle/>
-          <a:p>
-            <a:pPr indent="0" marL="0">
-              <a:buNone/>
-            </a:pPr>
-            <a:r>
-              <a:rPr lang="en-US" sz="1200" b="1" dirty="0">
-                <a:solidFill>
-                  <a:srgbClr val="D8D8D2"/>
-                </a:solidFill>
-                <a:latin typeface="Calibri" pitchFamily="34" charset="0"/>
-                <a:ea typeface="Calibri" pitchFamily="34" charset="-122"/>
-                <a:cs typeface="Calibri" pitchFamily="34" charset="-120"/>
-              </a:rPr>
-              <a:t>Approved for release</a:t>
-            </a:r>
-            <a:endParaRPr lang="en-US" sz="1200" dirty="0"/>
-          </a:p>
-        </p:txBody>
-      </p:sp>
-      <p:sp>
-        <p:nvSpPr>
-          <p:cNvPr id="10" name="Shape 8"/>
-          <p:cNvSpPr/>
-          <p:nvPr/>
-        </p:nvSpPr>
-        <p:spPr>
-          <a:xfrm>
-            <a:off x="914400" y="4645152"/>
-            <a:ext cx="2468880" cy="0"/>
-          </a:xfrm>
-          <a:prstGeom prst="line">
-            <a:avLst/>
-          </a:prstGeom>
-          <a:noFill/>
-          <a:ln w="9525">
-            <a:solidFill>
-              <a:srgbClr val="3A3A34"/>
-            </a:solidFill>
-            <a:prstDash val="solid"/>
-          </a:ln>
-        </p:spPr>
-      </p:sp>
-      <p:sp>
-        <p:nvSpPr>
-          <p:cNvPr id="11" name="Text 9"/>
-          <p:cNvSpPr/>
-          <p:nvPr/>
-        </p:nvSpPr>
-        <p:spPr>
-          <a:xfrm>
-            <a:off x="914400" y="4663440"/>
-            <a:ext cx="2468880" cy="769010"/>
-          </a:xfrm>
-          <a:prstGeom prst="rect">
-            <a:avLst/>
-          </a:prstGeom>
-          <a:noFill/>
-          <a:ln/>
-        </p:spPr>
-        <p:txBody>
-          <a:bodyPr wrap="square" lIns="0" tIns="0" rIns="0" bIns="0" rtlCol="0" anchor="b"/>
-          <a:lstStyle/>
-          <a:p>
-            <a:pPr indent="0" marL="0">
-              <a:buNone/>
-            </a:pPr>
-            <a:r>
-              <a:rPr lang="en-US" sz="3400" b="1" dirty="0">
-                <a:solidFill>
-                  <a:srgbClr val="FFFFFF"/>
-                </a:solidFill>
-                <a:latin typeface="Cambria" pitchFamily="34" charset="0"/>
-                <a:ea typeface="Cambria" pitchFamily="34" charset="-122"/>
-                <a:cs typeface="Cambria" pitchFamily="34" charset="-120"/>
-              </a:rPr>
-              <a:t>212</a:t>
-            </a:r>
-            <a:endParaRPr lang="en-US" sz="3400" dirty="0"/>
-          </a:p>
-        </p:txBody>
-      </p:sp>
-      <p:sp>
-        <p:nvSpPr>
-          <p:cNvPr id="12" name="Text 10"/>
-          <p:cNvSpPr/>
-          <p:nvPr/>
-        </p:nvSpPr>
-        <p:spPr>
-          <a:xfrm>
-            <a:off x="914400" y="5458968"/>
-            <a:ext cx="2468880" cy="477317"/>
-          </a:xfrm>
-          <a:prstGeom prst="rect">
-            <a:avLst/>
-          </a:prstGeom>
-          <a:noFill/>
-          <a:ln/>
-        </p:spPr>
-        <p:txBody>
-          <a:bodyPr wrap="square" lIns="0" tIns="0" rIns="0" bIns="0" rtlCol="0" anchor="t"/>
-          <a:lstStyle/>
-          <a:p>
-            <a:pPr indent="0" marL="0">
-              <a:buNone/>
-            </a:pPr>
-            <a:r>
-              <a:rPr lang="en-US" sz="1200" b="1" dirty="0">
-                <a:solidFill>
-                  <a:srgbClr val="D8D8D2"/>
-                </a:solidFill>
-                <a:latin typeface="Calibri" pitchFamily="34" charset="0"/>
-                <a:ea typeface="Calibri" pitchFamily="34" charset="-122"/>
-                <a:cs typeface="Calibri" pitchFamily="34" charset="-120"/>
-              </a:rPr>
-              <a:t>Automated tests passing (100%)</a:t>
-            </a:r>
-            <a:endParaRPr lang="en-US" sz="1200" dirty="0"/>
-          </a:p>
-        </p:txBody>
-      </p:sp>
-      <p:sp>
-        <p:nvSpPr>
-          <p:cNvPr id="13" name="Shape 11"/>
-          <p:cNvSpPr/>
-          <p:nvPr/>
-        </p:nvSpPr>
-        <p:spPr>
-          <a:xfrm>
-            <a:off x="3977640" y="1783080"/>
-            <a:ext cx="7571232" cy="4434840"/>
-          </a:xfrm>
-          <a:prstGeom prst="roundRect">
-            <a:avLst>
-              <a:gd name="adj" fmla="val 1649"/>
+              <a:gd name="adj" fmla="val 2118"/>
             </a:avLst>
           </a:prstGeom>
           <a:solidFill>
@@ -9615,117 +9908,14 @@
       </p:sp>
       <p:sp>
         <p:nvSpPr>
-          <p:cNvPr id="14" name="Shape 12"/>
-          <p:cNvSpPr/>
-          <p:nvPr/>
-        </p:nvSpPr>
-        <p:spPr>
-          <a:xfrm>
-            <a:off x="4206240" y="2084832"/>
-            <a:ext cx="64008" cy="984504"/>
-          </a:xfrm>
-          <a:prstGeom prst="rect">
-            <a:avLst/>
-          </a:prstGeom>
-          <a:solidFill>
-            <a:srgbClr val="A8CC3A"/>
-          </a:solidFill>
-          <a:ln/>
-        </p:spPr>
-      </p:sp>
-      <p:sp>
-        <p:nvSpPr>
-          <p:cNvPr id="15" name="Text 13"/>
-          <p:cNvSpPr/>
-          <p:nvPr/>
-        </p:nvSpPr>
-        <p:spPr>
-          <a:xfrm>
-            <a:off x="4389120" y="2048256"/>
-            <a:ext cx="5285232" cy="256032"/>
-          </a:xfrm>
-          <a:prstGeom prst="rect">
-            <a:avLst/>
-          </a:prstGeom>
-          <a:noFill/>
-          <a:ln/>
-        </p:spPr>
-        <p:txBody>
-          <a:bodyPr wrap="square" lIns="0" tIns="0" rIns="0" bIns="0" rtlCol="0" anchor="ctr"/>
-          <a:lstStyle/>
-          <a:p>
-            <a:pPr indent="0" marL="0">
-              <a:buNone/>
-            </a:pPr>
-            <a:r>
-              <a:rPr lang="en-US" sz="1100" b="1" dirty="0">
-                <a:solidFill>
-                  <a:srgbClr val="58584F"/>
-                </a:solidFill>
-                <a:latin typeface="Calibri" pitchFamily="34" charset="0"/>
-                <a:ea typeface="Calibri" pitchFamily="34" charset="-122"/>
-                <a:cs typeface="Calibri" pitchFamily="34" charset="-120"/>
-              </a:rPr>
-              <a:t>Appointment Reminders</a:t>
-            </a:r>
-            <a:endParaRPr lang="en-US" sz="1100" dirty="0"/>
-          </a:p>
-        </p:txBody>
-      </p:sp>
-      <p:sp>
-        <p:nvSpPr>
-          <p:cNvPr id="16" name="Text 14"/>
-          <p:cNvSpPr/>
-          <p:nvPr/>
-        </p:nvSpPr>
-        <p:spPr>
-          <a:xfrm>
-            <a:off x="4389120" y="2304288"/>
-            <a:ext cx="5376672" cy="801624"/>
-          </a:xfrm>
-          <a:prstGeom prst="rect">
-            <a:avLst/>
-          </a:prstGeom>
-          <a:noFill/>
-          <a:ln/>
-        </p:spPr>
-        <p:txBody>
-          <a:bodyPr wrap="square" lIns="0" tIns="0" rIns="0" bIns="0" rtlCol="0" anchor="t">
-            <a:normAutofit/>
-          </a:bodyPr>
-          <a:lstStyle/>
-          <a:p>
-            <a:pPr indent="0" marL="0">
-              <a:lnSpc>
-                <a:spcPct val="115000"/>
-              </a:lnSpc>
-              <a:buNone/>
-            </a:pPr>
-            <a:r>
-              <a:rPr lang="en-US" sz="1250" dirty="0">
-                <a:solidFill>
-                  <a:srgbClr val="141412"/>
-                </a:solidFill>
-                <a:latin typeface="Calibri" pitchFamily="34" charset="0"/>
-                <a:ea typeface="Calibri" pitchFamily="34" charset="-122"/>
-                <a:cs typeface="Calibri" pitchFamily="34" charset="-120"/>
-              </a:rPr>
-              <a:t>Clinics can send SMS and email reminders 24 hours and 2 hours before each appointment.</a:t>
-            </a:r>
-            <a:endParaRPr lang="en-US" sz="1250" dirty="0"/>
-          </a:p>
-        </p:txBody>
-      </p:sp>
-      <p:sp>
-        <p:nvSpPr>
-          <p:cNvPr id="17" name="Shape 15"/>
-          <p:cNvSpPr/>
-          <p:nvPr/>
-        </p:nvSpPr>
-        <p:spPr>
-          <a:xfrm>
-            <a:off x="10479024" y="2066544"/>
-            <a:ext cx="841248" cy="292608"/>
+          <p:cNvPr id="5" name="Shape 3"/>
+          <p:cNvSpPr/>
+          <p:nvPr/>
+        </p:nvSpPr>
+        <p:spPr>
+          <a:xfrm>
+            <a:off x="868680" y="1965960"/>
+            <a:ext cx="1074420" cy="292608"/>
           </a:xfrm>
           <a:prstGeom prst="roundRect">
             <a:avLst>
@@ -9733,21 +9923,21 @@
             </a:avLst>
           </a:prstGeom>
           <a:solidFill>
-            <a:srgbClr val="A8CC3A"/>
+            <a:srgbClr val="D6E6A0"/>
           </a:solidFill>
           <a:ln/>
         </p:spPr>
       </p:sp>
       <p:sp>
         <p:nvSpPr>
-          <p:cNvPr id="18" name="Text 16"/>
-          <p:cNvSpPr/>
-          <p:nvPr/>
-        </p:nvSpPr>
-        <p:spPr>
-          <a:xfrm>
-            <a:off x="10479024" y="2066544"/>
-            <a:ext cx="841248" cy="292608"/>
+          <p:cNvPr id="6" name="Text 4"/>
+          <p:cNvSpPr/>
+          <p:nvPr/>
+        </p:nvSpPr>
+        <p:spPr>
+          <a:xfrm>
+            <a:off x="868680" y="1965960"/>
+            <a:ext cx="1074420" cy="292608"/>
           </a:xfrm>
           <a:prstGeom prst="rect">
             <a:avLst/>
@@ -9771,7 +9961,7 @@
                 <a:ea typeface="Calibri" pitchFamily="34" charset="-122"/>
                 <a:cs typeface="Calibri" pitchFamily="34" charset="-120"/>
               </a:rPr>
-              <a:t>Verified</a:t>
+              <a:t>In progress</a:t>
             </a:r>
             <a:endParaRPr lang="en-US" sz="1100" dirty="0"/>
           </a:p>
@@ -9779,34 +9969,53 @@
       </p:sp>
       <p:sp>
         <p:nvSpPr>
-          <p:cNvPr id="19" name="Shape 17"/>
-          <p:cNvSpPr/>
-          <p:nvPr/>
-        </p:nvSpPr>
-        <p:spPr>
-          <a:xfrm>
-            <a:off x="4206240" y="3325368"/>
-            <a:ext cx="64008" cy="984504"/>
-          </a:xfrm>
-          <a:prstGeom prst="rect">
-            <a:avLst/>
-          </a:prstGeom>
-          <a:solidFill>
-            <a:srgbClr val="D6E6A0"/>
-          </a:solidFill>
-          <a:ln/>
-        </p:spPr>
-      </p:sp>
-      <p:sp>
-        <p:nvSpPr>
-          <p:cNvPr id="20" name="Text 18"/>
-          <p:cNvSpPr/>
-          <p:nvPr/>
-        </p:nvSpPr>
-        <p:spPr>
-          <a:xfrm>
-            <a:off x="4389120" y="3288792"/>
-            <a:ext cx="5285232" cy="256032"/>
+          <p:cNvPr id="7" name="Text 5"/>
+          <p:cNvSpPr/>
+          <p:nvPr/>
+        </p:nvSpPr>
+        <p:spPr>
+          <a:xfrm>
+            <a:off x="868680" y="2313432"/>
+            <a:ext cx="2996184" cy="238125"/>
+          </a:xfrm>
+          <a:prstGeom prst="rect">
+            <a:avLst/>
+          </a:prstGeom>
+          <a:noFill/>
+          <a:ln/>
+        </p:spPr>
+        <p:txBody>
+          <a:bodyPr wrap="square" lIns="0" tIns="0" rIns="0" bIns="0" rtlCol="0" anchor="t"/>
+          <a:lstStyle/>
+          <a:p>
+            <a:pPr indent="0" marL="0">
+              <a:buNone/>
+            </a:pPr>
+            <a:r>
+              <a:rPr lang="en-US" sz="1500" b="1" dirty="0">
+                <a:solidFill>
+                  <a:srgbClr val="141412"/>
+                </a:solidFill>
+                <a:latin typeface="Cambria" pitchFamily="34" charset="0"/>
+                <a:ea typeface="Cambria" pitchFamily="34" charset="-122"/>
+                <a:cs typeface="Cambria" pitchFamily="34" charset="-120"/>
+              </a:rPr>
+              <a:t>P3 · Booking Calendar</a:t>
+            </a:r>
+            <a:endParaRPr lang="en-US" sz="1500" dirty="0"/>
+          </a:p>
+        </p:txBody>
+      </p:sp>
+      <p:sp>
+        <p:nvSpPr>
+          <p:cNvPr id="8" name="Text 6"/>
+          <p:cNvSpPr/>
+          <p:nvPr/>
+        </p:nvSpPr>
+        <p:spPr>
+          <a:xfrm>
+            <a:off x="868680" y="2597277"/>
+            <a:ext cx="2996184" cy="228600"/>
           </a:xfrm>
           <a:prstGeom prst="rect">
             <a:avLst/>
@@ -9822,7 +10031,7 @@
               <a:buNone/>
             </a:pPr>
             <a:r>
-              <a:rPr lang="en-US" sz="1100" b="1" dirty="0">
+              <a:rPr lang="en-US" sz="1100" dirty="0">
                 <a:solidFill>
                   <a:srgbClr val="58584F"/>
                 </a:solidFill>
@@ -9830,7 +10039,7 @@
                 <a:ea typeface="Calibri" pitchFamily="34" charset="-122"/>
                 <a:cs typeface="Calibri" pitchFamily="34" charset="-120"/>
               </a:rPr>
-              <a:t>Reliability</a:t>
+              <a:t>Owner: Leo Park @Leo</a:t>
             </a:r>
             <a:endParaRPr lang="en-US" sz="1100" dirty="0"/>
           </a:p>
@@ -9838,47 +10047,414 @@
       </p:sp>
       <p:sp>
         <p:nvSpPr>
-          <p:cNvPr id="21" name="Text 19"/>
-          <p:cNvSpPr/>
-          <p:nvPr/>
-        </p:nvSpPr>
-        <p:spPr>
-          <a:xfrm>
-            <a:off x="4389120" y="3544824"/>
-            <a:ext cx="5376672" cy="801624"/>
-          </a:xfrm>
-          <a:prstGeom prst="rect">
-            <a:avLst/>
-          </a:prstGeom>
-          <a:noFill/>
-          <a:ln/>
-        </p:spPr>
-        <p:txBody>
-          <a:bodyPr wrap="square" lIns="0" tIns="0" rIns="0" bIns="0" rtlCol="0" anchor="t">
-            <a:normAutofit/>
-          </a:bodyPr>
+          <p:cNvPr id="9" name="Text 7"/>
+          <p:cNvSpPr/>
+          <p:nvPr/>
+        </p:nvSpPr>
+        <p:spPr>
+          <a:xfrm>
+            <a:off x="868680" y="2871597"/>
+            <a:ext cx="2996184" cy="792480"/>
+          </a:xfrm>
+          <a:prstGeom prst="rect">
+            <a:avLst/>
+          </a:prstGeom>
+          <a:noFill/>
+          <a:ln/>
+        </p:spPr>
+        <p:txBody>
+          <a:bodyPr wrap="square" lIns="0" tIns="0" rIns="0" bIns="0" rtlCol="0" anchor="t"/>
           <a:lstStyle/>
           <a:p>
             <a:pPr indent="0" marL="0">
               <a:lnSpc>
-                <a:spcPct val="115000"/>
+                <a:spcPct val="110000"/>
               </a:lnSpc>
               <a:buNone/>
             </a:pPr>
             <a:r>
-              <a:rPr lang="en-US" sz="1250" dirty="0">
-                <a:solidFill>
-                  <a:srgbClr val="141412"/>
+              <a:rPr lang="en-US" sz="1200" dirty="0">
+                <a:solidFill>
+                  <a:srgbClr val="58584F"/>
                 </a:solidFill>
                 <a:latin typeface="Calibri" pitchFamily="34" charset="0"/>
                 <a:ea typeface="Calibri" pitchFamily="34" charset="-122"/>
                 <a:cs typeface="Calibri" pitchFamily="34" charset="-120"/>
               </a:rPr>
-              <a:t>A patient could receive the same reminder twice if sending is retried. Small fix identified.</a:t>
-            </a:r>
-            <a:endParaRPr lang="en-US" sz="1250" dirty="0"/>
-          </a:p>
-        </p:txBody>
+              <a:t>Patients pick a doctor, a day and a time slot in one screen. Free slots update as other patients book, so nobody is offered a time that is already taken.</a:t>
+            </a:r>
+            <a:endParaRPr lang="en-US" sz="1200" dirty="0"/>
+          </a:p>
+        </p:txBody>
+      </p:sp>
+      <p:sp>
+        <p:nvSpPr>
+          <p:cNvPr id="10" name="Text 8"/>
+          <p:cNvSpPr/>
+          <p:nvPr/>
+        </p:nvSpPr>
+        <p:spPr>
+          <a:xfrm>
+            <a:off x="868680" y="3801237"/>
+            <a:ext cx="2996184" cy="228600"/>
+          </a:xfrm>
+          <a:prstGeom prst="rect">
+            <a:avLst/>
+          </a:prstGeom>
+          <a:noFill/>
+          <a:ln/>
+        </p:spPr>
+        <p:txBody>
+          <a:bodyPr wrap="square" lIns="0" tIns="0" rIns="0" bIns="0" rtlCol="0" anchor="ctr"/>
+          <a:lstStyle/>
+          <a:p>
+            <a:pPr indent="0" marL="0">
+              <a:buNone/>
+            </a:pPr>
+            <a:r>
+              <a:rPr lang="en-US" sz="1100" b="1" dirty="0">
+                <a:solidFill>
+                  <a:srgbClr val="58584F"/>
+                </a:solidFill>
+                <a:latin typeface="Calibri" pitchFamily="34" charset="0"/>
+                <a:ea typeface="Calibri" pitchFamily="34" charset="-122"/>
+                <a:cs typeface="Calibri" pitchFamily="34" charset="-120"/>
+              </a:rPr>
+              <a:t>Details</a:t>
+            </a:r>
+            <a:endParaRPr lang="en-US" sz="1100" dirty="0"/>
+          </a:p>
+        </p:txBody>
+      </p:sp>
+      <p:sp>
+        <p:nvSpPr>
+          <p:cNvPr id="11" name="Shape 9"/>
+          <p:cNvSpPr/>
+          <p:nvPr/>
+        </p:nvSpPr>
+        <p:spPr>
+          <a:xfrm>
+            <a:off x="868680" y="4130421"/>
+            <a:ext cx="118872" cy="118872"/>
+          </a:xfrm>
+          <a:prstGeom prst="ellipse">
+            <a:avLst/>
+          </a:prstGeom>
+          <a:solidFill>
+            <a:srgbClr val="A8CC3A"/>
+          </a:solidFill>
+          <a:ln/>
+        </p:spPr>
+      </p:sp>
+      <p:sp>
+        <p:nvSpPr>
+          <p:cNvPr id="12" name="Text 10"/>
+          <p:cNvSpPr/>
+          <p:nvPr/>
+        </p:nvSpPr>
+        <p:spPr>
+          <a:xfrm>
+            <a:off x="1115568" y="4075557"/>
+            <a:ext cx="2749296" cy="222504"/>
+          </a:xfrm>
+          <a:prstGeom prst="rect">
+            <a:avLst/>
+          </a:prstGeom>
+          <a:noFill/>
+          <a:ln/>
+        </p:spPr>
+        <p:txBody>
+          <a:bodyPr wrap="square" lIns="0" tIns="0" rIns="0" bIns="0" rtlCol="0" anchor="t"/>
+          <a:lstStyle/>
+          <a:p>
+            <a:pPr indent="0" marL="0">
+              <a:buNone/>
+            </a:pPr>
+            <a:r>
+              <a:rPr lang="en-US" sz="1100" dirty="0">
+                <a:solidFill>
+                  <a:srgbClr val="141412"/>
+                </a:solidFill>
+                <a:latin typeface="Calibri" pitchFamily="34" charset="0"/>
+                <a:ea typeface="Calibri" pitchFamily="34" charset="-122"/>
+                <a:cs typeface="Calibri" pitchFamily="34" charset="-120"/>
+              </a:rPr>
+              <a:t>Doctor and day picker built</a:t>
+            </a:r>
+            <a:endParaRPr lang="en-US" sz="1100" dirty="0"/>
+          </a:p>
+        </p:txBody>
+      </p:sp>
+      <p:sp>
+        <p:nvSpPr>
+          <p:cNvPr id="13" name="Shape 11"/>
+          <p:cNvSpPr/>
+          <p:nvPr/>
+        </p:nvSpPr>
+        <p:spPr>
+          <a:xfrm>
+            <a:off x="868680" y="4352925"/>
+            <a:ext cx="118872" cy="118872"/>
+          </a:xfrm>
+          <a:prstGeom prst="ellipse">
+            <a:avLst/>
+          </a:prstGeom>
+          <a:solidFill>
+            <a:srgbClr val="A8CC3A"/>
+          </a:solidFill>
+          <a:ln/>
+        </p:spPr>
+      </p:sp>
+      <p:sp>
+        <p:nvSpPr>
+          <p:cNvPr id="14" name="Text 12"/>
+          <p:cNvSpPr/>
+          <p:nvPr/>
+        </p:nvSpPr>
+        <p:spPr>
+          <a:xfrm>
+            <a:off x="1115568" y="4298061"/>
+            <a:ext cx="2749296" cy="222504"/>
+          </a:xfrm>
+          <a:prstGeom prst="rect">
+            <a:avLst/>
+          </a:prstGeom>
+          <a:noFill/>
+          <a:ln/>
+        </p:spPr>
+        <p:txBody>
+          <a:bodyPr wrap="square" lIns="0" tIns="0" rIns="0" bIns="0" rtlCol="0" anchor="t"/>
+          <a:lstStyle/>
+          <a:p>
+            <a:pPr indent="0" marL="0">
+              <a:buNone/>
+            </a:pPr>
+            <a:r>
+              <a:rPr lang="en-US" sz="1100" dirty="0">
+                <a:solidFill>
+                  <a:srgbClr val="141412"/>
+                </a:solidFill>
+                <a:latin typeface="Calibri" pitchFamily="34" charset="0"/>
+                <a:ea typeface="Calibri" pitchFamily="34" charset="-122"/>
+                <a:cs typeface="Calibri" pitchFamily="34" charset="-120"/>
+              </a:rPr>
+              <a:t>Free time slots shown live</a:t>
+            </a:r>
+            <a:endParaRPr lang="en-US" sz="1100" dirty="0"/>
+          </a:p>
+        </p:txBody>
+      </p:sp>
+      <p:sp>
+        <p:nvSpPr>
+          <p:cNvPr id="15" name="Shape 13"/>
+          <p:cNvSpPr/>
+          <p:nvPr/>
+        </p:nvSpPr>
+        <p:spPr>
+          <a:xfrm>
+            <a:off x="868680" y="4575429"/>
+            <a:ext cx="118872" cy="118872"/>
+          </a:xfrm>
+          <a:prstGeom prst="ellipse">
+            <a:avLst/>
+          </a:prstGeom>
+          <a:ln w="19050">
+            <a:solidFill>
+              <a:srgbClr val="A8CC3A"/>
+            </a:solidFill>
+            <a:prstDash val="solid"/>
+          </a:ln>
+        </p:spPr>
+      </p:sp>
+      <p:sp>
+        <p:nvSpPr>
+          <p:cNvPr id="16" name="Text 14"/>
+          <p:cNvSpPr/>
+          <p:nvPr/>
+        </p:nvSpPr>
+        <p:spPr>
+          <a:xfrm>
+            <a:off x="1115568" y="4520565"/>
+            <a:ext cx="2749296" cy="222504"/>
+          </a:xfrm>
+          <a:prstGeom prst="rect">
+            <a:avLst/>
+          </a:prstGeom>
+          <a:noFill/>
+          <a:ln/>
+        </p:spPr>
+        <p:txBody>
+          <a:bodyPr wrap="square" lIns="0" tIns="0" rIns="0" bIns="0" rtlCol="0" anchor="t"/>
+          <a:lstStyle/>
+          <a:p>
+            <a:pPr indent="0" marL="0">
+              <a:buNone/>
+            </a:pPr>
+            <a:r>
+              <a:rPr lang="en-US" sz="1100" dirty="0">
+                <a:solidFill>
+                  <a:srgbClr val="141412"/>
+                </a:solidFill>
+                <a:latin typeface="Calibri" pitchFamily="34" charset="0"/>
+                <a:ea typeface="Calibri" pitchFamily="34" charset="-122"/>
+                <a:cs typeface="Calibri" pitchFamily="34" charset="-120"/>
+              </a:rPr>
+              <a:t>Booking confirmation screen</a:t>
+            </a:r>
+            <a:endParaRPr lang="en-US" sz="1100" dirty="0"/>
+          </a:p>
+        </p:txBody>
+      </p:sp>
+      <p:sp>
+        <p:nvSpPr>
+          <p:cNvPr id="17" name="Shape 15"/>
+          <p:cNvSpPr/>
+          <p:nvPr/>
+        </p:nvSpPr>
+        <p:spPr>
+          <a:xfrm>
+            <a:off x="868680" y="4797933"/>
+            <a:ext cx="118872" cy="118872"/>
+          </a:xfrm>
+          <a:prstGeom prst="ellipse">
+            <a:avLst/>
+          </a:prstGeom>
+          <a:ln w="19050">
+            <a:solidFill>
+              <a:srgbClr val="B8B8B4"/>
+            </a:solidFill>
+            <a:prstDash val="solid"/>
+          </a:ln>
+        </p:spPr>
+      </p:sp>
+      <p:sp>
+        <p:nvSpPr>
+          <p:cNvPr id="18" name="Text 16"/>
+          <p:cNvSpPr/>
+          <p:nvPr/>
+        </p:nvSpPr>
+        <p:spPr>
+          <a:xfrm>
+            <a:off x="1115568" y="4743069"/>
+            <a:ext cx="2749296" cy="222504"/>
+          </a:xfrm>
+          <a:prstGeom prst="rect">
+            <a:avLst/>
+          </a:prstGeom>
+          <a:noFill/>
+          <a:ln/>
+        </p:spPr>
+        <p:txBody>
+          <a:bodyPr wrap="square" lIns="0" tIns="0" rIns="0" bIns="0" rtlCol="0" anchor="t"/>
+          <a:lstStyle/>
+          <a:p>
+            <a:pPr indent="0" marL="0">
+              <a:buNone/>
+            </a:pPr>
+            <a:r>
+              <a:rPr lang="en-US" sz="1100" dirty="0">
+                <a:solidFill>
+                  <a:srgbClr val="58584F"/>
+                </a:solidFill>
+                <a:latin typeface="Calibri" pitchFamily="34" charset="0"/>
+                <a:ea typeface="Calibri" pitchFamily="34" charset="-122"/>
+                <a:cs typeface="Calibri" pitchFamily="34" charset="-120"/>
+              </a:rPr>
+              <a:t>Rescheduling an existing booking</a:t>
+            </a:r>
+            <a:endParaRPr lang="en-US" sz="1100" dirty="0"/>
+          </a:p>
+        </p:txBody>
+      </p:sp>
+      <p:sp>
+        <p:nvSpPr>
+          <p:cNvPr id="19" name="Shape 17"/>
+          <p:cNvSpPr/>
+          <p:nvPr/>
+        </p:nvSpPr>
+        <p:spPr>
+          <a:xfrm>
+            <a:off x="868680" y="5020437"/>
+            <a:ext cx="118872" cy="118872"/>
+          </a:xfrm>
+          <a:prstGeom prst="ellipse">
+            <a:avLst/>
+          </a:prstGeom>
+          <a:ln w="19050">
+            <a:solidFill>
+              <a:srgbClr val="B8B8B4"/>
+            </a:solidFill>
+            <a:prstDash val="solid"/>
+          </a:ln>
+        </p:spPr>
+      </p:sp>
+      <p:sp>
+        <p:nvSpPr>
+          <p:cNvPr id="20" name="Text 18"/>
+          <p:cNvSpPr/>
+          <p:nvPr/>
+        </p:nvSpPr>
+        <p:spPr>
+          <a:xfrm>
+            <a:off x="1115568" y="4965573"/>
+            <a:ext cx="2749296" cy="222504"/>
+          </a:xfrm>
+          <a:prstGeom prst="rect">
+            <a:avLst/>
+          </a:prstGeom>
+          <a:noFill/>
+          <a:ln/>
+        </p:spPr>
+        <p:txBody>
+          <a:bodyPr wrap="square" lIns="0" tIns="0" rIns="0" bIns="0" rtlCol="0" anchor="t"/>
+          <a:lstStyle/>
+          <a:p>
+            <a:pPr indent="0" marL="0">
+              <a:buNone/>
+            </a:pPr>
+            <a:r>
+              <a:rPr lang="en-US" sz="1100" dirty="0">
+                <a:solidFill>
+                  <a:srgbClr val="58584F"/>
+                </a:solidFill>
+                <a:latin typeface="Calibri" pitchFamily="34" charset="0"/>
+                <a:ea typeface="Calibri" pitchFamily="34" charset="-122"/>
+                <a:cs typeface="Calibri" pitchFamily="34" charset="-120"/>
+              </a:rPr>
+              <a:t>Cancellation with clinic notice</a:t>
+            </a:r>
+            <a:endParaRPr lang="en-US" sz="1100" dirty="0"/>
+          </a:p>
+        </p:txBody>
+      </p:sp>
+      <p:sp>
+        <p:nvSpPr>
+          <p:cNvPr id="21" name="Shape 19"/>
+          <p:cNvSpPr/>
+          <p:nvPr/>
+        </p:nvSpPr>
+        <p:spPr>
+          <a:xfrm>
+            <a:off x="4367784" y="1783080"/>
+            <a:ext cx="3453384" cy="4160520"/>
+          </a:xfrm>
+          <a:prstGeom prst="roundRect">
+            <a:avLst>
+              <a:gd name="adj" fmla="val 2118"/>
+            </a:avLst>
+          </a:prstGeom>
+          <a:solidFill>
+            <a:srgbClr val="F6F7F1"/>
+          </a:solidFill>
+          <a:ln/>
+          <a:effectLst>
+            <a:outerShdw sx="100000" sy="100000" kx="0" ky="0" algn="bl" rotWithShape="0" blurRad="76200" dist="25400" dir="5400000">
+              <a:srgbClr val="000000">
+                <a:alpha val="8000"/>
+              </a:srgbClr>
+            </a:outerShdw>
+          </a:effectLst>
+        </p:spPr>
       </p:sp>
       <p:sp>
         <p:nvSpPr>
@@ -9888,8 +10464,8 @@
         </p:nvSpPr>
         <p:spPr>
           <a:xfrm>
-            <a:off x="9701784" y="3307080"/>
-            <a:ext cx="1618488" cy="292608"/>
+            <a:off x="4596384" y="1965960"/>
+            <a:ext cx="918972" cy="292608"/>
           </a:xfrm>
           <a:prstGeom prst="roundRect">
             <a:avLst>
@@ -9897,7 +10473,7 @@
             </a:avLst>
           </a:prstGeom>
           <a:solidFill>
-            <a:srgbClr val="D6E6A0"/>
+            <a:srgbClr val="A8CC3A"/>
           </a:solidFill>
           <a:ln/>
         </p:spPr>
@@ -9910,8 +10486,8 @@
         </p:nvSpPr>
         <p:spPr>
           <a:xfrm>
-            <a:off x="9701784" y="3307080"/>
-            <a:ext cx="1618488" cy="292608"/>
+            <a:off x="4596384" y="1965960"/>
+            <a:ext cx="918972" cy="292608"/>
           </a:xfrm>
           <a:prstGeom prst="rect">
             <a:avLst/>
@@ -9935,7 +10511,7 @@
                 <a:ea typeface="Calibri" pitchFamily="34" charset="-122"/>
                 <a:cs typeface="Calibri" pitchFamily="34" charset="-120"/>
               </a:rPr>
-              <a:t>Fix before release</a:t>
+              <a:t>Completed</a:t>
             </a:r>
             <a:endParaRPr lang="en-US" sz="1100" dirty="0"/>
           </a:p>
@@ -9943,16 +10519,175 @@
       </p:sp>
       <p:sp>
         <p:nvSpPr>
-          <p:cNvPr id="24" name="Shape 22"/>
-          <p:cNvSpPr/>
-          <p:nvPr/>
-        </p:nvSpPr>
-        <p:spPr>
-          <a:xfrm>
-            <a:off x="4206240" y="4565904"/>
-            <a:ext cx="64008" cy="984504"/>
-          </a:xfrm>
-          <a:prstGeom prst="rect">
+          <p:cNvPr id="24" name="Text 22"/>
+          <p:cNvSpPr/>
+          <p:nvPr/>
+        </p:nvSpPr>
+        <p:spPr>
+          <a:xfrm>
+            <a:off x="4596384" y="2313432"/>
+            <a:ext cx="2996184" cy="476250"/>
+          </a:xfrm>
+          <a:prstGeom prst="rect">
+            <a:avLst/>
+          </a:prstGeom>
+          <a:noFill/>
+          <a:ln/>
+        </p:spPr>
+        <p:txBody>
+          <a:bodyPr wrap="square" lIns="0" tIns="0" rIns="0" bIns="0" rtlCol="0" anchor="t"/>
+          <a:lstStyle/>
+          <a:p>
+            <a:pPr indent="0" marL="0">
+              <a:buNone/>
+            </a:pPr>
+            <a:r>
+              <a:rPr lang="en-US" sz="1500" b="1" dirty="0">
+                <a:solidFill>
+                  <a:srgbClr val="141412"/>
+                </a:solidFill>
+                <a:latin typeface="Cambria" pitchFamily="34" charset="0"/>
+                <a:ea typeface="Cambria" pitchFamily="34" charset="-122"/>
+                <a:cs typeface="Cambria" pitchFamily="34" charset="-120"/>
+              </a:rPr>
+              <a:t>P2 · Clinic Search and Maps</a:t>
+            </a:r>
+            <a:endParaRPr lang="en-US" sz="1500" dirty="0"/>
+          </a:p>
+        </p:txBody>
+      </p:sp>
+      <p:sp>
+        <p:nvSpPr>
+          <p:cNvPr id="25" name="Text 23"/>
+          <p:cNvSpPr/>
+          <p:nvPr/>
+        </p:nvSpPr>
+        <p:spPr>
+          <a:xfrm>
+            <a:off x="4596384" y="2835402"/>
+            <a:ext cx="2996184" cy="228600"/>
+          </a:xfrm>
+          <a:prstGeom prst="rect">
+            <a:avLst/>
+          </a:prstGeom>
+          <a:noFill/>
+          <a:ln/>
+        </p:spPr>
+        <p:txBody>
+          <a:bodyPr wrap="square" lIns="0" tIns="0" rIns="0" bIns="0" rtlCol="0" anchor="ctr"/>
+          <a:lstStyle/>
+          <a:p>
+            <a:pPr indent="0" marL="0">
+              <a:buNone/>
+            </a:pPr>
+            <a:r>
+              <a:rPr lang="en-US" sz="1100" dirty="0">
+                <a:solidFill>
+                  <a:srgbClr val="58584F"/>
+                </a:solidFill>
+                <a:latin typeface="Calibri" pitchFamily="34" charset="0"/>
+                <a:ea typeface="Calibri" pitchFamily="34" charset="-122"/>
+                <a:cs typeface="Calibri" pitchFamily="34" charset="-120"/>
+              </a:rPr>
+              <a:t>Owner: Leo Park @Leo</a:t>
+            </a:r>
+            <a:endParaRPr lang="en-US" sz="1100" dirty="0"/>
+          </a:p>
+        </p:txBody>
+      </p:sp>
+      <p:sp>
+        <p:nvSpPr>
+          <p:cNvPr id="26" name="Text 24"/>
+          <p:cNvSpPr/>
+          <p:nvPr/>
+        </p:nvSpPr>
+        <p:spPr>
+          <a:xfrm>
+            <a:off x="4596384" y="3109722"/>
+            <a:ext cx="2996184" cy="792480"/>
+          </a:xfrm>
+          <a:prstGeom prst="rect">
+            <a:avLst/>
+          </a:prstGeom>
+          <a:noFill/>
+          <a:ln/>
+        </p:spPr>
+        <p:txBody>
+          <a:bodyPr wrap="square" lIns="0" tIns="0" rIns="0" bIns="0" rtlCol="0" anchor="t"/>
+          <a:lstStyle/>
+          <a:p>
+            <a:pPr indent="0" marL="0">
+              <a:lnSpc>
+                <a:spcPct val="110000"/>
+              </a:lnSpc>
+              <a:buNone/>
+            </a:pPr>
+            <a:r>
+              <a:rPr lang="en-US" sz="1200" dirty="0">
+                <a:solidFill>
+                  <a:srgbClr val="58584F"/>
+                </a:solidFill>
+                <a:latin typeface="Calibri" pitchFamily="34" charset="0"/>
+                <a:ea typeface="Calibri" pitchFamily="34" charset="-122"/>
+                <a:cs typeface="Calibri" pitchFamily="34" charset="-120"/>
+              </a:rPr>
+              <a:t>Patients find nearby clinics by name, specialty or distance and open directions in their maps app. Reviewed and approved this week.</a:t>
+            </a:r>
+            <a:endParaRPr lang="en-US" sz="1200" dirty="0"/>
+          </a:p>
+        </p:txBody>
+      </p:sp>
+      <p:sp>
+        <p:nvSpPr>
+          <p:cNvPr id="27" name="Text 25"/>
+          <p:cNvSpPr/>
+          <p:nvPr/>
+        </p:nvSpPr>
+        <p:spPr>
+          <a:xfrm>
+            <a:off x="4596384" y="4039362"/>
+            <a:ext cx="2996184" cy="228600"/>
+          </a:xfrm>
+          <a:prstGeom prst="rect">
+            <a:avLst/>
+          </a:prstGeom>
+          <a:noFill/>
+          <a:ln/>
+        </p:spPr>
+        <p:txBody>
+          <a:bodyPr wrap="square" lIns="0" tIns="0" rIns="0" bIns="0" rtlCol="0" anchor="ctr"/>
+          <a:lstStyle/>
+          <a:p>
+            <a:pPr indent="0" marL="0">
+              <a:buNone/>
+            </a:pPr>
+            <a:r>
+              <a:rPr lang="en-US" sz="1100" b="1" dirty="0">
+                <a:solidFill>
+                  <a:srgbClr val="58584F"/>
+                </a:solidFill>
+                <a:latin typeface="Calibri" pitchFamily="34" charset="0"/>
+                <a:ea typeface="Calibri" pitchFamily="34" charset="-122"/>
+                <a:cs typeface="Calibri" pitchFamily="34" charset="-120"/>
+              </a:rPr>
+              <a:t>Details</a:t>
+            </a:r>
+            <a:endParaRPr lang="en-US" sz="1100" dirty="0"/>
+          </a:p>
+        </p:txBody>
+      </p:sp>
+      <p:sp>
+        <p:nvSpPr>
+          <p:cNvPr id="28" name="Shape 26"/>
+          <p:cNvSpPr/>
+          <p:nvPr/>
+        </p:nvSpPr>
+        <p:spPr>
+          <a:xfrm>
+            <a:off x="4596384" y="4368546"/>
+            <a:ext cx="118872" cy="118872"/>
+          </a:xfrm>
+          <a:prstGeom prst="ellipse">
             <a:avLst/>
           </a:prstGeom>
           <a:solidFill>
@@ -9963,38 +10698,38 @@
       </p:sp>
       <p:sp>
         <p:nvSpPr>
-          <p:cNvPr id="25" name="Text 23"/>
-          <p:cNvSpPr/>
-          <p:nvPr/>
-        </p:nvSpPr>
-        <p:spPr>
-          <a:xfrm>
-            <a:off x="4389120" y="4529328"/>
-            <a:ext cx="5285232" cy="256032"/>
-          </a:xfrm>
-          <a:prstGeom prst="rect">
-            <a:avLst/>
-          </a:prstGeom>
-          <a:noFill/>
-          <a:ln/>
-        </p:spPr>
-        <p:txBody>
-          <a:bodyPr wrap="square" lIns="0" tIns="0" rIns="0" bIns="0" rtlCol="0" anchor="ctr"/>
+          <p:cNvPr id="29" name="Text 27"/>
+          <p:cNvSpPr/>
+          <p:nvPr/>
+        </p:nvSpPr>
+        <p:spPr>
+          <a:xfrm>
+            <a:off x="4843272" y="4313682"/>
+            <a:ext cx="2749296" cy="222504"/>
+          </a:xfrm>
+          <a:prstGeom prst="rect">
+            <a:avLst/>
+          </a:prstGeom>
+          <a:noFill/>
+          <a:ln/>
+        </p:spPr>
+        <p:txBody>
+          <a:bodyPr wrap="square" lIns="0" tIns="0" rIns="0" bIns="0" rtlCol="0" anchor="t"/>
           <a:lstStyle/>
           <a:p>
             <a:pPr indent="0" marL="0">
               <a:buNone/>
             </a:pPr>
             <a:r>
-              <a:rPr lang="en-US" sz="1100" b="1" dirty="0">
-                <a:solidFill>
-                  <a:srgbClr val="58584F"/>
+              <a:rPr lang="en-US" sz="1100" dirty="0">
+                <a:solidFill>
+                  <a:srgbClr val="141412"/>
                 </a:solidFill>
                 <a:latin typeface="Calibri" pitchFamily="34" charset="0"/>
                 <a:ea typeface="Calibri" pitchFamily="34" charset="-122"/>
                 <a:cs typeface="Calibri" pitchFamily="34" charset="-120"/>
               </a:rPr>
-              <a:t>Privacy</a:t>
+              <a:t>Search by name and specialty</a:t>
             </a:r>
             <a:endParaRPr lang="en-US" sz="1100" dirty="0"/>
           </a:p>
@@ -10002,35 +10737,50 @@
       </p:sp>
       <p:sp>
         <p:nvSpPr>
-          <p:cNvPr id="26" name="Text 24"/>
-          <p:cNvSpPr/>
-          <p:nvPr/>
-        </p:nvSpPr>
-        <p:spPr>
-          <a:xfrm>
-            <a:off x="4389120" y="4785360"/>
-            <a:ext cx="5376672" cy="801624"/>
-          </a:xfrm>
-          <a:prstGeom prst="rect">
-            <a:avLst/>
-          </a:prstGeom>
-          <a:noFill/>
-          <a:ln/>
-        </p:spPr>
-        <p:txBody>
-          <a:bodyPr wrap="square" lIns="0" tIns="0" rIns="0" bIns="0" rtlCol="0" anchor="t">
-            <a:normAutofit/>
-          </a:bodyPr>
+          <p:cNvPr id="30" name="Shape 28"/>
+          <p:cNvSpPr/>
+          <p:nvPr/>
+        </p:nvSpPr>
+        <p:spPr>
+          <a:xfrm>
+            <a:off x="4596384" y="4591050"/>
+            <a:ext cx="118872" cy="118872"/>
+          </a:xfrm>
+          <a:prstGeom prst="ellipse">
+            <a:avLst/>
+          </a:prstGeom>
+          <a:solidFill>
+            <a:srgbClr val="A8CC3A"/>
+          </a:solidFill>
+          <a:ln/>
+        </p:spPr>
+      </p:sp>
+      <p:sp>
+        <p:nvSpPr>
+          <p:cNvPr id="31" name="Text 29"/>
+          <p:cNvSpPr/>
+          <p:nvPr/>
+        </p:nvSpPr>
+        <p:spPr>
+          <a:xfrm>
+            <a:off x="4843272" y="4536186"/>
+            <a:ext cx="2749296" cy="390144"/>
+          </a:xfrm>
+          <a:prstGeom prst="rect">
+            <a:avLst/>
+          </a:prstGeom>
+          <a:noFill/>
+          <a:ln/>
+        </p:spPr>
+        <p:txBody>
+          <a:bodyPr wrap="square" lIns="0" tIns="0" rIns="0" bIns="0" rtlCol="0" anchor="t"/>
           <a:lstStyle/>
           <a:p>
             <a:pPr indent="0" marL="0">
-              <a:lnSpc>
-                <a:spcPct val="115000"/>
-              </a:lnSpc>
-              <a:buNone/>
-            </a:pPr>
-            <a:r>
-              <a:rPr lang="en-US" sz="1250" dirty="0">
+              <a:buNone/>
+            </a:pPr>
+            <a:r>
+              <a:rPr lang="en-US" sz="1100" dirty="0">
                 <a:solidFill>
                   <a:srgbClr val="141412"/>
                 </a:solidFill>
@@ -10038,22 +10788,169 @@
                 <a:ea typeface="Calibri" pitchFamily="34" charset="-122"/>
                 <a:cs typeface="Calibri" pitchFamily="34" charset="-120"/>
               </a:rPr>
-              <a:t>Patient phone numbers are hidden in system logs and only visible to clinic staff.</a:t>
-            </a:r>
-            <a:endParaRPr lang="en-US" sz="1250" dirty="0"/>
-          </a:p>
-        </p:txBody>
-      </p:sp>
-      <p:sp>
-        <p:nvSpPr>
-          <p:cNvPr id="27" name="Shape 25"/>
-          <p:cNvSpPr/>
-          <p:nvPr/>
-        </p:nvSpPr>
-        <p:spPr>
-          <a:xfrm>
-            <a:off x="10479024" y="4547616"/>
-            <a:ext cx="841248" cy="292608"/>
+              <a:t>Distance sorting from the patient's location</a:t>
+            </a:r>
+            <a:endParaRPr lang="en-US" sz="1100" dirty="0"/>
+          </a:p>
+        </p:txBody>
+      </p:sp>
+      <p:sp>
+        <p:nvSpPr>
+          <p:cNvPr id="32" name="Shape 30"/>
+          <p:cNvSpPr/>
+          <p:nvPr/>
+        </p:nvSpPr>
+        <p:spPr>
+          <a:xfrm>
+            <a:off x="4596384" y="4981194"/>
+            <a:ext cx="118872" cy="118872"/>
+          </a:xfrm>
+          <a:prstGeom prst="ellipse">
+            <a:avLst/>
+          </a:prstGeom>
+          <a:solidFill>
+            <a:srgbClr val="A8CC3A"/>
+          </a:solidFill>
+          <a:ln/>
+        </p:spPr>
+      </p:sp>
+      <p:sp>
+        <p:nvSpPr>
+          <p:cNvPr id="33" name="Text 31"/>
+          <p:cNvSpPr/>
+          <p:nvPr/>
+        </p:nvSpPr>
+        <p:spPr>
+          <a:xfrm>
+            <a:off x="4843272" y="4926330"/>
+            <a:ext cx="2749296" cy="222504"/>
+          </a:xfrm>
+          <a:prstGeom prst="rect">
+            <a:avLst/>
+          </a:prstGeom>
+          <a:noFill/>
+          <a:ln/>
+        </p:spPr>
+        <p:txBody>
+          <a:bodyPr wrap="square" lIns="0" tIns="0" rIns="0" bIns="0" rtlCol="0" anchor="t"/>
+          <a:lstStyle/>
+          <a:p>
+            <a:pPr indent="0" marL="0">
+              <a:buNone/>
+            </a:pPr>
+            <a:r>
+              <a:rPr lang="en-US" sz="1100" dirty="0">
+                <a:solidFill>
+                  <a:srgbClr val="141412"/>
+                </a:solidFill>
+                <a:latin typeface="Calibri" pitchFamily="34" charset="0"/>
+                <a:ea typeface="Calibri" pitchFamily="34" charset="-122"/>
+                <a:cs typeface="Calibri" pitchFamily="34" charset="-120"/>
+              </a:rPr>
+              <a:t>Directions open in the maps app</a:t>
+            </a:r>
+            <a:endParaRPr lang="en-US" sz="1100" dirty="0"/>
+          </a:p>
+        </p:txBody>
+      </p:sp>
+      <p:sp>
+        <p:nvSpPr>
+          <p:cNvPr id="34" name="Shape 32"/>
+          <p:cNvSpPr/>
+          <p:nvPr/>
+        </p:nvSpPr>
+        <p:spPr>
+          <a:xfrm>
+            <a:off x="4596384" y="5203698"/>
+            <a:ext cx="118872" cy="118872"/>
+          </a:xfrm>
+          <a:prstGeom prst="ellipse">
+            <a:avLst/>
+          </a:prstGeom>
+          <a:solidFill>
+            <a:srgbClr val="A8CC3A"/>
+          </a:solidFill>
+          <a:ln/>
+        </p:spPr>
+      </p:sp>
+      <p:sp>
+        <p:nvSpPr>
+          <p:cNvPr id="35" name="Text 33"/>
+          <p:cNvSpPr/>
+          <p:nvPr/>
+        </p:nvSpPr>
+        <p:spPr>
+          <a:xfrm>
+            <a:off x="4843272" y="5148834"/>
+            <a:ext cx="2749296" cy="222504"/>
+          </a:xfrm>
+          <a:prstGeom prst="rect">
+            <a:avLst/>
+          </a:prstGeom>
+          <a:noFill/>
+          <a:ln/>
+        </p:spPr>
+        <p:txBody>
+          <a:bodyPr wrap="square" lIns="0" tIns="0" rIns="0" bIns="0" rtlCol="0" anchor="t"/>
+          <a:lstStyle/>
+          <a:p>
+            <a:pPr indent="0" marL="0">
+              <a:buNone/>
+            </a:pPr>
+            <a:r>
+              <a:rPr lang="en-US" sz="1100" dirty="0">
+                <a:solidFill>
+                  <a:srgbClr val="141412"/>
+                </a:solidFill>
+                <a:latin typeface="Calibri" pitchFamily="34" charset="0"/>
+                <a:ea typeface="Calibri" pitchFamily="34" charset="-122"/>
+                <a:cs typeface="Calibri" pitchFamily="34" charset="-120"/>
+              </a:rPr>
+              <a:t>Works offline for recent searches</a:t>
+            </a:r>
+            <a:endParaRPr lang="en-US" sz="1100" dirty="0"/>
+          </a:p>
+        </p:txBody>
+      </p:sp>
+      <p:sp>
+        <p:nvSpPr>
+          <p:cNvPr id="36" name="Shape 34"/>
+          <p:cNvSpPr/>
+          <p:nvPr/>
+        </p:nvSpPr>
+        <p:spPr>
+          <a:xfrm>
+            <a:off x="8095488" y="1783080"/>
+            <a:ext cx="3453384" cy="4160520"/>
+          </a:xfrm>
+          <a:prstGeom prst="roundRect">
+            <a:avLst>
+              <a:gd name="adj" fmla="val 2118"/>
+            </a:avLst>
+          </a:prstGeom>
+          <a:solidFill>
+            <a:srgbClr val="F6F7F1"/>
+          </a:solidFill>
+          <a:ln/>
+          <a:effectLst>
+            <a:outerShdw sx="100000" sy="100000" kx="0" ky="0" algn="bl" rotWithShape="0" blurRad="76200" dist="25400" dir="5400000">
+              <a:srgbClr val="000000">
+                <a:alpha val="8000"/>
+              </a:srgbClr>
+            </a:outerShdw>
+          </a:effectLst>
+        </p:spPr>
+      </p:sp>
+      <p:sp>
+        <p:nvSpPr>
+          <p:cNvPr id="37" name="Shape 35"/>
+          <p:cNvSpPr/>
+          <p:nvPr/>
+        </p:nvSpPr>
+        <p:spPr>
+          <a:xfrm>
+            <a:off x="8324088" y="1965960"/>
+            <a:ext cx="1074420" cy="292608"/>
           </a:xfrm>
           <a:prstGeom prst="roundRect">
             <a:avLst>
@@ -10061,21 +10958,21 @@
             </a:avLst>
           </a:prstGeom>
           <a:solidFill>
-            <a:srgbClr val="A8CC3A"/>
+            <a:srgbClr val="E6E8DF"/>
           </a:solidFill>
           <a:ln/>
         </p:spPr>
       </p:sp>
       <p:sp>
         <p:nvSpPr>
-          <p:cNvPr id="28" name="Text 26"/>
-          <p:cNvSpPr/>
-          <p:nvPr/>
-        </p:nvSpPr>
-        <p:spPr>
-          <a:xfrm>
-            <a:off x="10479024" y="4547616"/>
-            <a:ext cx="841248" cy="292608"/>
+          <p:cNvPr id="38" name="Text 36"/>
+          <p:cNvSpPr/>
+          <p:nvPr/>
+        </p:nvSpPr>
+        <p:spPr>
+          <a:xfrm>
+            <a:off x="8324088" y="1965960"/>
+            <a:ext cx="1074420" cy="292608"/>
           </a:xfrm>
           <a:prstGeom prst="rect">
             <a:avLst/>
@@ -10093,13 +10990,13 @@
             <a:r>
               <a:rPr lang="en-US" sz="1100" b="1" dirty="0">
                 <a:solidFill>
-                  <a:srgbClr val="141412"/>
+                  <a:srgbClr val="58584F"/>
                 </a:solidFill>
                 <a:latin typeface="Calibri" pitchFamily="34" charset="0"/>
                 <a:ea typeface="Calibri" pitchFamily="34" charset="-122"/>
                 <a:cs typeface="Calibri" pitchFamily="34" charset="-120"/>
               </a:rPr>
-              <a:t>Verified</a:t>
+              <a:t>Not started</a:t>
             </a:r>
             <a:endParaRPr lang="en-US" sz="1100" dirty="0"/>
           </a:p>
@@ -10107,14 +11004,53 @@
       </p:sp>
       <p:sp>
         <p:nvSpPr>
-          <p:cNvPr id="29" name="Text 27"/>
-          <p:cNvSpPr/>
-          <p:nvPr/>
-        </p:nvSpPr>
-        <p:spPr>
-          <a:xfrm>
-            <a:off x="4389120" y="5760720"/>
-            <a:ext cx="6931152" cy="320040"/>
+          <p:cNvPr id="39" name="Text 37"/>
+          <p:cNvSpPr/>
+          <p:nvPr/>
+        </p:nvSpPr>
+        <p:spPr>
+          <a:xfrm>
+            <a:off x="8324088" y="2313432"/>
+            <a:ext cx="2996184" cy="238125"/>
+          </a:xfrm>
+          <a:prstGeom prst="rect">
+            <a:avLst/>
+          </a:prstGeom>
+          <a:noFill/>
+          <a:ln/>
+        </p:spPr>
+        <p:txBody>
+          <a:bodyPr wrap="square" lIns="0" tIns="0" rIns="0" bIns="0" rtlCol="0" anchor="t"/>
+          <a:lstStyle/>
+          <a:p>
+            <a:pPr indent="0" marL="0">
+              <a:buNone/>
+            </a:pPr>
+            <a:r>
+              <a:rPr lang="en-US" sz="1500" b="1" dirty="0">
+                <a:solidFill>
+                  <a:srgbClr val="141412"/>
+                </a:solidFill>
+                <a:latin typeface="Cambria" pitchFamily="34" charset="0"/>
+                <a:ea typeface="Cambria" pitchFamily="34" charset="-122"/>
+                <a:cs typeface="Cambria" pitchFamily="34" charset="-120"/>
+              </a:rPr>
+              <a:t>P4 · Payments and Receipts</a:t>
+            </a:r>
+            <a:endParaRPr lang="en-US" sz="1500" dirty="0"/>
+          </a:p>
+        </p:txBody>
+      </p:sp>
+      <p:sp>
+        <p:nvSpPr>
+          <p:cNvPr id="40" name="Text 38"/>
+          <p:cNvSpPr/>
+          <p:nvPr/>
+        </p:nvSpPr>
+        <p:spPr>
+          <a:xfrm>
+            <a:off x="8324088" y="2597277"/>
+            <a:ext cx="2996184" cy="228600"/>
           </a:xfrm>
           <a:prstGeom prst="rect">
             <a:avLst/>
@@ -10130,7 +11066,7 @@
               <a:buNone/>
             </a:pPr>
             <a:r>
-              <a:rPr lang="en-US" sz="1100" i="1" dirty="0">
+              <a:rPr lang="en-US" sz="1100" dirty="0">
                 <a:solidFill>
                   <a:srgbClr val="58584F"/>
                 </a:solidFill>
@@ -10138,7 +11074,310 @@
                 <a:ea typeface="Calibri" pitchFamily="34" charset="-122"/>
                 <a:cs typeface="Calibri" pitchFamily="34" charset="-120"/>
               </a:rPr>
-              <a:t>Source: lead's code reviews this week.</a:t>
+              <a:t>Owner: Leo Park @Leo</a:t>
+            </a:r>
+            <a:endParaRPr lang="en-US" sz="1100" dirty="0"/>
+          </a:p>
+        </p:txBody>
+      </p:sp>
+      <p:sp>
+        <p:nvSpPr>
+          <p:cNvPr id="41" name="Text 39"/>
+          <p:cNvSpPr/>
+          <p:nvPr/>
+        </p:nvSpPr>
+        <p:spPr>
+          <a:xfrm>
+            <a:off x="8324088" y="2871597"/>
+            <a:ext cx="2996184" cy="792480"/>
+          </a:xfrm>
+          <a:prstGeom prst="rect">
+            <a:avLst/>
+          </a:prstGeom>
+          <a:noFill/>
+          <a:ln/>
+        </p:spPr>
+        <p:txBody>
+          <a:bodyPr wrap="square" lIns="0" tIns="0" rIns="0" bIns="0" rtlCol="0" anchor="t"/>
+          <a:lstStyle/>
+          <a:p>
+            <a:pPr indent="0" marL="0">
+              <a:lnSpc>
+                <a:spcPct val="110000"/>
+              </a:lnSpc>
+              <a:buNone/>
+            </a:pPr>
+            <a:r>
+              <a:rPr lang="en-US" sz="1200" dirty="0">
+                <a:solidFill>
+                  <a:srgbClr val="58584F"/>
+                </a:solidFill>
+                <a:latin typeface="Calibri" pitchFamily="34" charset="0"/>
+                <a:ea typeface="Calibri" pitchFamily="34" charset="-122"/>
+                <a:cs typeface="Calibri" pitchFamily="34" charset="-120"/>
+              </a:rPr>
+              <a:t>Patients pay the booking deposit in the app and get a receipt by email. Starts after the booking calendar is approved.</a:t>
+            </a:r>
+            <a:endParaRPr lang="en-US" sz="1200" dirty="0"/>
+          </a:p>
+        </p:txBody>
+      </p:sp>
+      <p:sp>
+        <p:nvSpPr>
+          <p:cNvPr id="42" name="Text 40"/>
+          <p:cNvSpPr/>
+          <p:nvPr/>
+        </p:nvSpPr>
+        <p:spPr>
+          <a:xfrm>
+            <a:off x="8324088" y="3801237"/>
+            <a:ext cx="2996184" cy="228600"/>
+          </a:xfrm>
+          <a:prstGeom prst="rect">
+            <a:avLst/>
+          </a:prstGeom>
+          <a:noFill/>
+          <a:ln/>
+        </p:spPr>
+        <p:txBody>
+          <a:bodyPr wrap="square" lIns="0" tIns="0" rIns="0" bIns="0" rtlCol="0" anchor="ctr"/>
+          <a:lstStyle/>
+          <a:p>
+            <a:pPr indent="0" marL="0">
+              <a:buNone/>
+            </a:pPr>
+            <a:r>
+              <a:rPr lang="en-US" sz="1100" b="1" dirty="0">
+                <a:solidFill>
+                  <a:srgbClr val="58584F"/>
+                </a:solidFill>
+                <a:latin typeface="Calibri" pitchFamily="34" charset="0"/>
+                <a:ea typeface="Calibri" pitchFamily="34" charset="-122"/>
+                <a:cs typeface="Calibri" pitchFamily="34" charset="-120"/>
+              </a:rPr>
+              <a:t>Details</a:t>
+            </a:r>
+            <a:endParaRPr lang="en-US" sz="1100" dirty="0"/>
+          </a:p>
+        </p:txBody>
+      </p:sp>
+      <p:sp>
+        <p:nvSpPr>
+          <p:cNvPr id="43" name="Shape 41"/>
+          <p:cNvSpPr/>
+          <p:nvPr/>
+        </p:nvSpPr>
+        <p:spPr>
+          <a:xfrm>
+            <a:off x="8324088" y="4130421"/>
+            <a:ext cx="118872" cy="118872"/>
+          </a:xfrm>
+          <a:prstGeom prst="ellipse">
+            <a:avLst/>
+          </a:prstGeom>
+          <a:ln w="19050">
+            <a:solidFill>
+              <a:srgbClr val="B8B8B4"/>
+            </a:solidFill>
+            <a:prstDash val="solid"/>
+          </a:ln>
+        </p:spPr>
+      </p:sp>
+      <p:sp>
+        <p:nvSpPr>
+          <p:cNvPr id="44" name="Text 42"/>
+          <p:cNvSpPr/>
+          <p:nvPr/>
+        </p:nvSpPr>
+        <p:spPr>
+          <a:xfrm>
+            <a:off x="8570976" y="4075557"/>
+            <a:ext cx="2749296" cy="222504"/>
+          </a:xfrm>
+          <a:prstGeom prst="rect">
+            <a:avLst/>
+          </a:prstGeom>
+          <a:noFill/>
+          <a:ln/>
+        </p:spPr>
+        <p:txBody>
+          <a:bodyPr wrap="square" lIns="0" tIns="0" rIns="0" bIns="0" rtlCol="0" anchor="t"/>
+          <a:lstStyle/>
+          <a:p>
+            <a:pPr indent="0" marL="0">
+              <a:buNone/>
+            </a:pPr>
+            <a:r>
+              <a:rPr lang="en-US" sz="1100" dirty="0">
+                <a:solidFill>
+                  <a:srgbClr val="58584F"/>
+                </a:solidFill>
+                <a:latin typeface="Calibri" pitchFamily="34" charset="0"/>
+                <a:ea typeface="Calibri" pitchFamily="34" charset="-122"/>
+                <a:cs typeface="Calibri" pitchFamily="34" charset="-120"/>
+              </a:rPr>
+              <a:t>Choose a payment method</a:t>
+            </a:r>
+            <a:endParaRPr lang="en-US" sz="1100" dirty="0"/>
+          </a:p>
+        </p:txBody>
+      </p:sp>
+      <p:sp>
+        <p:nvSpPr>
+          <p:cNvPr id="45" name="Shape 43"/>
+          <p:cNvSpPr/>
+          <p:nvPr/>
+        </p:nvSpPr>
+        <p:spPr>
+          <a:xfrm>
+            <a:off x="8324088" y="4352925"/>
+            <a:ext cx="118872" cy="118872"/>
+          </a:xfrm>
+          <a:prstGeom prst="ellipse">
+            <a:avLst/>
+          </a:prstGeom>
+          <a:ln w="19050">
+            <a:solidFill>
+              <a:srgbClr val="B8B8B4"/>
+            </a:solidFill>
+            <a:prstDash val="solid"/>
+          </a:ln>
+        </p:spPr>
+      </p:sp>
+      <p:sp>
+        <p:nvSpPr>
+          <p:cNvPr id="46" name="Text 44"/>
+          <p:cNvSpPr/>
+          <p:nvPr/>
+        </p:nvSpPr>
+        <p:spPr>
+          <a:xfrm>
+            <a:off x="8570976" y="4298061"/>
+            <a:ext cx="2749296" cy="222504"/>
+          </a:xfrm>
+          <a:prstGeom prst="rect">
+            <a:avLst/>
+          </a:prstGeom>
+          <a:noFill/>
+          <a:ln/>
+        </p:spPr>
+        <p:txBody>
+          <a:bodyPr wrap="square" lIns="0" tIns="0" rIns="0" bIns="0" rtlCol="0" anchor="t"/>
+          <a:lstStyle/>
+          <a:p>
+            <a:pPr indent="0" marL="0">
+              <a:buNone/>
+            </a:pPr>
+            <a:r>
+              <a:rPr lang="en-US" sz="1100" dirty="0">
+                <a:solidFill>
+                  <a:srgbClr val="58584F"/>
+                </a:solidFill>
+                <a:latin typeface="Calibri" pitchFamily="34" charset="0"/>
+                <a:ea typeface="Calibri" pitchFamily="34" charset="-122"/>
+                <a:cs typeface="Calibri" pitchFamily="34" charset="-120"/>
+              </a:rPr>
+              <a:t>Pay the booking deposit</a:t>
+            </a:r>
+            <a:endParaRPr lang="en-US" sz="1100" dirty="0"/>
+          </a:p>
+        </p:txBody>
+      </p:sp>
+      <p:sp>
+        <p:nvSpPr>
+          <p:cNvPr id="47" name="Shape 45"/>
+          <p:cNvSpPr/>
+          <p:nvPr/>
+        </p:nvSpPr>
+        <p:spPr>
+          <a:xfrm>
+            <a:off x="8324088" y="4575429"/>
+            <a:ext cx="118872" cy="118872"/>
+          </a:xfrm>
+          <a:prstGeom prst="ellipse">
+            <a:avLst/>
+          </a:prstGeom>
+          <a:ln w="19050">
+            <a:solidFill>
+              <a:srgbClr val="B8B8B4"/>
+            </a:solidFill>
+            <a:prstDash val="solid"/>
+          </a:ln>
+        </p:spPr>
+      </p:sp>
+      <p:sp>
+        <p:nvSpPr>
+          <p:cNvPr id="48" name="Text 46"/>
+          <p:cNvSpPr/>
+          <p:nvPr/>
+        </p:nvSpPr>
+        <p:spPr>
+          <a:xfrm>
+            <a:off x="8570976" y="4520565"/>
+            <a:ext cx="2749296" cy="222504"/>
+          </a:xfrm>
+          <a:prstGeom prst="rect">
+            <a:avLst/>
+          </a:prstGeom>
+          <a:noFill/>
+          <a:ln/>
+        </p:spPr>
+        <p:txBody>
+          <a:bodyPr wrap="square" lIns="0" tIns="0" rIns="0" bIns="0" rtlCol="0" anchor="t"/>
+          <a:lstStyle/>
+          <a:p>
+            <a:pPr indent="0" marL="0">
+              <a:buNone/>
+            </a:pPr>
+            <a:r>
+              <a:rPr lang="en-US" sz="1100" dirty="0">
+                <a:solidFill>
+                  <a:srgbClr val="58584F"/>
+                </a:solidFill>
+                <a:latin typeface="Calibri" pitchFamily="34" charset="0"/>
+                <a:ea typeface="Calibri" pitchFamily="34" charset="-122"/>
+                <a:cs typeface="Calibri" pitchFamily="34" charset="-120"/>
+              </a:rPr>
+              <a:t>Receipt sent by email</a:t>
+            </a:r>
+            <a:endParaRPr lang="en-US" sz="1100" dirty="0"/>
+          </a:p>
+        </p:txBody>
+      </p:sp>
+      <p:sp>
+        <p:nvSpPr>
+          <p:cNvPr id="49" name="Text 47"/>
+          <p:cNvSpPr/>
+          <p:nvPr/>
+        </p:nvSpPr>
+        <p:spPr>
+          <a:xfrm>
+            <a:off x="640080" y="5989320"/>
+            <a:ext cx="10908792" cy="274320"/>
+          </a:xfrm>
+          <a:prstGeom prst="rect">
+            <a:avLst/>
+          </a:prstGeom>
+          <a:noFill/>
+          <a:ln/>
+        </p:spPr>
+        <p:txBody>
+          <a:bodyPr wrap="square" lIns="0" tIns="0" rIns="0" bIns="0" rtlCol="0" anchor="ctr"/>
+          <a:lstStyle/>
+          <a:p>
+            <a:pPr indent="0" marL="0">
+              <a:buNone/>
+            </a:pPr>
+            <a:r>
+              <a:rPr lang="en-US" sz="1100" i="1" dirty="0">
+                <a:solidFill>
+                  <a:srgbClr val="58584F"/>
+                </a:solidFill>
+                <a:latin typeface="Calibri" pitchFamily="34" charset="0"/>
+                <a:ea typeface="Calibri" pitchFamily="34" charset="-122"/>
+                <a:cs typeface="Calibri" pitchFamily="34" charset="-120"/>
+              </a:rPr>
+              <a:t>Status as of this week's review; detail comes from the task tracker and the lead's code reviews.</a:t>
             </a:r>
             <a:endParaRPr lang="en-US" sz="1100" dirty="0"/>
           </a:p>
@@ -10209,7 +11448,7 @@
                 <a:ea typeface="Calibri" pitchFamily="34" charset="-122"/>
                 <a:cs typeface="Calibri" pitchFamily="34" charset="-120"/>
               </a:rPr>
-              <a:t>Needs Attention</a:t>
+              <a:t>Quality · Code Review</a:t>
             </a:r>
             <a:endParaRPr lang="en-US" sz="1300" dirty="0"/>
           </a:p>
@@ -10250,7 +11489,7 @@
                 <a:ea typeface="Cambria" pitchFamily="34" charset="-122"/>
                 <a:cs typeface="Cambria" pitchFamily="34" charset="-120"/>
               </a:rPr>
-              <a:t>Blockers &amp; Decisions Needed</a:t>
+              <a:t>Quality Check: Issues Caught Before Release</a:t>
             </a:r>
             <a:endParaRPr lang="en-US" sz="2800" dirty="0"/>
           </a:p>
@@ -10265,11 +11504,313 @@
         <p:spPr>
           <a:xfrm>
             <a:off x="640080" y="1783080"/>
-            <a:ext cx="5271516" cy="2377440"/>
+            <a:ext cx="3017520" cy="4434840"/>
           </a:xfrm>
           <a:prstGeom prst="roundRect">
             <a:avLst>
-              <a:gd name="adj" fmla="val 3077"/>
+              <a:gd name="adj" fmla="val 2424"/>
+            </a:avLst>
+          </a:prstGeom>
+          <a:solidFill>
+            <a:srgbClr val="141412"/>
+          </a:solidFill>
+          <a:ln/>
+        </p:spPr>
+      </p:sp>
+      <p:sp>
+        <p:nvSpPr>
+          <p:cNvPr id="5" name="Text 3"/>
+          <p:cNvSpPr/>
+          <p:nvPr/>
+        </p:nvSpPr>
+        <p:spPr>
+          <a:xfrm>
+            <a:off x="914400" y="2011680"/>
+            <a:ext cx="2468880" cy="769010"/>
+          </a:xfrm>
+          <a:prstGeom prst="rect">
+            <a:avLst/>
+          </a:prstGeom>
+          <a:noFill/>
+          <a:ln/>
+        </p:spPr>
+        <p:txBody>
+          <a:bodyPr wrap="square" lIns="0" tIns="0" rIns="0" bIns="0" rtlCol="0" anchor="b"/>
+          <a:lstStyle/>
+          <a:p>
+            <a:pPr indent="0" marL="0">
+              <a:buNone/>
+            </a:pPr>
+            <a:r>
+              <a:rPr lang="en-US" sz="3400" b="1" dirty="0">
+                <a:solidFill>
+                  <a:srgbClr val="A8CC3A"/>
+                </a:solidFill>
+                <a:latin typeface="Cambria" pitchFamily="34" charset="0"/>
+                <a:ea typeface="Cambria" pitchFamily="34" charset="-122"/>
+                <a:cs typeface="Cambria" pitchFamily="34" charset="-120"/>
+              </a:rPr>
+              <a:t>3</a:t>
+            </a:r>
+            <a:endParaRPr lang="en-US" sz="3400" dirty="0"/>
+          </a:p>
+        </p:txBody>
+      </p:sp>
+      <p:sp>
+        <p:nvSpPr>
+          <p:cNvPr id="6" name="Text 4"/>
+          <p:cNvSpPr/>
+          <p:nvPr/>
+        </p:nvSpPr>
+        <p:spPr>
+          <a:xfrm>
+            <a:off x="914400" y="2807208"/>
+            <a:ext cx="2468880" cy="477317"/>
+          </a:xfrm>
+          <a:prstGeom prst="rect">
+            <a:avLst/>
+          </a:prstGeom>
+          <a:noFill/>
+          <a:ln/>
+        </p:spPr>
+        <p:txBody>
+          <a:bodyPr wrap="square" lIns="0" tIns="0" rIns="0" bIns="0" rtlCol="0" anchor="t"/>
+          <a:lstStyle/>
+          <a:p>
+            <a:pPr indent="0" marL="0">
+              <a:buNone/>
+            </a:pPr>
+            <a:r>
+              <a:rPr lang="en-US" sz="1200" b="1" dirty="0">
+                <a:solidFill>
+                  <a:srgbClr val="D8D8D2"/>
+                </a:solidFill>
+                <a:latin typeface="Calibri" pitchFamily="34" charset="0"/>
+                <a:ea typeface="Calibri" pitchFamily="34" charset="-122"/>
+                <a:cs typeface="Calibri" pitchFamily="34" charset="-120"/>
+              </a:rPr>
+              <a:t>Features reviewed this week</a:t>
+            </a:r>
+            <a:endParaRPr lang="en-US" sz="1200" dirty="0"/>
+          </a:p>
+        </p:txBody>
+      </p:sp>
+      <p:sp>
+        <p:nvSpPr>
+          <p:cNvPr id="7" name="Shape 5"/>
+          <p:cNvSpPr/>
+          <p:nvPr/>
+        </p:nvSpPr>
+        <p:spPr>
+          <a:xfrm>
+            <a:off x="914400" y="3319272"/>
+            <a:ext cx="2468880" cy="0"/>
+          </a:xfrm>
+          <a:prstGeom prst="line">
+            <a:avLst/>
+          </a:prstGeom>
+          <a:noFill/>
+          <a:ln w="9525">
+            <a:solidFill>
+              <a:srgbClr val="3A3A34"/>
+            </a:solidFill>
+            <a:prstDash val="solid"/>
+          </a:ln>
+        </p:spPr>
+      </p:sp>
+      <p:sp>
+        <p:nvSpPr>
+          <p:cNvPr id="8" name="Text 6"/>
+          <p:cNvSpPr/>
+          <p:nvPr/>
+        </p:nvSpPr>
+        <p:spPr>
+          <a:xfrm>
+            <a:off x="914400" y="3337560"/>
+            <a:ext cx="2468880" cy="769010"/>
+          </a:xfrm>
+          <a:prstGeom prst="rect">
+            <a:avLst/>
+          </a:prstGeom>
+          <a:noFill/>
+          <a:ln/>
+        </p:spPr>
+        <p:txBody>
+          <a:bodyPr wrap="square" lIns="0" tIns="0" rIns="0" bIns="0" rtlCol="0" anchor="b"/>
+          <a:lstStyle/>
+          <a:p>
+            <a:pPr indent="0" marL="0">
+              <a:buNone/>
+            </a:pPr>
+            <a:r>
+              <a:rPr lang="en-US" sz="3400" b="1" dirty="0">
+                <a:solidFill>
+                  <a:srgbClr val="FFFFFF"/>
+                </a:solidFill>
+                <a:latin typeface="Cambria" pitchFamily="34" charset="0"/>
+                <a:ea typeface="Cambria" pitchFamily="34" charset="-122"/>
+                <a:cs typeface="Cambria" pitchFamily="34" charset="-120"/>
+              </a:rPr>
+              <a:t>2</a:t>
+            </a:r>
+            <a:endParaRPr lang="en-US" sz="3400" dirty="0"/>
+          </a:p>
+        </p:txBody>
+      </p:sp>
+      <p:sp>
+        <p:nvSpPr>
+          <p:cNvPr id="9" name="Text 7"/>
+          <p:cNvSpPr/>
+          <p:nvPr/>
+        </p:nvSpPr>
+        <p:spPr>
+          <a:xfrm>
+            <a:off x="914400" y="4133088"/>
+            <a:ext cx="2468880" cy="477317"/>
+          </a:xfrm>
+          <a:prstGeom prst="rect">
+            <a:avLst/>
+          </a:prstGeom>
+          <a:noFill/>
+          <a:ln/>
+        </p:spPr>
+        <p:txBody>
+          <a:bodyPr wrap="square" lIns="0" tIns="0" rIns="0" bIns="0" rtlCol="0" anchor="t"/>
+          <a:lstStyle/>
+          <a:p>
+            <a:pPr indent="0" marL="0">
+              <a:buNone/>
+            </a:pPr>
+            <a:r>
+              <a:rPr lang="en-US" sz="1200" b="1" dirty="0">
+                <a:solidFill>
+                  <a:srgbClr val="D8D8D2"/>
+                </a:solidFill>
+                <a:latin typeface="Calibri" pitchFamily="34" charset="0"/>
+                <a:ea typeface="Calibri" pitchFamily="34" charset="-122"/>
+                <a:cs typeface="Calibri" pitchFamily="34" charset="-120"/>
+              </a:rPr>
+              <a:t>Approved for release</a:t>
+            </a:r>
+            <a:endParaRPr lang="en-US" sz="1200" dirty="0"/>
+          </a:p>
+        </p:txBody>
+      </p:sp>
+      <p:sp>
+        <p:nvSpPr>
+          <p:cNvPr id="10" name="Shape 8"/>
+          <p:cNvSpPr/>
+          <p:nvPr/>
+        </p:nvSpPr>
+        <p:spPr>
+          <a:xfrm>
+            <a:off x="914400" y="4645152"/>
+            <a:ext cx="2468880" cy="0"/>
+          </a:xfrm>
+          <a:prstGeom prst="line">
+            <a:avLst/>
+          </a:prstGeom>
+          <a:noFill/>
+          <a:ln w="9525">
+            <a:solidFill>
+              <a:srgbClr val="3A3A34"/>
+            </a:solidFill>
+            <a:prstDash val="solid"/>
+          </a:ln>
+        </p:spPr>
+      </p:sp>
+      <p:sp>
+        <p:nvSpPr>
+          <p:cNvPr id="11" name="Text 9"/>
+          <p:cNvSpPr/>
+          <p:nvPr/>
+        </p:nvSpPr>
+        <p:spPr>
+          <a:xfrm>
+            <a:off x="914400" y="4663440"/>
+            <a:ext cx="2468880" cy="769010"/>
+          </a:xfrm>
+          <a:prstGeom prst="rect">
+            <a:avLst/>
+          </a:prstGeom>
+          <a:noFill/>
+          <a:ln/>
+        </p:spPr>
+        <p:txBody>
+          <a:bodyPr wrap="square" lIns="0" tIns="0" rIns="0" bIns="0" rtlCol="0" anchor="b"/>
+          <a:lstStyle/>
+          <a:p>
+            <a:pPr indent="0" marL="0">
+              <a:buNone/>
+            </a:pPr>
+            <a:r>
+              <a:rPr lang="en-US" sz="3400" b="1" dirty="0">
+                <a:solidFill>
+                  <a:srgbClr val="FFFFFF"/>
+                </a:solidFill>
+                <a:latin typeface="Cambria" pitchFamily="34" charset="0"/>
+                <a:ea typeface="Cambria" pitchFamily="34" charset="-122"/>
+                <a:cs typeface="Cambria" pitchFamily="34" charset="-120"/>
+              </a:rPr>
+              <a:t>212</a:t>
+            </a:r>
+            <a:endParaRPr lang="en-US" sz="3400" dirty="0"/>
+          </a:p>
+        </p:txBody>
+      </p:sp>
+      <p:sp>
+        <p:nvSpPr>
+          <p:cNvPr id="12" name="Text 10"/>
+          <p:cNvSpPr/>
+          <p:nvPr/>
+        </p:nvSpPr>
+        <p:spPr>
+          <a:xfrm>
+            <a:off x="914400" y="5458968"/>
+            <a:ext cx="2468880" cy="477317"/>
+          </a:xfrm>
+          <a:prstGeom prst="rect">
+            <a:avLst/>
+          </a:prstGeom>
+          <a:noFill/>
+          <a:ln/>
+        </p:spPr>
+        <p:txBody>
+          <a:bodyPr wrap="square" lIns="0" tIns="0" rIns="0" bIns="0" rtlCol="0" anchor="t"/>
+          <a:lstStyle/>
+          <a:p>
+            <a:pPr indent="0" marL="0">
+              <a:buNone/>
+            </a:pPr>
+            <a:r>
+              <a:rPr lang="en-US" sz="1200" b="1" dirty="0">
+                <a:solidFill>
+                  <a:srgbClr val="D8D8D2"/>
+                </a:solidFill>
+                <a:latin typeface="Calibri" pitchFamily="34" charset="0"/>
+                <a:ea typeface="Calibri" pitchFamily="34" charset="-122"/>
+                <a:cs typeface="Calibri" pitchFamily="34" charset="-120"/>
+              </a:rPr>
+              <a:t>Automated tests passing (100%)</a:t>
+            </a:r>
+            <a:endParaRPr lang="en-US" sz="1200" dirty="0"/>
+          </a:p>
+        </p:txBody>
+      </p:sp>
+      <p:sp>
+        <p:nvSpPr>
+          <p:cNvPr id="13" name="Shape 11"/>
+          <p:cNvSpPr/>
+          <p:nvPr/>
+        </p:nvSpPr>
+        <p:spPr>
+          <a:xfrm>
+            <a:off x="3977640" y="1783080"/>
+            <a:ext cx="7571232" cy="4434840"/>
+          </a:xfrm>
+          <a:prstGeom prst="roundRect">
+            <a:avLst>
+              <a:gd name="adj" fmla="val 1649"/>
             </a:avLst>
           </a:prstGeom>
           <a:solidFill>
@@ -10287,34 +11828,34 @@
       </p:sp>
       <p:sp>
         <p:nvSpPr>
-          <p:cNvPr id="5" name="Shape 3"/>
-          <p:cNvSpPr/>
-          <p:nvPr/>
-        </p:nvSpPr>
-        <p:spPr>
-          <a:xfrm>
-            <a:off x="640080" y="1783080"/>
-            <a:ext cx="5271516" cy="82296"/>
+          <p:cNvPr id="14" name="Shape 12"/>
+          <p:cNvSpPr/>
+          <p:nvPr/>
+        </p:nvSpPr>
+        <p:spPr>
+          <a:xfrm>
+            <a:off x="4206240" y="2084832"/>
+            <a:ext cx="64008" cy="984504"/>
           </a:xfrm>
           <a:prstGeom prst="rect">
             <a:avLst/>
           </a:prstGeom>
           <a:solidFill>
-            <a:srgbClr val="E0A33A"/>
+            <a:srgbClr val="A8CC3A"/>
           </a:solidFill>
           <a:ln/>
         </p:spPr>
       </p:sp>
       <p:sp>
         <p:nvSpPr>
-          <p:cNvPr id="6" name="Text 4"/>
-          <p:cNvSpPr/>
-          <p:nvPr/>
-        </p:nvSpPr>
-        <p:spPr>
-          <a:xfrm>
-            <a:off x="914400" y="2039112"/>
-            <a:ext cx="4722876" cy="292608"/>
+          <p:cNvPr id="15" name="Text 13"/>
+          <p:cNvSpPr/>
+          <p:nvPr/>
+        </p:nvSpPr>
+        <p:spPr>
+          <a:xfrm>
+            <a:off x="4389120" y="2048256"/>
+            <a:ext cx="5285232" cy="256032"/>
           </a:xfrm>
           <a:prstGeom prst="rect">
             <a:avLst/>
@@ -10330,89 +11871,30 @@
               <a:buNone/>
             </a:pPr>
             <a:r>
-              <a:rPr lang="en-US" sz="1200" b="1" dirty="0">
-                <a:solidFill>
-                  <a:srgbClr val="B07A1A"/>
+              <a:rPr lang="en-US" sz="1100" b="1" dirty="0">
+                <a:solidFill>
+                  <a:srgbClr val="58584F"/>
                 </a:solidFill>
                 <a:latin typeface="Calibri" pitchFamily="34" charset="0"/>
                 <a:ea typeface="Calibri" pitchFamily="34" charset="-122"/>
                 <a:cs typeface="Calibri" pitchFamily="34" charset="-120"/>
               </a:rPr>
-              <a:t>Blockers &amp; Risks</a:t>
-            </a:r>
-            <a:endParaRPr lang="en-US" sz="1200" dirty="0"/>
-          </a:p>
-        </p:txBody>
-      </p:sp>
-      <p:sp>
-        <p:nvSpPr>
-          <p:cNvPr id="7" name="Shape 5"/>
-          <p:cNvSpPr/>
-          <p:nvPr/>
-        </p:nvSpPr>
-        <p:spPr>
-          <a:xfrm>
-            <a:off x="914400" y="2532888"/>
-            <a:ext cx="329184" cy="329184"/>
-          </a:xfrm>
-          <a:prstGeom prst="ellipse">
-            <a:avLst/>
-          </a:prstGeom>
-          <a:solidFill>
-            <a:srgbClr val="E0A33A"/>
-          </a:solidFill>
-          <a:ln/>
-        </p:spPr>
-      </p:sp>
-      <p:sp>
-        <p:nvSpPr>
-          <p:cNvPr id="8" name="Text 6"/>
-          <p:cNvSpPr/>
-          <p:nvPr/>
-        </p:nvSpPr>
-        <p:spPr>
-          <a:xfrm>
-            <a:off x="914400" y="2532888"/>
-            <a:ext cx="329184" cy="329184"/>
-          </a:xfrm>
-          <a:prstGeom prst="rect">
-            <a:avLst/>
-          </a:prstGeom>
-          <a:noFill/>
-          <a:ln/>
-        </p:spPr>
-        <p:txBody>
-          <a:bodyPr wrap="square" lIns="0" tIns="0" rIns="0" bIns="0" rtlCol="0" anchor="ctr"/>
-          <a:lstStyle/>
-          <a:p>
-            <a:pPr algn="ctr" indent="0" marL="0">
-              <a:buNone/>
-            </a:pPr>
-            <a:r>
-              <a:rPr lang="en-US" sz="1400" b="1" dirty="0">
-                <a:solidFill>
-                  <a:srgbClr val="141412"/>
-                </a:solidFill>
-                <a:latin typeface="Calibri" pitchFamily="34" charset="0"/>
-                <a:ea typeface="Calibri" pitchFamily="34" charset="-122"/>
-                <a:cs typeface="Calibri" pitchFamily="34" charset="-120"/>
-              </a:rPr>
-              <a:t>!</a:t>
-            </a:r>
-            <a:endParaRPr lang="en-US" sz="1400" dirty="0"/>
-          </a:p>
-        </p:txBody>
-      </p:sp>
-      <p:sp>
-        <p:nvSpPr>
-          <p:cNvPr id="9" name="Text 7"/>
-          <p:cNvSpPr/>
-          <p:nvPr/>
-        </p:nvSpPr>
-        <p:spPr>
-          <a:xfrm>
-            <a:off x="1371600" y="2514600"/>
-            <a:ext cx="4265676" cy="1234440"/>
+              <a:t>Appointment Reminders</a:t>
+            </a:r>
+            <a:endParaRPr lang="en-US" sz="1100" dirty="0"/>
+          </a:p>
+        </p:txBody>
+      </p:sp>
+      <p:sp>
+        <p:nvSpPr>
+          <p:cNvPr id="16" name="Text 14"/>
+          <p:cNvSpPr/>
+          <p:nvPr/>
+        </p:nvSpPr>
+        <p:spPr>
+          <a:xfrm>
+            <a:off x="4389120" y="2304288"/>
+            <a:ext cx="5376672" cy="801624"/>
           </a:xfrm>
           <a:prstGeom prst="rect">
             <a:avLst/>
@@ -10430,13 +11912,10 @@
               <a:lnSpc>
                 <a:spcPct val="115000"/>
               </a:lnSpc>
-              <a:spcAft>
-                <a:spcPts val="300"/>
-              </a:spcAft>
-              <a:buNone/>
-            </a:pPr>
-            <a:r>
-              <a:rPr lang="en-US" sz="1350" b="1" dirty="0">
+              <a:buNone/>
+            </a:pPr>
+            <a:r>
+              <a:rPr lang="en-US" sz="1250" dirty="0">
                 <a:solidFill>
                   <a:srgbClr val="141412"/>
                 </a:solidFill>
@@ -10444,117 +11923,372 @@
                 <a:ea typeface="Calibri" pitchFamily="34" charset="-122"/>
                 <a:cs typeface="Calibri" pitchFamily="34" charset="-120"/>
               </a:rPr>
-              <a:t>Reminders release waiting on one fix</a:t>
-            </a:r>
-            <a:endParaRPr lang="en-US" sz="1350" dirty="0"/>
-          </a:p>
+              <a:t>Clinics can send SMS and email reminders 24 hours and 2 hours before each appointment.</a:t>
+            </a:r>
+            <a:endParaRPr lang="en-US" sz="1250" dirty="0"/>
+          </a:p>
+        </p:txBody>
+      </p:sp>
+      <p:sp>
+        <p:nvSpPr>
+          <p:cNvPr id="17" name="Shape 15"/>
+          <p:cNvSpPr/>
+          <p:nvPr/>
+        </p:nvSpPr>
+        <p:spPr>
+          <a:xfrm>
+            <a:off x="10479024" y="2066544"/>
+            <a:ext cx="841248" cy="292608"/>
+          </a:xfrm>
+          <a:prstGeom prst="roundRect">
+            <a:avLst>
+              <a:gd name="adj" fmla="val 50000"/>
+            </a:avLst>
+          </a:prstGeom>
+          <a:solidFill>
+            <a:srgbClr val="A8CC3A"/>
+          </a:solidFill>
+          <a:ln/>
+        </p:spPr>
+      </p:sp>
+      <p:sp>
+        <p:nvSpPr>
+          <p:cNvPr id="18" name="Text 16"/>
+          <p:cNvSpPr/>
+          <p:nvPr/>
+        </p:nvSpPr>
+        <p:spPr>
+          <a:xfrm>
+            <a:off x="10479024" y="2066544"/>
+            <a:ext cx="841248" cy="292608"/>
+          </a:xfrm>
+          <a:prstGeom prst="rect">
+            <a:avLst/>
+          </a:prstGeom>
+          <a:noFill/>
+          <a:ln/>
+        </p:spPr>
+        <p:txBody>
+          <a:bodyPr wrap="square" lIns="0" tIns="0" rIns="0" bIns="0" rtlCol="0" anchor="ctr"/>
+          <a:lstStyle/>
+          <a:p>
+            <a:pPr algn="ctr" indent="0" marL="0">
+              <a:buNone/>
+            </a:pPr>
+            <a:r>
+              <a:rPr lang="en-US" sz="1100" b="1" dirty="0">
+                <a:solidFill>
+                  <a:srgbClr val="141412"/>
+                </a:solidFill>
+                <a:latin typeface="Calibri" pitchFamily="34" charset="0"/>
+                <a:ea typeface="Calibri" pitchFamily="34" charset="-122"/>
+                <a:cs typeface="Calibri" pitchFamily="34" charset="-120"/>
+              </a:rPr>
+              <a:t>Verified</a:t>
+            </a:r>
+            <a:endParaRPr lang="en-US" sz="1100" dirty="0"/>
+          </a:p>
+        </p:txBody>
+      </p:sp>
+      <p:sp>
+        <p:nvSpPr>
+          <p:cNvPr id="19" name="Shape 17"/>
+          <p:cNvSpPr/>
+          <p:nvPr/>
+        </p:nvSpPr>
+        <p:spPr>
+          <a:xfrm>
+            <a:off x="4206240" y="3325368"/>
+            <a:ext cx="64008" cy="984504"/>
+          </a:xfrm>
+          <a:prstGeom prst="rect">
+            <a:avLst/>
+          </a:prstGeom>
+          <a:solidFill>
+            <a:srgbClr val="D6E6A0"/>
+          </a:solidFill>
+          <a:ln/>
+        </p:spPr>
+      </p:sp>
+      <p:sp>
+        <p:nvSpPr>
+          <p:cNvPr id="20" name="Text 18"/>
+          <p:cNvSpPr/>
+          <p:nvPr/>
+        </p:nvSpPr>
+        <p:spPr>
+          <a:xfrm>
+            <a:off x="4389120" y="3288792"/>
+            <a:ext cx="5285232" cy="256032"/>
+          </a:xfrm>
+          <a:prstGeom prst="rect">
+            <a:avLst/>
+          </a:prstGeom>
+          <a:noFill/>
+          <a:ln/>
+        </p:spPr>
+        <p:txBody>
+          <a:bodyPr wrap="square" lIns="0" tIns="0" rIns="0" bIns="0" rtlCol="0" anchor="ctr"/>
+          <a:lstStyle/>
+          <a:p>
+            <a:pPr indent="0" marL="0">
+              <a:buNone/>
+            </a:pPr>
+            <a:r>
+              <a:rPr lang="en-US" sz="1100" b="1" dirty="0">
+                <a:solidFill>
+                  <a:srgbClr val="58584F"/>
+                </a:solidFill>
+                <a:latin typeface="Calibri" pitchFamily="34" charset="0"/>
+                <a:ea typeface="Calibri" pitchFamily="34" charset="-122"/>
+                <a:cs typeface="Calibri" pitchFamily="34" charset="-120"/>
+              </a:rPr>
+              <a:t>Reliability</a:t>
+            </a:r>
+            <a:endParaRPr lang="en-US" sz="1100" dirty="0"/>
+          </a:p>
+        </p:txBody>
+      </p:sp>
+      <p:sp>
+        <p:nvSpPr>
+          <p:cNvPr id="21" name="Text 19"/>
+          <p:cNvSpPr/>
+          <p:nvPr/>
+        </p:nvSpPr>
+        <p:spPr>
+          <a:xfrm>
+            <a:off x="4389120" y="3544824"/>
+            <a:ext cx="5376672" cy="801624"/>
+          </a:xfrm>
+          <a:prstGeom prst="rect">
+            <a:avLst/>
+          </a:prstGeom>
+          <a:noFill/>
+          <a:ln/>
+        </p:spPr>
+        <p:txBody>
+          <a:bodyPr wrap="square" lIns="0" tIns="0" rIns="0" bIns="0" rtlCol="0" anchor="t">
+            <a:normAutofit/>
+          </a:bodyPr>
+          <a:lstStyle/>
           <a:p>
             <a:pPr indent="0" marL="0">
               <a:lnSpc>
                 <a:spcPct val="115000"/>
               </a:lnSpc>
-              <a:spcAft>
-                <a:spcPts val="300"/>
-              </a:spcAft>
-              <a:buNone/>
-            </a:pPr>
-            <a:r>
-              <a:rPr lang="en-US" sz="1200" dirty="0">
-                <a:solidFill>
-                  <a:srgbClr val="58584F"/>
+              <a:buNone/>
+            </a:pPr>
+            <a:r>
+              <a:rPr lang="en-US" sz="1250" dirty="0">
+                <a:solidFill>
+                  <a:srgbClr val="141412"/>
                 </a:solidFill>
                 <a:latin typeface="Calibri" pitchFamily="34" charset="0"/>
                 <a:ea typeface="Calibri" pitchFamily="34" charset="-122"/>
                 <a:cs typeface="Calibri" pitchFamily="34" charset="-120"/>
               </a:rPr>
-              <a:t>Duplicate reminders must be prevented before release. Fix is small and already tested.</a:t>
-            </a:r>
-            <a:endParaRPr lang="en-US" sz="1350" dirty="0"/>
-          </a:p>
+              <a:t>A patient could receive the same reminder twice if sending is retried. Small fix identified.</a:t>
+            </a:r>
+            <a:endParaRPr lang="en-US" sz="1250" dirty="0"/>
+          </a:p>
+        </p:txBody>
+      </p:sp>
+      <p:sp>
+        <p:nvSpPr>
+          <p:cNvPr id="22" name="Shape 20"/>
+          <p:cNvSpPr/>
+          <p:nvPr/>
+        </p:nvSpPr>
+        <p:spPr>
+          <a:xfrm>
+            <a:off x="9701784" y="3307080"/>
+            <a:ext cx="1618488" cy="292608"/>
+          </a:xfrm>
+          <a:prstGeom prst="roundRect">
+            <a:avLst>
+              <a:gd name="adj" fmla="val 50000"/>
+            </a:avLst>
+          </a:prstGeom>
+          <a:solidFill>
+            <a:srgbClr val="D6E6A0"/>
+          </a:solidFill>
+          <a:ln/>
+        </p:spPr>
+      </p:sp>
+      <p:sp>
+        <p:nvSpPr>
+          <p:cNvPr id="23" name="Text 21"/>
+          <p:cNvSpPr/>
+          <p:nvPr/>
+        </p:nvSpPr>
+        <p:spPr>
+          <a:xfrm>
+            <a:off x="9701784" y="3307080"/>
+            <a:ext cx="1618488" cy="292608"/>
+          </a:xfrm>
+          <a:prstGeom prst="rect">
+            <a:avLst/>
+          </a:prstGeom>
+          <a:noFill/>
+          <a:ln/>
+        </p:spPr>
+        <p:txBody>
+          <a:bodyPr wrap="square" lIns="0" tIns="0" rIns="0" bIns="0" rtlCol="0" anchor="ctr"/>
+          <a:lstStyle/>
+          <a:p>
+            <a:pPr algn="ctr" indent="0" marL="0">
+              <a:buNone/>
+            </a:pPr>
+            <a:r>
+              <a:rPr lang="en-US" sz="1100" b="1" dirty="0">
+                <a:solidFill>
+                  <a:srgbClr val="141412"/>
+                </a:solidFill>
+                <a:latin typeface="Calibri" pitchFamily="34" charset="0"/>
+                <a:ea typeface="Calibri" pitchFamily="34" charset="-122"/>
+                <a:cs typeface="Calibri" pitchFamily="34" charset="-120"/>
+              </a:rPr>
+              <a:t>Fix before release</a:t>
+            </a:r>
+            <a:endParaRPr lang="en-US" sz="1100" dirty="0"/>
+          </a:p>
+        </p:txBody>
+      </p:sp>
+      <p:sp>
+        <p:nvSpPr>
+          <p:cNvPr id="24" name="Shape 22"/>
+          <p:cNvSpPr/>
+          <p:nvPr/>
+        </p:nvSpPr>
+        <p:spPr>
+          <a:xfrm>
+            <a:off x="4206240" y="4565904"/>
+            <a:ext cx="64008" cy="984504"/>
+          </a:xfrm>
+          <a:prstGeom prst="rect">
+            <a:avLst/>
+          </a:prstGeom>
+          <a:solidFill>
+            <a:srgbClr val="A8CC3A"/>
+          </a:solidFill>
+          <a:ln/>
+        </p:spPr>
+      </p:sp>
+      <p:sp>
+        <p:nvSpPr>
+          <p:cNvPr id="25" name="Text 23"/>
+          <p:cNvSpPr/>
+          <p:nvPr/>
+        </p:nvSpPr>
+        <p:spPr>
+          <a:xfrm>
+            <a:off x="4389120" y="4529328"/>
+            <a:ext cx="5285232" cy="256032"/>
+          </a:xfrm>
+          <a:prstGeom prst="rect">
+            <a:avLst/>
+          </a:prstGeom>
+          <a:noFill/>
+          <a:ln/>
+        </p:spPr>
+        <p:txBody>
+          <a:bodyPr wrap="square" lIns="0" tIns="0" rIns="0" bIns="0" rtlCol="0" anchor="ctr"/>
+          <a:lstStyle/>
+          <a:p>
+            <a:pPr indent="0" marL="0">
+              <a:buNone/>
+            </a:pPr>
+            <a:r>
+              <a:rPr lang="en-US" sz="1100" b="1" dirty="0">
+                <a:solidFill>
+                  <a:srgbClr val="58584F"/>
+                </a:solidFill>
+                <a:latin typeface="Calibri" pitchFamily="34" charset="0"/>
+                <a:ea typeface="Calibri" pitchFamily="34" charset="-122"/>
+                <a:cs typeface="Calibri" pitchFamily="34" charset="-120"/>
+              </a:rPr>
+              <a:t>Privacy</a:t>
+            </a:r>
+            <a:endParaRPr lang="en-US" sz="1100" dirty="0"/>
+          </a:p>
+        </p:txBody>
+      </p:sp>
+      <p:sp>
+        <p:nvSpPr>
+          <p:cNvPr id="26" name="Text 24"/>
+          <p:cNvSpPr/>
+          <p:nvPr/>
+        </p:nvSpPr>
+        <p:spPr>
+          <a:xfrm>
+            <a:off x="4389120" y="4785360"/>
+            <a:ext cx="5376672" cy="801624"/>
+          </a:xfrm>
+          <a:prstGeom prst="rect">
+            <a:avLst/>
+          </a:prstGeom>
+          <a:noFill/>
+          <a:ln/>
+        </p:spPr>
+        <p:txBody>
+          <a:bodyPr wrap="square" lIns="0" tIns="0" rIns="0" bIns="0" rtlCol="0" anchor="t">
+            <a:normAutofit/>
+          </a:bodyPr>
+          <a:lstStyle/>
           <a:p>
             <a:pPr indent="0" marL="0">
               <a:lnSpc>
                 <a:spcPct val="115000"/>
               </a:lnSpc>
-              <a:spcAft>
-                <a:spcPts val="300"/>
-              </a:spcAft>
-              <a:buNone/>
-            </a:pPr>
-            <a:r>
-              <a:rPr lang="en-US" sz="1100" i="1" dirty="0">
-                <a:solidFill>
-                  <a:srgbClr val="8A8A82"/>
+              <a:buNone/>
+            </a:pPr>
+            <a:r>
+              <a:rPr lang="en-US" sz="1250" dirty="0">
+                <a:solidFill>
+                  <a:srgbClr val="141412"/>
                 </a:solidFill>
                 <a:latin typeface="Calibri" pitchFamily="34" charset="0"/>
                 <a:ea typeface="Calibri" pitchFamily="34" charset="-122"/>
                 <a:cs typeface="Calibri" pitchFamily="34" charset="-120"/>
               </a:rPr>
-              <a:t>Owner: Nina Rao @Nina · Expected: next week</a:t>
-            </a:r>
-            <a:endParaRPr lang="en-US" sz="1350" dirty="0"/>
-          </a:p>
-        </p:txBody>
-      </p:sp>
-      <p:sp>
-        <p:nvSpPr>
-          <p:cNvPr id="10" name="Shape 8"/>
-          <p:cNvSpPr/>
-          <p:nvPr/>
-        </p:nvSpPr>
-        <p:spPr>
-          <a:xfrm>
-            <a:off x="6277356" y="1783080"/>
-            <a:ext cx="5271516" cy="2377440"/>
+              <a:t>Patient phone numbers are hidden in system logs and only visible to clinic staff.</a:t>
+            </a:r>
+            <a:endParaRPr lang="en-US" sz="1250" dirty="0"/>
+          </a:p>
+        </p:txBody>
+      </p:sp>
+      <p:sp>
+        <p:nvSpPr>
+          <p:cNvPr id="27" name="Shape 25"/>
+          <p:cNvSpPr/>
+          <p:nvPr/>
+        </p:nvSpPr>
+        <p:spPr>
+          <a:xfrm>
+            <a:off x="10479024" y="4547616"/>
+            <a:ext cx="841248" cy="292608"/>
           </a:xfrm>
           <a:prstGeom prst="roundRect">
             <a:avLst>
-              <a:gd name="adj" fmla="val 3077"/>
+              <a:gd name="adj" fmla="val 50000"/>
             </a:avLst>
           </a:prstGeom>
           <a:solidFill>
-            <a:srgbClr val="F6F7F1"/>
+            <a:srgbClr val="A8CC3A"/>
           </a:solidFill>
           <a:ln/>
-          <a:effectLst>
-            <a:outerShdw sx="100000" sy="100000" kx="0" ky="0" algn="bl" rotWithShape="0" blurRad="76200" dist="25400" dir="5400000">
-              <a:srgbClr val="000000">
-                <a:alpha val="8000"/>
-              </a:srgbClr>
-            </a:outerShdw>
-          </a:effectLst>
-        </p:spPr>
-      </p:sp>
-      <p:sp>
-        <p:nvSpPr>
-          <p:cNvPr id="11" name="Shape 9"/>
-          <p:cNvSpPr/>
-          <p:nvPr/>
-        </p:nvSpPr>
-        <p:spPr>
-          <a:xfrm>
-            <a:off x="6277356" y="1783080"/>
-            <a:ext cx="5271516" cy="82296"/>
-          </a:xfrm>
-          <a:prstGeom prst="rect">
-            <a:avLst/>
-          </a:prstGeom>
-          <a:solidFill>
-            <a:srgbClr val="141412"/>
-          </a:solidFill>
-          <a:ln/>
-        </p:spPr>
-      </p:sp>
-      <p:sp>
-        <p:nvSpPr>
-          <p:cNvPr id="12" name="Text 10"/>
-          <p:cNvSpPr/>
-          <p:nvPr/>
-        </p:nvSpPr>
-        <p:spPr>
-          <a:xfrm>
-            <a:off x="6551676" y="2039112"/>
-            <a:ext cx="4722876" cy="292608"/>
+        </p:spPr>
+      </p:sp>
+      <p:sp>
+        <p:nvSpPr>
+          <p:cNvPr id="28" name="Text 26"/>
+          <p:cNvSpPr/>
+          <p:nvPr/>
+        </p:nvSpPr>
+        <p:spPr>
+          <a:xfrm>
+            <a:off x="10479024" y="4547616"/>
+            <a:ext cx="841248" cy="292608"/>
           </a:xfrm>
           <a:prstGeom prst="rect">
             <a:avLst/>
@@ -10566,11 +12300,11 @@
           <a:bodyPr wrap="square" lIns="0" tIns="0" rIns="0" bIns="0" rtlCol="0" anchor="ctr"/>
           <a:lstStyle/>
           <a:p>
-            <a:pPr indent="0" marL="0">
-              <a:buNone/>
-            </a:pPr>
-            <a:r>
-              <a:rPr lang="en-US" sz="1200" b="1" dirty="0">
+            <a:pPr algn="ctr" indent="0" marL="0">
+              <a:buNone/>
+            </a:pPr>
+            <a:r>
+              <a:rPr lang="en-US" sz="1100" b="1" dirty="0">
                 <a:solidFill>
                   <a:srgbClr val="141412"/>
                 </a:solidFill>
@@ -10578,42 +12312,22 @@
                 <a:ea typeface="Calibri" pitchFamily="34" charset="-122"/>
                 <a:cs typeface="Calibri" pitchFamily="34" charset="-120"/>
               </a:rPr>
-              <a:t>Decisions Needed</a:t>
-            </a:r>
-            <a:endParaRPr lang="en-US" sz="1200" dirty="0"/>
-          </a:p>
-        </p:txBody>
-      </p:sp>
-      <p:sp>
-        <p:nvSpPr>
-          <p:cNvPr id="13" name="Shape 11"/>
-          <p:cNvSpPr/>
-          <p:nvPr/>
-        </p:nvSpPr>
-        <p:spPr>
-          <a:xfrm>
-            <a:off x="6551676" y="2532888"/>
-            <a:ext cx="329184" cy="329184"/>
-          </a:xfrm>
-          <a:prstGeom prst="ellipse">
-            <a:avLst/>
-          </a:prstGeom>
-          <a:solidFill>
-            <a:srgbClr val="A8CC3A"/>
-          </a:solidFill>
-          <a:ln/>
-        </p:spPr>
-      </p:sp>
-      <p:sp>
-        <p:nvSpPr>
-          <p:cNvPr id="14" name="Text 12"/>
-          <p:cNvSpPr/>
-          <p:nvPr/>
-        </p:nvSpPr>
-        <p:spPr>
-          <a:xfrm>
-            <a:off x="6551676" y="2532888"/>
-            <a:ext cx="329184" cy="329184"/>
+              <a:t>Verified</a:t>
+            </a:r>
+            <a:endParaRPr lang="en-US" sz="1100" dirty="0"/>
+          </a:p>
+        </p:txBody>
+      </p:sp>
+      <p:sp>
+        <p:nvSpPr>
+          <p:cNvPr id="29" name="Text 27"/>
+          <p:cNvSpPr/>
+          <p:nvPr/>
+        </p:nvSpPr>
+        <p:spPr>
+          <a:xfrm>
+            <a:off x="4389120" y="5760720"/>
+            <a:ext cx="6931152" cy="320040"/>
           </a:xfrm>
           <a:prstGeom prst="rect">
             <a:avLst/>
@@ -10625,114 +12339,21 @@
           <a:bodyPr wrap="square" lIns="0" tIns="0" rIns="0" bIns="0" rtlCol="0" anchor="ctr"/>
           <a:lstStyle/>
           <a:p>
-            <a:pPr algn="ctr" indent="0" marL="0">
-              <a:buNone/>
-            </a:pPr>
-            <a:r>
-              <a:rPr lang="en-US" sz="1400" b="1" dirty="0">
-                <a:solidFill>
-                  <a:srgbClr val="141412"/>
+            <a:pPr indent="0" marL="0">
+              <a:buNone/>
+            </a:pPr>
+            <a:r>
+              <a:rPr lang="en-US" sz="1100" i="1" dirty="0">
+                <a:solidFill>
+                  <a:srgbClr val="58584F"/>
                 </a:solidFill>
                 <a:latin typeface="Calibri" pitchFamily="34" charset="0"/>
                 <a:ea typeface="Calibri" pitchFamily="34" charset="-122"/>
                 <a:cs typeface="Calibri" pitchFamily="34" charset="-120"/>
               </a:rPr>
-              <a:t>?</a:t>
-            </a:r>
-            <a:endParaRPr lang="en-US" sz="1400" dirty="0"/>
-          </a:p>
-        </p:txBody>
-      </p:sp>
-      <p:sp>
-        <p:nvSpPr>
-          <p:cNvPr id="15" name="Text 13"/>
-          <p:cNvSpPr/>
-          <p:nvPr/>
-        </p:nvSpPr>
-        <p:spPr>
-          <a:xfrm>
-            <a:off x="7008876" y="2514600"/>
-            <a:ext cx="4265676" cy="1234440"/>
-          </a:xfrm>
-          <a:prstGeom prst="rect">
-            <a:avLst/>
-          </a:prstGeom>
-          <a:noFill/>
-          <a:ln/>
-        </p:spPr>
-        <p:txBody>
-          <a:bodyPr wrap="square" lIns="0" tIns="0" rIns="0" bIns="0" rtlCol="0" anchor="t">
-            <a:normAutofit/>
-          </a:bodyPr>
-          <a:lstStyle/>
-          <a:p>
-            <a:pPr indent="0" marL="0">
-              <a:lnSpc>
-                <a:spcPct val="115000"/>
-              </a:lnSpc>
-              <a:spcAft>
-                <a:spcPts val="300"/>
-              </a:spcAft>
-              <a:buNone/>
-            </a:pPr>
-            <a:r>
-              <a:rPr lang="en-US" sz="1350" b="1" dirty="0">
-                <a:solidFill>
-                  <a:srgbClr val="141412"/>
-                </a:solidFill>
-                <a:latin typeface="Calibri" pitchFamily="34" charset="0"/>
-                <a:ea typeface="Calibri" pitchFamily="34" charset="-122"/>
-                <a:cs typeface="Calibri" pitchFamily="34" charset="-120"/>
-              </a:rPr>
-              <a:t>Can patients turn off SMS reminders and keep email only?</a:t>
-            </a:r>
-            <a:endParaRPr lang="en-US" sz="1350" dirty="0"/>
-          </a:p>
-          <a:p>
-            <a:pPr indent="0" marL="0">
-              <a:lnSpc>
-                <a:spcPct val="115000"/>
-              </a:lnSpc>
-              <a:spcAft>
-                <a:spcPts val="300"/>
-              </a:spcAft>
-              <a:buNone/>
-            </a:pPr>
-            <a:r>
-              <a:rPr lang="en-US" sz="1200" dirty="0">
-                <a:solidFill>
-                  <a:srgbClr val="58584F"/>
-                </a:solidFill>
-                <a:latin typeface="Calibri" pitchFamily="34" charset="0"/>
-                <a:ea typeface="Calibri" pitchFamily="34" charset="-122"/>
-                <a:cs typeface="Calibri" pitchFamily="34" charset="-120"/>
-              </a:rPr>
-              <a:t>Today every patient with a phone number receives SMS reminders; some clinics report complaints.</a:t>
-            </a:r>
-            <a:endParaRPr lang="en-US" sz="1350" dirty="0"/>
-          </a:p>
-          <a:p>
-            <a:pPr indent="0" marL="0">
-              <a:lnSpc>
-                <a:spcPct val="115000"/>
-              </a:lnSpc>
-              <a:spcAft>
-                <a:spcPts val="300"/>
-              </a:spcAft>
-              <a:buNone/>
-            </a:pPr>
-            <a:r>
-              <a:rPr lang="en-US" sz="1100" i="1" dirty="0">
-                <a:solidFill>
-                  <a:srgbClr val="8A8A82"/>
-                </a:solidFill>
-                <a:latin typeface="Calibri" pitchFamily="34" charset="0"/>
-                <a:ea typeface="Calibri" pitchFamily="34" charset="-122"/>
-                <a:cs typeface="Calibri" pitchFamily="34" charset="-120"/>
-              </a:rPr>
-              <a:t>Options: allow opt-out · clinic decides per patient · keep as today</a:t>
-            </a:r>
-            <a:endParaRPr lang="en-US" sz="1350" dirty="0"/>
+              <a:t>Source: lead's code reviews this week.</a:t>
+            </a:r>
+            <a:endParaRPr lang="en-US" sz="1100" dirty="0"/>
           </a:p>
         </p:txBody>
       </p:sp>
@@ -10801,7 +12422,7 @@
                 <a:ea typeface="Calibri" pitchFamily="34" charset="-122"/>
                 <a:cs typeface="Calibri" pitchFamily="34" charset="-120"/>
               </a:rPr>
-              <a:t>Team · Task Tracker</a:t>
+              <a:t>Needs Attention</a:t>
             </a:r>
             <a:endParaRPr lang="en-US" sz="1300" dirty="0"/>
           </a:p>
@@ -10842,7 +12463,7 @@
                 <a:ea typeface="Cambria" pitchFamily="34" charset="-122"/>
                 <a:cs typeface="Cambria" pitchFamily="34" charset="-120"/>
               </a:rPr>
-              <a:t>Developer Task Track</a:t>
+              <a:t>Blockers &amp; Decisions Needed</a:t>
             </a:r>
             <a:endParaRPr lang="en-US" sz="2800" dirty="0"/>
           </a:p>
@@ -10857,11 +12478,11 @@
         <p:spPr>
           <a:xfrm>
             <a:off x="640080" y="1783080"/>
-            <a:ext cx="3453384" cy="4434840"/>
+            <a:ext cx="5271516" cy="2377440"/>
           </a:xfrm>
           <a:prstGeom prst="roundRect">
             <a:avLst>
-              <a:gd name="adj" fmla="val 2118"/>
+              <a:gd name="adj" fmla="val 3077"/>
             </a:avLst>
           </a:prstGeom>
           <a:solidFill>
@@ -10886,13 +12507,13 @@
         <p:spPr>
           <a:xfrm>
             <a:off x="640080" y="1783080"/>
-            <a:ext cx="82296" cy="4434840"/>
+            <a:ext cx="5271516" cy="82296"/>
           </a:xfrm>
           <a:prstGeom prst="rect">
             <a:avLst/>
           </a:prstGeom>
           <a:solidFill>
-            <a:srgbClr val="D6E6A0"/>
+            <a:srgbClr val="E0A33A"/>
           </a:solidFill>
           <a:ln/>
         </p:spPr>
@@ -10905,8 +12526,8 @@
         </p:nvSpPr>
         <p:spPr>
           <a:xfrm>
-            <a:off x="932688" y="1984248"/>
-            <a:ext cx="2950464" cy="329184"/>
+            <a:off x="914400" y="2039112"/>
+            <a:ext cx="4722876" cy="292608"/>
           </a:xfrm>
           <a:prstGeom prst="rect">
             <a:avLst/>
@@ -10922,30 +12543,50 @@
               <a:buNone/>
             </a:pPr>
             <a:r>
-              <a:rPr lang="en-US" sz="1500" b="1" dirty="0">
-                <a:solidFill>
-                  <a:srgbClr val="141412"/>
+              <a:rPr lang="en-US" sz="1200" b="1" dirty="0">
+                <a:solidFill>
+                  <a:srgbClr val="B07A1A"/>
                 </a:solidFill>
                 <a:latin typeface="Calibri" pitchFamily="34" charset="0"/>
                 <a:ea typeface="Calibri" pitchFamily="34" charset="-122"/>
                 <a:cs typeface="Calibri" pitchFamily="34" charset="-120"/>
               </a:rPr>
-              <a:t>Leo Park @Leo</a:t>
-            </a:r>
-            <a:endParaRPr lang="en-US" sz="1500" dirty="0"/>
-          </a:p>
-        </p:txBody>
-      </p:sp>
-      <p:sp>
-        <p:nvSpPr>
-          <p:cNvPr id="7" name="Text 5"/>
-          <p:cNvSpPr/>
-          <p:nvPr/>
-        </p:nvSpPr>
-        <p:spPr>
-          <a:xfrm>
-            <a:off x="932688" y="2295144"/>
-            <a:ext cx="2950464" cy="237744"/>
+              <a:t>Blockers &amp; Risks</a:t>
+            </a:r>
+            <a:endParaRPr lang="en-US" sz="1200" dirty="0"/>
+          </a:p>
+        </p:txBody>
+      </p:sp>
+      <p:sp>
+        <p:nvSpPr>
+          <p:cNvPr id="7" name="Shape 5"/>
+          <p:cNvSpPr/>
+          <p:nvPr/>
+        </p:nvSpPr>
+        <p:spPr>
+          <a:xfrm>
+            <a:off x="914400" y="2532888"/>
+            <a:ext cx="329184" cy="329184"/>
+          </a:xfrm>
+          <a:prstGeom prst="ellipse">
+            <a:avLst/>
+          </a:prstGeom>
+          <a:solidFill>
+            <a:srgbClr val="E0A33A"/>
+          </a:solidFill>
+          <a:ln/>
+        </p:spPr>
+      </p:sp>
+      <p:sp>
+        <p:nvSpPr>
+          <p:cNvPr id="8" name="Text 6"/>
+          <p:cNvSpPr/>
+          <p:nvPr/>
+        </p:nvSpPr>
+        <p:spPr>
+          <a:xfrm>
+            <a:off x="914400" y="2532888"/>
+            <a:ext cx="329184" cy="329184"/>
           </a:xfrm>
           <a:prstGeom prst="rect">
             <a:avLst/>
@@ -10957,106 +12598,81 @@
           <a:bodyPr wrap="square" lIns="0" tIns="0" rIns="0" bIns="0" rtlCol="0" anchor="ctr"/>
           <a:lstStyle/>
           <a:p>
-            <a:pPr indent="0" marL="0">
-              <a:buNone/>
-            </a:pPr>
-            <a:r>
-              <a:rPr lang="en-US" sz="1100" b="1" dirty="0">
-                <a:solidFill>
-                  <a:srgbClr val="6E8A1F"/>
+            <a:pPr algn="ctr" indent="0" marL="0">
+              <a:buNone/>
+            </a:pPr>
+            <a:r>
+              <a:rPr lang="en-US" sz="1400" b="1" dirty="0">
+                <a:solidFill>
+                  <a:srgbClr val="141412"/>
                 </a:solidFill>
                 <a:latin typeface="Calibri" pitchFamily="34" charset="0"/>
                 <a:ea typeface="Calibri" pitchFamily="34" charset="-122"/>
                 <a:cs typeface="Calibri" pitchFamily="34" charset="-120"/>
               </a:rPr>
-              <a:t>ClinicBook · Patient App</a:t>
-            </a:r>
-            <a:endParaRPr lang="en-US" sz="1100" dirty="0"/>
-          </a:p>
-        </p:txBody>
-      </p:sp>
-      <p:sp>
-        <p:nvSpPr>
-          <p:cNvPr id="8" name="Text 6"/>
-          <p:cNvSpPr/>
-          <p:nvPr/>
-        </p:nvSpPr>
-        <p:spPr>
-          <a:xfrm>
-            <a:off x="932688" y="2606040"/>
-            <a:ext cx="411480" cy="457200"/>
-          </a:xfrm>
-          <a:prstGeom prst="rect">
-            <a:avLst/>
-          </a:prstGeom>
-          <a:noFill/>
-          <a:ln/>
-        </p:spPr>
-        <p:txBody>
-          <a:bodyPr wrap="square" lIns="0" tIns="0" rIns="0" bIns="0" rtlCol="0" anchor="ctr"/>
+              <a:t>!</a:t>
+            </a:r>
+            <a:endParaRPr lang="en-US" sz="1400" dirty="0"/>
+          </a:p>
+        </p:txBody>
+      </p:sp>
+      <p:sp>
+        <p:nvSpPr>
+          <p:cNvPr id="9" name="Text 7"/>
+          <p:cNvSpPr/>
+          <p:nvPr/>
+        </p:nvSpPr>
+        <p:spPr>
+          <a:xfrm>
+            <a:off x="1371600" y="2514600"/>
+            <a:ext cx="4265676" cy="1234440"/>
+          </a:xfrm>
+          <a:prstGeom prst="rect">
+            <a:avLst/>
+          </a:prstGeom>
+          <a:noFill/>
+          <a:ln/>
+        </p:spPr>
+        <p:txBody>
+          <a:bodyPr wrap="square" lIns="0" tIns="0" rIns="0" bIns="0" rtlCol="0" anchor="t">
+            <a:normAutofit/>
+          </a:bodyPr>
           <a:lstStyle/>
           <a:p>
             <a:pPr indent="0" marL="0">
-              <a:buNone/>
-            </a:pPr>
-            <a:r>
-              <a:rPr lang="en-US" sz="2600" b="1" dirty="0">
+              <a:lnSpc>
+                <a:spcPct val="115000"/>
+              </a:lnSpc>
+              <a:spcAft>
+                <a:spcPts val="300"/>
+              </a:spcAft>
+              <a:buNone/>
+            </a:pPr>
+            <a:r>
+              <a:rPr lang="en-US" sz="1350" b="1" dirty="0">
                 <a:solidFill>
                   <a:srgbClr val="141412"/>
-                </a:solidFill>
-                <a:latin typeface="Cambria" pitchFamily="34" charset="0"/>
-                <a:ea typeface="Cambria" pitchFamily="34" charset="-122"/>
-                <a:cs typeface="Cambria" pitchFamily="34" charset="-120"/>
-              </a:rPr>
-              <a:t>3</a:t>
-            </a:r>
-            <a:endParaRPr lang="en-US" sz="2600" dirty="0"/>
-          </a:p>
-        </p:txBody>
-      </p:sp>
-      <p:sp>
-        <p:nvSpPr>
-          <p:cNvPr id="9" name="Text 7"/>
-          <p:cNvSpPr/>
-          <p:nvPr/>
-        </p:nvSpPr>
-        <p:spPr>
-          <a:xfrm>
-            <a:off x="1389888" y="2606040"/>
-            <a:ext cx="822960" cy="457200"/>
-          </a:xfrm>
-          <a:prstGeom prst="rect">
-            <a:avLst/>
-          </a:prstGeom>
-          <a:noFill/>
-          <a:ln/>
-        </p:spPr>
-        <p:txBody>
-          <a:bodyPr wrap="square" lIns="0" tIns="0" rIns="0" bIns="0" rtlCol="0" anchor="ctr"/>
-          <a:lstStyle/>
-          <a:p>
-            <a:pPr indent="0" marL="0">
-              <a:buNone/>
-            </a:pPr>
-            <a:r>
-              <a:rPr lang="en-US" sz="1100" b="1" dirty="0">
-                <a:solidFill>
-                  <a:srgbClr val="58584F"/>
                 </a:solidFill>
                 <a:latin typeface="Calibri" pitchFamily="34" charset="0"/>
                 <a:ea typeface="Calibri" pitchFamily="34" charset="-122"/>
                 <a:cs typeface="Calibri" pitchFamily="34" charset="-120"/>
               </a:rPr>
-              <a:t>done this</a:t>
-            </a:r>
-            <a:endParaRPr lang="en-US" sz="1100" dirty="0"/>
+              <a:t>Reminders release waiting on one fix</a:t>
+            </a:r>
+            <a:endParaRPr lang="en-US" sz="1350" dirty="0"/>
           </a:p>
           <a:p>
             <a:pPr indent="0" marL="0">
-              <a:buNone/>
-            </a:pPr>
-            <a:r>
-              <a:rPr lang="en-US" sz="1100" b="1" dirty="0">
+              <a:lnSpc>
+                <a:spcPct val="115000"/>
+              </a:lnSpc>
+              <a:spcAft>
+                <a:spcPts val="300"/>
+              </a:spcAft>
+              <a:buNone/>
+            </a:pPr>
+            <a:r>
+              <a:rPr lang="en-US" sz="1200" dirty="0">
                 <a:solidFill>
                   <a:srgbClr val="58584F"/>
                 </a:solidFill>
@@ -11064,510 +12680,49 @@
                 <a:ea typeface="Calibri" pitchFamily="34" charset="-122"/>
                 <a:cs typeface="Calibri" pitchFamily="34" charset="-120"/>
               </a:rPr>
-              <a:t>week</a:t>
-            </a:r>
-            <a:endParaRPr lang="en-US" sz="1100" dirty="0"/>
-          </a:p>
-        </p:txBody>
-      </p:sp>
-      <p:sp>
-        <p:nvSpPr>
-          <p:cNvPr id="10" name="Text 8"/>
-          <p:cNvSpPr/>
-          <p:nvPr/>
-        </p:nvSpPr>
-        <p:spPr>
-          <a:xfrm>
-            <a:off x="2258568" y="2606040"/>
-            <a:ext cx="411480" cy="457200"/>
-          </a:xfrm>
-          <a:prstGeom prst="rect">
-            <a:avLst/>
-          </a:prstGeom>
-          <a:noFill/>
-          <a:ln/>
-        </p:spPr>
-        <p:txBody>
-          <a:bodyPr wrap="square" lIns="0" tIns="0" rIns="0" bIns="0" rtlCol="0" anchor="ctr"/>
-          <a:lstStyle/>
+              <a:t>Duplicate reminders must be prevented before release. Fix is small and already tested.</a:t>
+            </a:r>
+            <a:endParaRPr lang="en-US" sz="1350" dirty="0"/>
+          </a:p>
           <a:p>
             <a:pPr indent="0" marL="0">
-              <a:buNone/>
-            </a:pPr>
-            <a:r>
-              <a:rPr lang="en-US" sz="2600" b="1" dirty="0">
-                <a:solidFill>
-                  <a:srgbClr val="141412"/>
-                </a:solidFill>
-                <a:latin typeface="Cambria" pitchFamily="34" charset="0"/>
-                <a:ea typeface="Cambria" pitchFamily="34" charset="-122"/>
-                <a:cs typeface="Cambria" pitchFamily="34" charset="-120"/>
-              </a:rPr>
-              <a:t>2</a:t>
-            </a:r>
-            <a:endParaRPr lang="en-US" sz="2600" dirty="0"/>
-          </a:p>
-        </p:txBody>
-      </p:sp>
-      <p:sp>
-        <p:nvSpPr>
-          <p:cNvPr id="11" name="Text 9"/>
-          <p:cNvSpPr/>
-          <p:nvPr/>
-        </p:nvSpPr>
-        <p:spPr>
-          <a:xfrm>
-            <a:off x="2715768" y="2606040"/>
-            <a:ext cx="731520" cy="457200"/>
-          </a:xfrm>
-          <a:prstGeom prst="rect">
-            <a:avLst/>
-          </a:prstGeom>
-          <a:noFill/>
-          <a:ln/>
-        </p:spPr>
-        <p:txBody>
-          <a:bodyPr wrap="square" lIns="0" tIns="0" rIns="0" bIns="0" rtlCol="0" anchor="ctr"/>
-          <a:lstStyle/>
-          <a:p>
-            <a:pPr indent="0" marL="0">
-              <a:buNone/>
-            </a:pPr>
-            <a:r>
-              <a:rPr lang="en-US" sz="1100" b="1" dirty="0">
-                <a:solidFill>
-                  <a:srgbClr val="58584F"/>
+              <a:lnSpc>
+                <a:spcPct val="115000"/>
+              </a:lnSpc>
+              <a:spcAft>
+                <a:spcPts val="300"/>
+              </a:spcAft>
+              <a:buNone/>
+            </a:pPr>
+            <a:r>
+              <a:rPr lang="en-US" sz="1100" i="1" dirty="0">
+                <a:solidFill>
+                  <a:srgbClr val="8A8A82"/>
                 </a:solidFill>
                 <a:latin typeface="Calibri" pitchFamily="34" charset="0"/>
                 <a:ea typeface="Calibri" pitchFamily="34" charset="-122"/>
                 <a:cs typeface="Calibri" pitchFamily="34" charset="-120"/>
               </a:rPr>
-              <a:t>open</a:t>
-            </a:r>
-            <a:endParaRPr lang="en-US" sz="1100" dirty="0"/>
-          </a:p>
-        </p:txBody>
-      </p:sp>
-      <p:sp>
-        <p:nvSpPr>
-          <p:cNvPr id="12" name="Shape 10"/>
-          <p:cNvSpPr/>
-          <p:nvPr/>
-        </p:nvSpPr>
-        <p:spPr>
-          <a:xfrm>
-            <a:off x="932688" y="3200400"/>
-            <a:ext cx="2401824" cy="118872"/>
+              <a:t>Owner: Nina Rao @Nina · Expected: next week</a:t>
+            </a:r>
+            <a:endParaRPr lang="en-US" sz="1350" dirty="0"/>
+          </a:p>
+        </p:txBody>
+      </p:sp>
+      <p:sp>
+        <p:nvSpPr>
+          <p:cNvPr id="10" name="Shape 8"/>
+          <p:cNvSpPr/>
+          <p:nvPr/>
+        </p:nvSpPr>
+        <p:spPr>
+          <a:xfrm>
+            <a:off x="6277356" y="1783080"/>
+            <a:ext cx="5271516" cy="2377440"/>
           </a:xfrm>
           <a:prstGeom prst="roundRect">
             <a:avLst>
-              <a:gd name="adj" fmla="val 50000"/>
-            </a:avLst>
-          </a:prstGeom>
-          <a:solidFill>
-            <a:srgbClr val="E6E8DF"/>
-          </a:solidFill>
-          <a:ln/>
-        </p:spPr>
-      </p:sp>
-      <p:sp>
-        <p:nvSpPr>
-          <p:cNvPr id="13" name="Shape 11"/>
-          <p:cNvSpPr/>
-          <p:nvPr/>
-        </p:nvSpPr>
-        <p:spPr>
-          <a:xfrm>
-            <a:off x="932688" y="3200400"/>
-            <a:ext cx="1441094" cy="118872"/>
-          </a:xfrm>
-          <a:prstGeom prst="roundRect">
-            <a:avLst>
-              <a:gd name="adj" fmla="val 50000"/>
-            </a:avLst>
-          </a:prstGeom>
-          <a:solidFill>
-            <a:srgbClr val="D6E6A0"/>
-          </a:solidFill>
-          <a:ln/>
-        </p:spPr>
-      </p:sp>
-      <p:sp>
-        <p:nvSpPr>
-          <p:cNvPr id="14" name="Text 12"/>
-          <p:cNvSpPr/>
-          <p:nvPr/>
-        </p:nvSpPr>
-        <p:spPr>
-          <a:xfrm>
-            <a:off x="3334512" y="3127248"/>
-            <a:ext cx="548640" cy="274320"/>
-          </a:xfrm>
-          <a:prstGeom prst="rect">
-            <a:avLst/>
-          </a:prstGeom>
-          <a:noFill/>
-          <a:ln/>
-        </p:spPr>
-        <p:txBody>
-          <a:bodyPr wrap="square" lIns="0" tIns="0" rIns="0" bIns="0" rtlCol="0" anchor="ctr"/>
-          <a:lstStyle/>
-          <a:p>
-            <a:pPr algn="r" indent="0" marL="0">
-              <a:buNone/>
-            </a:pPr>
-            <a:r>
-              <a:rPr lang="en-US" sz="1100" b="1" dirty="0">
-                <a:solidFill>
-                  <a:srgbClr val="141412"/>
-                </a:solidFill>
-                <a:latin typeface="Calibri" pitchFamily="34" charset="0"/>
-                <a:ea typeface="Calibri" pitchFamily="34" charset="-122"/>
-                <a:cs typeface="Calibri" pitchFamily="34" charset="-120"/>
-              </a:rPr>
-              <a:t>60%</a:t>
-            </a:r>
-            <a:endParaRPr lang="en-US" sz="1100" dirty="0"/>
-          </a:p>
-        </p:txBody>
-      </p:sp>
-      <p:sp>
-        <p:nvSpPr>
-          <p:cNvPr id="15" name="Text 13"/>
-          <p:cNvSpPr/>
-          <p:nvPr/>
-        </p:nvSpPr>
-        <p:spPr>
-          <a:xfrm>
-            <a:off x="932688" y="3456432"/>
-            <a:ext cx="2950464" cy="548640"/>
-          </a:xfrm>
-          <a:prstGeom prst="rect">
-            <a:avLst/>
-          </a:prstGeom>
-          <a:noFill/>
-          <a:ln/>
-        </p:spPr>
-        <p:txBody>
-          <a:bodyPr wrap="square" lIns="0" tIns="0" rIns="0" bIns="0" rtlCol="0" anchor="t">
-            <a:normAutofit/>
-          </a:bodyPr>
-          <a:lstStyle/>
-          <a:p>
-            <a:pPr indent="0" marL="0">
-              <a:lnSpc>
-                <a:spcPct val="110000"/>
-              </a:lnSpc>
-              <a:buNone/>
-            </a:pPr>
-            <a:r>
-              <a:rPr lang="en-US" sz="1100" dirty="0">
-                <a:solidFill>
-                  <a:srgbClr val="58584F"/>
-                </a:solidFill>
-                <a:latin typeface="Calibri" pitchFamily="34" charset="0"/>
-                <a:ea typeface="Calibri" pitchFamily="34" charset="-122"/>
-                <a:cs typeface="Calibri" pitchFamily="34" charset="-120"/>
-              </a:rPr>
-              <a:t>Sign-in and clinic search done; booking calendar in progress.</a:t>
-            </a:r>
-            <a:endParaRPr lang="en-US" sz="1100" dirty="0"/>
-          </a:p>
-        </p:txBody>
-      </p:sp>
-      <p:sp>
-        <p:nvSpPr>
-          <p:cNvPr id="16" name="Shape 14"/>
-          <p:cNvSpPr/>
-          <p:nvPr/>
-        </p:nvSpPr>
-        <p:spPr>
-          <a:xfrm>
-            <a:off x="932688" y="4069080"/>
-            <a:ext cx="2950464" cy="0"/>
-          </a:xfrm>
-          <a:prstGeom prst="line">
-            <a:avLst/>
-          </a:prstGeom>
-          <a:noFill/>
-          <a:ln w="9525">
-            <a:solidFill>
-              <a:srgbClr val="E0E2D8"/>
-            </a:solidFill>
-            <a:prstDash val="solid"/>
-          </a:ln>
-        </p:spPr>
-      </p:sp>
-      <p:sp>
-        <p:nvSpPr>
-          <p:cNvPr id="17" name="Shape 15"/>
-          <p:cNvSpPr/>
-          <p:nvPr/>
-        </p:nvSpPr>
-        <p:spPr>
-          <a:xfrm>
-            <a:off x="932688" y="4270248"/>
-            <a:ext cx="118872" cy="118872"/>
-          </a:xfrm>
-          <a:prstGeom prst="ellipse">
-            <a:avLst/>
-          </a:prstGeom>
-          <a:solidFill>
-            <a:srgbClr val="A8CC3A"/>
-          </a:solidFill>
-          <a:ln/>
-        </p:spPr>
-      </p:sp>
-      <p:sp>
-        <p:nvSpPr>
-          <p:cNvPr id="18" name="Text 16"/>
-          <p:cNvSpPr/>
-          <p:nvPr/>
-        </p:nvSpPr>
-        <p:spPr>
-          <a:xfrm>
-            <a:off x="1152144" y="4206240"/>
-            <a:ext cx="2731008" cy="457200"/>
-          </a:xfrm>
-          <a:prstGeom prst="rect">
-            <a:avLst/>
-          </a:prstGeom>
-          <a:noFill/>
-          <a:ln/>
-        </p:spPr>
-        <p:txBody>
-          <a:bodyPr wrap="square" lIns="0" tIns="0" rIns="0" bIns="0" rtlCol="0" anchor="t">
-            <a:normAutofit/>
-          </a:bodyPr>
-          <a:lstStyle/>
-          <a:p>
-            <a:pPr indent="0" marL="0">
-              <a:lnSpc>
-                <a:spcPct val="105000"/>
-              </a:lnSpc>
-              <a:buNone/>
-            </a:pPr>
-            <a:r>
-              <a:rPr lang="en-US" sz="1100" dirty="0">
-                <a:solidFill>
-                  <a:srgbClr val="141412"/>
-                </a:solidFill>
-                <a:latin typeface="Calibri" pitchFamily="34" charset="0"/>
-                <a:ea typeface="Calibri" pitchFamily="34" charset="-122"/>
-                <a:cs typeface="Calibri" pitchFamily="34" charset="-120"/>
-              </a:rPr>
-              <a:t>P1 · Accounts &amp; Sign-in (3/3)</a:t>
-            </a:r>
-            <a:endParaRPr lang="en-US" sz="1100" dirty="0"/>
-          </a:p>
-        </p:txBody>
-      </p:sp>
-      <p:sp>
-        <p:nvSpPr>
-          <p:cNvPr id="19" name="Shape 17"/>
-          <p:cNvSpPr/>
-          <p:nvPr/>
-        </p:nvSpPr>
-        <p:spPr>
-          <a:xfrm>
-            <a:off x="932688" y="4727448"/>
-            <a:ext cx="118872" cy="118872"/>
-          </a:xfrm>
-          <a:prstGeom prst="ellipse">
-            <a:avLst/>
-          </a:prstGeom>
-          <a:solidFill>
-            <a:srgbClr val="A8CC3A"/>
-          </a:solidFill>
-          <a:ln/>
-        </p:spPr>
-      </p:sp>
-      <p:sp>
-        <p:nvSpPr>
-          <p:cNvPr id="20" name="Text 18"/>
-          <p:cNvSpPr/>
-          <p:nvPr/>
-        </p:nvSpPr>
-        <p:spPr>
-          <a:xfrm>
-            <a:off x="1152144" y="4663440"/>
-            <a:ext cx="2731008" cy="457200"/>
-          </a:xfrm>
-          <a:prstGeom prst="rect">
-            <a:avLst/>
-          </a:prstGeom>
-          <a:noFill/>
-          <a:ln/>
-        </p:spPr>
-        <p:txBody>
-          <a:bodyPr wrap="square" lIns="0" tIns="0" rIns="0" bIns="0" rtlCol="0" anchor="t">
-            <a:normAutofit/>
-          </a:bodyPr>
-          <a:lstStyle/>
-          <a:p>
-            <a:pPr indent="0" marL="0">
-              <a:lnSpc>
-                <a:spcPct val="105000"/>
-              </a:lnSpc>
-              <a:buNone/>
-            </a:pPr>
-            <a:r>
-              <a:rPr lang="en-US" sz="1100" dirty="0">
-                <a:solidFill>
-                  <a:srgbClr val="141412"/>
-                </a:solidFill>
-                <a:latin typeface="Calibri" pitchFamily="34" charset="0"/>
-                <a:ea typeface="Calibri" pitchFamily="34" charset="-122"/>
-                <a:cs typeface="Calibri" pitchFamily="34" charset="-120"/>
-              </a:rPr>
-              <a:t>P2 · Clinic Search &amp; Maps (5/5)</a:t>
-            </a:r>
-            <a:endParaRPr lang="en-US" sz="1100" dirty="0"/>
-          </a:p>
-        </p:txBody>
-      </p:sp>
-      <p:sp>
-        <p:nvSpPr>
-          <p:cNvPr id="21" name="Shape 19"/>
-          <p:cNvSpPr/>
-          <p:nvPr/>
-        </p:nvSpPr>
-        <p:spPr>
-          <a:xfrm>
-            <a:off x="932688" y="5184648"/>
-            <a:ext cx="118872" cy="118872"/>
-          </a:xfrm>
-          <a:prstGeom prst="ellipse">
-            <a:avLst/>
-          </a:prstGeom>
-          <a:solidFill>
-            <a:srgbClr val="D6E6A0"/>
-          </a:solidFill>
-          <a:ln/>
-        </p:spPr>
-      </p:sp>
-      <p:sp>
-        <p:nvSpPr>
-          <p:cNvPr id="22" name="Text 20"/>
-          <p:cNvSpPr/>
-          <p:nvPr/>
-        </p:nvSpPr>
-        <p:spPr>
-          <a:xfrm>
-            <a:off x="1152144" y="5120640"/>
-            <a:ext cx="2731008" cy="457200"/>
-          </a:xfrm>
-          <a:prstGeom prst="rect">
-            <a:avLst/>
-          </a:prstGeom>
-          <a:noFill/>
-          <a:ln/>
-        </p:spPr>
-        <p:txBody>
-          <a:bodyPr wrap="square" lIns="0" tIns="0" rIns="0" bIns="0" rtlCol="0" anchor="t">
-            <a:normAutofit/>
-          </a:bodyPr>
-          <a:lstStyle/>
-          <a:p>
-            <a:pPr indent="0" marL="0">
-              <a:lnSpc>
-                <a:spcPct val="105000"/>
-              </a:lnSpc>
-              <a:buNone/>
-            </a:pPr>
-            <a:r>
-              <a:rPr lang="en-US" sz="1100" dirty="0">
-                <a:solidFill>
-                  <a:srgbClr val="141412"/>
-                </a:solidFill>
-                <a:latin typeface="Calibri" pitchFamily="34" charset="0"/>
-                <a:ea typeface="Calibri" pitchFamily="34" charset="-122"/>
-                <a:cs typeface="Calibri" pitchFamily="34" charset="-120"/>
-              </a:rPr>
-              <a:t>P3 · Booking Calendar (2/5)</a:t>
-            </a:r>
-            <a:endParaRPr lang="en-US" sz="1100" dirty="0"/>
-          </a:p>
-        </p:txBody>
-      </p:sp>
-      <p:sp>
-        <p:nvSpPr>
-          <p:cNvPr id="23" name="Shape 21"/>
-          <p:cNvSpPr/>
-          <p:nvPr/>
-        </p:nvSpPr>
-        <p:spPr>
-          <a:xfrm>
-            <a:off x="932688" y="5641848"/>
-            <a:ext cx="118872" cy="118872"/>
-          </a:xfrm>
-          <a:prstGeom prst="ellipse">
-            <a:avLst/>
-          </a:prstGeom>
-          <a:solidFill>
-            <a:srgbClr val="E6E8DF"/>
-          </a:solidFill>
-          <a:ln/>
-        </p:spPr>
-      </p:sp>
-      <p:sp>
-        <p:nvSpPr>
-          <p:cNvPr id="24" name="Text 22"/>
-          <p:cNvSpPr/>
-          <p:nvPr/>
-        </p:nvSpPr>
-        <p:spPr>
-          <a:xfrm>
-            <a:off x="1152144" y="5577840"/>
-            <a:ext cx="2731008" cy="457200"/>
-          </a:xfrm>
-          <a:prstGeom prst="rect">
-            <a:avLst/>
-          </a:prstGeom>
-          <a:noFill/>
-          <a:ln/>
-        </p:spPr>
-        <p:txBody>
-          <a:bodyPr wrap="square" lIns="0" tIns="0" rIns="0" bIns="0" rtlCol="0" anchor="t">
-            <a:normAutofit/>
-          </a:bodyPr>
-          <a:lstStyle/>
-          <a:p>
-            <a:pPr indent="0" marL="0">
-              <a:lnSpc>
-                <a:spcPct val="105000"/>
-              </a:lnSpc>
-              <a:buNone/>
-            </a:pPr>
-            <a:r>
-              <a:rPr lang="en-US" sz="1100" dirty="0">
-                <a:solidFill>
-                  <a:srgbClr val="141412"/>
-                </a:solidFill>
-                <a:latin typeface="Calibri" pitchFamily="34" charset="0"/>
-                <a:ea typeface="Calibri" pitchFamily="34" charset="-122"/>
-                <a:cs typeface="Calibri" pitchFamily="34" charset="-120"/>
-              </a:rPr>
-              <a:t>P4 · Payments &amp; Receipts (0/4)</a:t>
-            </a:r>
-            <a:endParaRPr lang="en-US" sz="1100" dirty="0"/>
-          </a:p>
-        </p:txBody>
-      </p:sp>
-      <p:sp>
-        <p:nvSpPr>
-          <p:cNvPr id="25" name="Shape 23"/>
-          <p:cNvSpPr/>
-          <p:nvPr/>
-        </p:nvSpPr>
-        <p:spPr>
-          <a:xfrm>
-            <a:off x="4367784" y="1783080"/>
-            <a:ext cx="3453384" cy="4434840"/>
-          </a:xfrm>
-          <a:prstGeom prst="roundRect">
-            <a:avLst>
-              <a:gd name="adj" fmla="val 2118"/>
+              <a:gd name="adj" fmla="val 3077"/>
             </a:avLst>
           </a:prstGeom>
           <a:solidFill>
@@ -11585,34 +12740,34 @@
       </p:sp>
       <p:sp>
         <p:nvSpPr>
-          <p:cNvPr id="26" name="Shape 24"/>
-          <p:cNvSpPr/>
-          <p:nvPr/>
-        </p:nvSpPr>
-        <p:spPr>
-          <a:xfrm>
-            <a:off x="4367784" y="1783080"/>
-            <a:ext cx="82296" cy="4434840"/>
+          <p:cNvPr id="11" name="Shape 9"/>
+          <p:cNvSpPr/>
+          <p:nvPr/>
+        </p:nvSpPr>
+        <p:spPr>
+          <a:xfrm>
+            <a:off x="6277356" y="1783080"/>
+            <a:ext cx="5271516" cy="82296"/>
           </a:xfrm>
           <a:prstGeom prst="rect">
             <a:avLst/>
           </a:prstGeom>
           <a:solidFill>
-            <a:srgbClr val="D6E6A0"/>
+            <a:srgbClr val="141412"/>
           </a:solidFill>
           <a:ln/>
         </p:spPr>
       </p:sp>
       <p:sp>
         <p:nvSpPr>
-          <p:cNvPr id="27" name="Text 25"/>
-          <p:cNvSpPr/>
-          <p:nvPr/>
-        </p:nvSpPr>
-        <p:spPr>
-          <a:xfrm>
-            <a:off x="4660392" y="1984248"/>
-            <a:ext cx="2950464" cy="329184"/>
+          <p:cNvPr id="12" name="Text 10"/>
+          <p:cNvSpPr/>
+          <p:nvPr/>
+        </p:nvSpPr>
+        <p:spPr>
+          <a:xfrm>
+            <a:off x="6551676" y="2039112"/>
+            <a:ext cx="4722876" cy="292608"/>
           </a:xfrm>
           <a:prstGeom prst="rect">
             <a:avLst/>
@@ -11628,7 +12783,7 @@
               <a:buNone/>
             </a:pPr>
             <a:r>
-              <a:rPr lang="en-US" sz="1500" b="1" dirty="0">
+              <a:rPr lang="en-US" sz="1200" b="1" dirty="0">
                 <a:solidFill>
                   <a:srgbClr val="141412"/>
                 </a:solidFill>
@@ -11636,22 +12791,42 @@
                 <a:ea typeface="Calibri" pitchFamily="34" charset="-122"/>
                 <a:cs typeface="Calibri" pitchFamily="34" charset="-120"/>
               </a:rPr>
-              <a:t>Nina Rao @Nina</a:t>
-            </a:r>
-            <a:endParaRPr lang="en-US" sz="1500" dirty="0"/>
-          </a:p>
-        </p:txBody>
-      </p:sp>
-      <p:sp>
-        <p:nvSpPr>
-          <p:cNvPr id="28" name="Text 26"/>
-          <p:cNvSpPr/>
-          <p:nvPr/>
-        </p:nvSpPr>
-        <p:spPr>
-          <a:xfrm>
-            <a:off x="4660392" y="2295144"/>
-            <a:ext cx="2950464" cy="237744"/>
+              <a:t>Decisions Needed</a:t>
+            </a:r>
+            <a:endParaRPr lang="en-US" sz="1200" dirty="0"/>
+          </a:p>
+        </p:txBody>
+      </p:sp>
+      <p:sp>
+        <p:nvSpPr>
+          <p:cNvPr id="13" name="Shape 11"/>
+          <p:cNvSpPr/>
+          <p:nvPr/>
+        </p:nvSpPr>
+        <p:spPr>
+          <a:xfrm>
+            <a:off x="6551676" y="2532888"/>
+            <a:ext cx="329184" cy="329184"/>
+          </a:xfrm>
+          <a:prstGeom prst="ellipse">
+            <a:avLst/>
+          </a:prstGeom>
+          <a:solidFill>
+            <a:srgbClr val="A8CC3A"/>
+          </a:solidFill>
+          <a:ln/>
+        </p:spPr>
+      </p:sp>
+      <p:sp>
+        <p:nvSpPr>
+          <p:cNvPr id="14" name="Text 12"/>
+          <p:cNvSpPr/>
+          <p:nvPr/>
+        </p:nvSpPr>
+        <p:spPr>
+          <a:xfrm>
+            <a:off x="6551676" y="2532888"/>
+            <a:ext cx="329184" cy="329184"/>
           </a:xfrm>
           <a:prstGeom prst="rect">
             <a:avLst/>
@@ -11663,106 +12838,81 @@
           <a:bodyPr wrap="square" lIns="0" tIns="0" rIns="0" bIns="0" rtlCol="0" anchor="ctr"/>
           <a:lstStyle/>
           <a:p>
-            <a:pPr indent="0" marL="0">
-              <a:buNone/>
-            </a:pPr>
-            <a:r>
-              <a:rPr lang="en-US" sz="1100" b="1" dirty="0">
-                <a:solidFill>
-                  <a:srgbClr val="6E8A1F"/>
+            <a:pPr algn="ctr" indent="0" marL="0">
+              <a:buNone/>
+            </a:pPr>
+            <a:r>
+              <a:rPr lang="en-US" sz="1400" b="1" dirty="0">
+                <a:solidFill>
+                  <a:srgbClr val="141412"/>
                 </a:solidFill>
                 <a:latin typeface="Calibri" pitchFamily="34" charset="0"/>
                 <a:ea typeface="Calibri" pitchFamily="34" charset="-122"/>
                 <a:cs typeface="Calibri" pitchFamily="34" charset="-120"/>
               </a:rPr>
-              <a:t>ClinicBook · Clinic Dashboard</a:t>
-            </a:r>
-            <a:endParaRPr lang="en-US" sz="1100" dirty="0"/>
-          </a:p>
-        </p:txBody>
-      </p:sp>
-      <p:sp>
-        <p:nvSpPr>
-          <p:cNvPr id="29" name="Text 27"/>
-          <p:cNvSpPr/>
-          <p:nvPr/>
-        </p:nvSpPr>
-        <p:spPr>
-          <a:xfrm>
-            <a:off x="4660392" y="2606040"/>
-            <a:ext cx="411480" cy="457200"/>
-          </a:xfrm>
-          <a:prstGeom prst="rect">
-            <a:avLst/>
-          </a:prstGeom>
-          <a:noFill/>
-          <a:ln/>
-        </p:spPr>
-        <p:txBody>
-          <a:bodyPr wrap="square" lIns="0" tIns="0" rIns="0" bIns="0" rtlCol="0" anchor="ctr"/>
+              <a:t>?</a:t>
+            </a:r>
+            <a:endParaRPr lang="en-US" sz="1400" dirty="0"/>
+          </a:p>
+        </p:txBody>
+      </p:sp>
+      <p:sp>
+        <p:nvSpPr>
+          <p:cNvPr id="15" name="Text 13"/>
+          <p:cNvSpPr/>
+          <p:nvPr/>
+        </p:nvSpPr>
+        <p:spPr>
+          <a:xfrm>
+            <a:off x="7008876" y="2514600"/>
+            <a:ext cx="4265676" cy="1234440"/>
+          </a:xfrm>
+          <a:prstGeom prst="rect">
+            <a:avLst/>
+          </a:prstGeom>
+          <a:noFill/>
+          <a:ln/>
+        </p:spPr>
+        <p:txBody>
+          <a:bodyPr wrap="square" lIns="0" tIns="0" rIns="0" bIns="0" rtlCol="0" anchor="t">
+            <a:normAutofit/>
+          </a:bodyPr>
           <a:lstStyle/>
           <a:p>
             <a:pPr indent="0" marL="0">
-              <a:buNone/>
-            </a:pPr>
-            <a:r>
-              <a:rPr lang="en-US" sz="2600" b="1" dirty="0">
+              <a:lnSpc>
+                <a:spcPct val="115000"/>
+              </a:lnSpc>
+              <a:spcAft>
+                <a:spcPts val="300"/>
+              </a:spcAft>
+              <a:buNone/>
+            </a:pPr>
+            <a:r>
+              <a:rPr lang="en-US" sz="1350" b="1" dirty="0">
                 <a:solidFill>
                   <a:srgbClr val="141412"/>
-                </a:solidFill>
-                <a:latin typeface="Cambria" pitchFamily="34" charset="0"/>
-                <a:ea typeface="Cambria" pitchFamily="34" charset="-122"/>
-                <a:cs typeface="Cambria" pitchFamily="34" charset="-120"/>
-              </a:rPr>
-              <a:t>4</a:t>
-            </a:r>
-            <a:endParaRPr lang="en-US" sz="2600" dirty="0"/>
-          </a:p>
-        </p:txBody>
-      </p:sp>
-      <p:sp>
-        <p:nvSpPr>
-          <p:cNvPr id="30" name="Text 28"/>
-          <p:cNvSpPr/>
-          <p:nvPr/>
-        </p:nvSpPr>
-        <p:spPr>
-          <a:xfrm>
-            <a:off x="5117592" y="2606040"/>
-            <a:ext cx="822960" cy="457200"/>
-          </a:xfrm>
-          <a:prstGeom prst="rect">
-            <a:avLst/>
-          </a:prstGeom>
-          <a:noFill/>
-          <a:ln/>
-        </p:spPr>
-        <p:txBody>
-          <a:bodyPr wrap="square" lIns="0" tIns="0" rIns="0" bIns="0" rtlCol="0" anchor="ctr"/>
-          <a:lstStyle/>
-          <a:p>
-            <a:pPr indent="0" marL="0">
-              <a:buNone/>
-            </a:pPr>
-            <a:r>
-              <a:rPr lang="en-US" sz="1100" b="1" dirty="0">
-                <a:solidFill>
-                  <a:srgbClr val="58584F"/>
                 </a:solidFill>
                 <a:latin typeface="Calibri" pitchFamily="34" charset="0"/>
                 <a:ea typeface="Calibri" pitchFamily="34" charset="-122"/>
                 <a:cs typeface="Calibri" pitchFamily="34" charset="-120"/>
               </a:rPr>
-              <a:t>done this</a:t>
-            </a:r>
-            <a:endParaRPr lang="en-US" sz="1100" dirty="0"/>
+              <a:t>Can patients turn off SMS reminders and keep email only?</a:t>
+            </a:r>
+            <a:endParaRPr lang="en-US" sz="1350" dirty="0"/>
           </a:p>
           <a:p>
             <a:pPr indent="0" marL="0">
-              <a:buNone/>
-            </a:pPr>
-            <a:r>
-              <a:rPr lang="en-US" sz="1100" b="1" dirty="0">
+              <a:lnSpc>
+                <a:spcPct val="115000"/>
+              </a:lnSpc>
+              <a:spcAft>
+                <a:spcPts val="300"/>
+              </a:spcAft>
+              <a:buNone/>
+            </a:pPr>
+            <a:r>
+              <a:rPr lang="en-US" sz="1200" dirty="0">
                 <a:solidFill>
                   <a:srgbClr val="58584F"/>
                 </a:solidFill>
@@ -11770,1238 +12920,32 @@
                 <a:ea typeface="Calibri" pitchFamily="34" charset="-122"/>
                 <a:cs typeface="Calibri" pitchFamily="34" charset="-120"/>
               </a:rPr>
-              <a:t>week</a:t>
-            </a:r>
-            <a:endParaRPr lang="en-US" sz="1100" dirty="0"/>
-          </a:p>
-        </p:txBody>
-      </p:sp>
-      <p:sp>
-        <p:nvSpPr>
-          <p:cNvPr id="31" name="Text 29"/>
-          <p:cNvSpPr/>
-          <p:nvPr/>
-        </p:nvSpPr>
-        <p:spPr>
-          <a:xfrm>
-            <a:off x="5986272" y="2606040"/>
-            <a:ext cx="411480" cy="457200"/>
-          </a:xfrm>
-          <a:prstGeom prst="rect">
-            <a:avLst/>
-          </a:prstGeom>
-          <a:noFill/>
-          <a:ln/>
-        </p:spPr>
-        <p:txBody>
-          <a:bodyPr wrap="square" lIns="0" tIns="0" rIns="0" bIns="0" rtlCol="0" anchor="ctr"/>
-          <a:lstStyle/>
+              <a:t>Today every patient with a phone number receives SMS reminders; some clinics report complaints.</a:t>
+            </a:r>
+            <a:endParaRPr lang="en-US" sz="1350" dirty="0"/>
+          </a:p>
           <a:p>
             <a:pPr indent="0" marL="0">
-              <a:buNone/>
-            </a:pPr>
-            <a:r>
-              <a:rPr lang="en-US" sz="2600" b="1" dirty="0">
-                <a:solidFill>
-                  <a:srgbClr val="141412"/>
-                </a:solidFill>
-                <a:latin typeface="Cambria" pitchFamily="34" charset="0"/>
-                <a:ea typeface="Cambria" pitchFamily="34" charset="-122"/>
-                <a:cs typeface="Cambria" pitchFamily="34" charset="-120"/>
-              </a:rPr>
-              <a:t>1</a:t>
-            </a:r>
-            <a:endParaRPr lang="en-US" sz="2600" dirty="0"/>
-          </a:p>
-        </p:txBody>
-      </p:sp>
-      <p:sp>
-        <p:nvSpPr>
-          <p:cNvPr id="32" name="Text 30"/>
-          <p:cNvSpPr/>
-          <p:nvPr/>
-        </p:nvSpPr>
-        <p:spPr>
-          <a:xfrm>
-            <a:off x="6443472" y="2606040"/>
-            <a:ext cx="731520" cy="457200"/>
-          </a:xfrm>
-          <a:prstGeom prst="rect">
-            <a:avLst/>
-          </a:prstGeom>
-          <a:noFill/>
-          <a:ln/>
-        </p:spPr>
-        <p:txBody>
-          <a:bodyPr wrap="square" lIns="0" tIns="0" rIns="0" bIns="0" rtlCol="0" anchor="ctr"/>
-          <a:lstStyle/>
-          <a:p>
-            <a:pPr indent="0" marL="0">
-              <a:buNone/>
-            </a:pPr>
-            <a:r>
-              <a:rPr lang="en-US" sz="1100" b="1" dirty="0">
-                <a:solidFill>
-                  <a:srgbClr val="58584F"/>
+              <a:lnSpc>
+                <a:spcPct val="115000"/>
+              </a:lnSpc>
+              <a:spcAft>
+                <a:spcPts val="300"/>
+              </a:spcAft>
+              <a:buNone/>
+            </a:pPr>
+            <a:r>
+              <a:rPr lang="en-US" sz="1100" i="1" dirty="0">
+                <a:solidFill>
+                  <a:srgbClr val="8A8A82"/>
                 </a:solidFill>
                 <a:latin typeface="Calibri" pitchFamily="34" charset="0"/>
                 <a:ea typeface="Calibri" pitchFamily="34" charset="-122"/>
                 <a:cs typeface="Calibri" pitchFamily="34" charset="-120"/>
               </a:rPr>
-              <a:t>open</a:t>
-            </a:r>
-            <a:endParaRPr lang="en-US" sz="1100" dirty="0"/>
-          </a:p>
-        </p:txBody>
-      </p:sp>
-      <p:sp>
-        <p:nvSpPr>
-          <p:cNvPr id="33" name="Shape 31"/>
-          <p:cNvSpPr/>
-          <p:nvPr/>
-        </p:nvSpPr>
-        <p:spPr>
-          <a:xfrm>
-            <a:off x="4660392" y="3200400"/>
-            <a:ext cx="2401824" cy="118872"/>
-          </a:xfrm>
-          <a:prstGeom prst="roundRect">
-            <a:avLst>
-              <a:gd name="adj" fmla="val 50000"/>
-            </a:avLst>
-          </a:prstGeom>
-          <a:solidFill>
-            <a:srgbClr val="E6E8DF"/>
-          </a:solidFill>
-          <a:ln/>
-        </p:spPr>
-      </p:sp>
-      <p:sp>
-        <p:nvSpPr>
-          <p:cNvPr id="34" name="Shape 32"/>
-          <p:cNvSpPr/>
-          <p:nvPr/>
-        </p:nvSpPr>
-        <p:spPr>
-          <a:xfrm>
-            <a:off x="4660392" y="3200400"/>
-            <a:ext cx="1681277" cy="118872"/>
-          </a:xfrm>
-          <a:prstGeom prst="roundRect">
-            <a:avLst>
-              <a:gd name="adj" fmla="val 50000"/>
-            </a:avLst>
-          </a:prstGeom>
-          <a:solidFill>
-            <a:srgbClr val="D6E6A0"/>
-          </a:solidFill>
-          <a:ln/>
-        </p:spPr>
-      </p:sp>
-      <p:sp>
-        <p:nvSpPr>
-          <p:cNvPr id="35" name="Text 33"/>
-          <p:cNvSpPr/>
-          <p:nvPr/>
-        </p:nvSpPr>
-        <p:spPr>
-          <a:xfrm>
-            <a:off x="7062216" y="3127248"/>
-            <a:ext cx="548640" cy="274320"/>
-          </a:xfrm>
-          <a:prstGeom prst="rect">
-            <a:avLst/>
-          </a:prstGeom>
-          <a:noFill/>
-          <a:ln/>
-        </p:spPr>
-        <p:txBody>
-          <a:bodyPr wrap="square" lIns="0" tIns="0" rIns="0" bIns="0" rtlCol="0" anchor="ctr"/>
-          <a:lstStyle/>
-          <a:p>
-            <a:pPr algn="r" indent="0" marL="0">
-              <a:buNone/>
-            </a:pPr>
-            <a:r>
-              <a:rPr lang="en-US" sz="1100" b="1" dirty="0">
-                <a:solidFill>
-                  <a:srgbClr val="141412"/>
-                </a:solidFill>
-                <a:latin typeface="Calibri" pitchFamily="34" charset="0"/>
-                <a:ea typeface="Calibri" pitchFamily="34" charset="-122"/>
-                <a:cs typeface="Calibri" pitchFamily="34" charset="-120"/>
-              </a:rPr>
-              <a:t>70%</a:t>
-            </a:r>
-            <a:endParaRPr lang="en-US" sz="1100" dirty="0"/>
-          </a:p>
-        </p:txBody>
-      </p:sp>
-      <p:sp>
-        <p:nvSpPr>
-          <p:cNvPr id="36" name="Text 34"/>
-          <p:cNvSpPr/>
-          <p:nvPr/>
-        </p:nvSpPr>
-        <p:spPr>
-          <a:xfrm>
-            <a:off x="4660392" y="3456432"/>
-            <a:ext cx="2950464" cy="548640"/>
-          </a:xfrm>
-          <a:prstGeom prst="rect">
-            <a:avLst/>
-          </a:prstGeom>
-          <a:noFill/>
-          <a:ln/>
-        </p:spPr>
-        <p:txBody>
-          <a:bodyPr wrap="square" lIns="0" tIns="0" rIns="0" bIns="0" rtlCol="0" anchor="t">
-            <a:normAutofit/>
-          </a:bodyPr>
-          <a:lstStyle/>
-          <a:p>
-            <a:pPr indent="0" marL="0">
-              <a:lnSpc>
-                <a:spcPct val="110000"/>
-              </a:lnSpc>
-              <a:buNone/>
-            </a:pPr>
-            <a:r>
-              <a:rPr lang="en-US" sz="1100" dirty="0">
-                <a:solidFill>
-                  <a:srgbClr val="58584F"/>
-                </a:solidFill>
-                <a:latin typeface="Calibri" pitchFamily="34" charset="0"/>
-                <a:ea typeface="Calibri" pitchFamily="34" charset="-122"/>
-                <a:cs typeface="Calibri" pitchFamily="34" charset="-120"/>
-              </a:rPr>
-              <a:t>Onboarding and schedules done; reminders in final review.</a:t>
-            </a:r>
-            <a:endParaRPr lang="en-US" sz="1100" dirty="0"/>
-          </a:p>
-        </p:txBody>
-      </p:sp>
-      <p:sp>
-        <p:nvSpPr>
-          <p:cNvPr id="37" name="Shape 35"/>
-          <p:cNvSpPr/>
-          <p:nvPr/>
-        </p:nvSpPr>
-        <p:spPr>
-          <a:xfrm>
-            <a:off x="4660392" y="4069080"/>
-            <a:ext cx="2950464" cy="0"/>
-          </a:xfrm>
-          <a:prstGeom prst="line">
-            <a:avLst/>
-          </a:prstGeom>
-          <a:noFill/>
-          <a:ln w="9525">
-            <a:solidFill>
-              <a:srgbClr val="E0E2D8"/>
-            </a:solidFill>
-            <a:prstDash val="solid"/>
-          </a:ln>
-        </p:spPr>
-      </p:sp>
-      <p:sp>
-        <p:nvSpPr>
-          <p:cNvPr id="38" name="Shape 36"/>
-          <p:cNvSpPr/>
-          <p:nvPr/>
-        </p:nvSpPr>
-        <p:spPr>
-          <a:xfrm>
-            <a:off x="4660392" y="4270248"/>
-            <a:ext cx="118872" cy="118872"/>
-          </a:xfrm>
-          <a:prstGeom prst="ellipse">
-            <a:avLst/>
-          </a:prstGeom>
-          <a:solidFill>
-            <a:srgbClr val="A8CC3A"/>
-          </a:solidFill>
-          <a:ln/>
-        </p:spPr>
-      </p:sp>
-      <p:sp>
-        <p:nvSpPr>
-          <p:cNvPr id="39" name="Text 37"/>
-          <p:cNvSpPr/>
-          <p:nvPr/>
-        </p:nvSpPr>
-        <p:spPr>
-          <a:xfrm>
-            <a:off x="4879848" y="4206240"/>
-            <a:ext cx="2731008" cy="457200"/>
-          </a:xfrm>
-          <a:prstGeom prst="rect">
-            <a:avLst/>
-          </a:prstGeom>
-          <a:noFill/>
-          <a:ln/>
-        </p:spPr>
-        <p:txBody>
-          <a:bodyPr wrap="square" lIns="0" tIns="0" rIns="0" bIns="0" rtlCol="0" anchor="t">
-            <a:normAutofit/>
-          </a:bodyPr>
-          <a:lstStyle/>
-          <a:p>
-            <a:pPr indent="0" marL="0">
-              <a:lnSpc>
-                <a:spcPct val="105000"/>
-              </a:lnSpc>
-              <a:buNone/>
-            </a:pPr>
-            <a:r>
-              <a:rPr lang="en-US" sz="1100" dirty="0">
-                <a:solidFill>
-                  <a:srgbClr val="141412"/>
-                </a:solidFill>
-                <a:latin typeface="Calibri" pitchFamily="34" charset="0"/>
-                <a:ea typeface="Calibri" pitchFamily="34" charset="-122"/>
-                <a:cs typeface="Calibri" pitchFamily="34" charset="-120"/>
-              </a:rPr>
-              <a:t>P1 · Clinic Onboarding (3/3)</a:t>
-            </a:r>
-            <a:endParaRPr lang="en-US" sz="1100" dirty="0"/>
-          </a:p>
-        </p:txBody>
-      </p:sp>
-      <p:sp>
-        <p:nvSpPr>
-          <p:cNvPr id="40" name="Shape 38"/>
-          <p:cNvSpPr/>
-          <p:nvPr/>
-        </p:nvSpPr>
-        <p:spPr>
-          <a:xfrm>
-            <a:off x="4660392" y="4727448"/>
-            <a:ext cx="118872" cy="118872"/>
-          </a:xfrm>
-          <a:prstGeom prst="ellipse">
-            <a:avLst/>
-          </a:prstGeom>
-          <a:solidFill>
-            <a:srgbClr val="A8CC3A"/>
-          </a:solidFill>
-          <a:ln/>
-        </p:spPr>
-      </p:sp>
-      <p:sp>
-        <p:nvSpPr>
-          <p:cNvPr id="41" name="Text 39"/>
-          <p:cNvSpPr/>
-          <p:nvPr/>
-        </p:nvSpPr>
-        <p:spPr>
-          <a:xfrm>
-            <a:off x="4879848" y="4663440"/>
-            <a:ext cx="2731008" cy="457200"/>
-          </a:xfrm>
-          <a:prstGeom prst="rect">
-            <a:avLst/>
-          </a:prstGeom>
-          <a:noFill/>
-          <a:ln/>
-        </p:spPr>
-        <p:txBody>
-          <a:bodyPr wrap="square" lIns="0" tIns="0" rIns="0" bIns="0" rtlCol="0" anchor="t">
-            <a:normAutofit/>
-          </a:bodyPr>
-          <a:lstStyle/>
-          <a:p>
-            <a:pPr indent="0" marL="0">
-              <a:lnSpc>
-                <a:spcPct val="105000"/>
-              </a:lnSpc>
-              <a:buNone/>
-            </a:pPr>
-            <a:r>
-              <a:rPr lang="en-US" sz="1100" dirty="0">
-                <a:solidFill>
-                  <a:srgbClr val="141412"/>
-                </a:solidFill>
-                <a:latin typeface="Calibri" pitchFamily="34" charset="0"/>
-                <a:ea typeface="Calibri" pitchFamily="34" charset="-122"/>
-                <a:cs typeface="Calibri" pitchFamily="34" charset="-120"/>
-              </a:rPr>
-              <a:t>P2 · Doctor Schedules (5/5)</a:t>
-            </a:r>
-            <a:endParaRPr lang="en-US" sz="1100" dirty="0"/>
-          </a:p>
-        </p:txBody>
-      </p:sp>
-      <p:sp>
-        <p:nvSpPr>
-          <p:cNvPr id="42" name="Shape 40"/>
-          <p:cNvSpPr/>
-          <p:nvPr/>
-        </p:nvSpPr>
-        <p:spPr>
-          <a:xfrm>
-            <a:off x="4660392" y="5184648"/>
-            <a:ext cx="118872" cy="118872"/>
-          </a:xfrm>
-          <a:prstGeom prst="ellipse">
-            <a:avLst/>
-          </a:prstGeom>
-          <a:solidFill>
-            <a:srgbClr val="D6E6A0"/>
-          </a:solidFill>
-          <a:ln/>
-        </p:spPr>
-      </p:sp>
-      <p:sp>
-        <p:nvSpPr>
-          <p:cNvPr id="43" name="Text 41"/>
-          <p:cNvSpPr/>
-          <p:nvPr/>
-        </p:nvSpPr>
-        <p:spPr>
-          <a:xfrm>
-            <a:off x="4879848" y="5120640"/>
-            <a:ext cx="2731008" cy="457200"/>
-          </a:xfrm>
-          <a:prstGeom prst="rect">
-            <a:avLst/>
-          </a:prstGeom>
-          <a:noFill/>
-          <a:ln/>
-        </p:spPr>
-        <p:txBody>
-          <a:bodyPr wrap="square" lIns="0" tIns="0" rIns="0" bIns="0" rtlCol="0" anchor="t">
-            <a:normAutofit/>
-          </a:bodyPr>
-          <a:lstStyle/>
-          <a:p>
-            <a:pPr indent="0" marL="0">
-              <a:lnSpc>
-                <a:spcPct val="105000"/>
-              </a:lnSpc>
-              <a:buNone/>
-            </a:pPr>
-            <a:r>
-              <a:rPr lang="en-US" sz="1100" dirty="0">
-                <a:solidFill>
-                  <a:srgbClr val="141412"/>
-                </a:solidFill>
-                <a:latin typeface="Calibri" pitchFamily="34" charset="0"/>
-                <a:ea typeface="Calibri" pitchFamily="34" charset="-122"/>
-                <a:cs typeface="Calibri" pitchFamily="34" charset="-120"/>
-              </a:rPr>
-              <a:t>P4 · Reminders, in review (5/5)</a:t>
-            </a:r>
-            <a:endParaRPr lang="en-US" sz="1100" dirty="0"/>
-          </a:p>
-        </p:txBody>
-      </p:sp>
-      <p:sp>
-        <p:nvSpPr>
-          <p:cNvPr id="44" name="Shape 42"/>
-          <p:cNvSpPr/>
-          <p:nvPr/>
-        </p:nvSpPr>
-        <p:spPr>
-          <a:xfrm>
-            <a:off x="4660392" y="5641848"/>
-            <a:ext cx="118872" cy="118872"/>
-          </a:xfrm>
-          <a:prstGeom prst="ellipse">
-            <a:avLst/>
-          </a:prstGeom>
-          <a:solidFill>
-            <a:srgbClr val="E6E8DF"/>
-          </a:solidFill>
-          <a:ln/>
-        </p:spPr>
-      </p:sp>
-      <p:sp>
-        <p:nvSpPr>
-          <p:cNvPr id="45" name="Text 43"/>
-          <p:cNvSpPr/>
-          <p:nvPr/>
-        </p:nvSpPr>
-        <p:spPr>
-          <a:xfrm>
-            <a:off x="4879848" y="5577840"/>
-            <a:ext cx="2731008" cy="457200"/>
-          </a:xfrm>
-          <a:prstGeom prst="rect">
-            <a:avLst/>
-          </a:prstGeom>
-          <a:noFill/>
-          <a:ln/>
-        </p:spPr>
-        <p:txBody>
-          <a:bodyPr wrap="square" lIns="0" tIns="0" rIns="0" bIns="0" rtlCol="0" anchor="t">
-            <a:normAutofit/>
-          </a:bodyPr>
-          <a:lstStyle/>
-          <a:p>
-            <a:pPr indent="0" marL="0">
-              <a:lnSpc>
-                <a:spcPct val="105000"/>
-              </a:lnSpc>
-              <a:buNone/>
-            </a:pPr>
-            <a:r>
-              <a:rPr lang="en-US" sz="1100" dirty="0">
-                <a:solidFill>
-                  <a:srgbClr val="141412"/>
-                </a:solidFill>
-                <a:latin typeface="Calibri" pitchFamily="34" charset="0"/>
-                <a:ea typeface="Calibri" pitchFamily="34" charset="-122"/>
-                <a:cs typeface="Calibri" pitchFamily="34" charset="-120"/>
-              </a:rPr>
-              <a:t>P3 · Reports &amp; Exports (0/3)</a:t>
-            </a:r>
-            <a:endParaRPr lang="en-US" sz="1100" dirty="0"/>
-          </a:p>
-        </p:txBody>
-      </p:sp>
-      <p:sp>
-        <p:nvSpPr>
-          <p:cNvPr id="46" name="Shape 44"/>
-          <p:cNvSpPr/>
-          <p:nvPr/>
-        </p:nvSpPr>
-        <p:spPr>
-          <a:xfrm>
-            <a:off x="8095488" y="1783080"/>
-            <a:ext cx="3453384" cy="4434840"/>
-          </a:xfrm>
-          <a:prstGeom prst="roundRect">
-            <a:avLst>
-              <a:gd name="adj" fmla="val 2118"/>
-            </a:avLst>
-          </a:prstGeom>
-          <a:solidFill>
-            <a:srgbClr val="F6F7F1"/>
-          </a:solidFill>
-          <a:ln/>
-          <a:effectLst>
-            <a:outerShdw sx="100000" sy="100000" kx="0" ky="0" algn="bl" rotWithShape="0" blurRad="76200" dist="25400" dir="5400000">
-              <a:srgbClr val="000000">
-                <a:alpha val="8000"/>
-              </a:srgbClr>
-            </a:outerShdw>
-          </a:effectLst>
-        </p:spPr>
-      </p:sp>
-      <p:sp>
-        <p:nvSpPr>
-          <p:cNvPr id="47" name="Shape 45"/>
-          <p:cNvSpPr/>
-          <p:nvPr/>
-        </p:nvSpPr>
-        <p:spPr>
-          <a:xfrm>
-            <a:off x="8095488" y="1783080"/>
-            <a:ext cx="82296" cy="4434840"/>
-          </a:xfrm>
-          <a:prstGeom prst="rect">
-            <a:avLst/>
-          </a:prstGeom>
-          <a:solidFill>
-            <a:srgbClr val="D6E6A0"/>
-          </a:solidFill>
-          <a:ln/>
-        </p:spPr>
-      </p:sp>
-      <p:sp>
-        <p:nvSpPr>
-          <p:cNvPr id="48" name="Text 46"/>
-          <p:cNvSpPr/>
-          <p:nvPr/>
-        </p:nvSpPr>
-        <p:spPr>
-          <a:xfrm>
-            <a:off x="8388096" y="1984248"/>
-            <a:ext cx="2950464" cy="329184"/>
-          </a:xfrm>
-          <a:prstGeom prst="rect">
-            <a:avLst/>
-          </a:prstGeom>
-          <a:noFill/>
-          <a:ln/>
-        </p:spPr>
-        <p:txBody>
-          <a:bodyPr wrap="square" lIns="0" tIns="0" rIns="0" bIns="0" rtlCol="0" anchor="ctr"/>
-          <a:lstStyle/>
-          <a:p>
-            <a:pPr indent="0" marL="0">
-              <a:buNone/>
-            </a:pPr>
-            <a:r>
-              <a:rPr lang="en-US" sz="1500" b="1" dirty="0">
-                <a:solidFill>
-                  <a:srgbClr val="141412"/>
-                </a:solidFill>
-                <a:latin typeface="Calibri" pitchFamily="34" charset="0"/>
-                <a:ea typeface="Calibri" pitchFamily="34" charset="-122"/>
-                <a:cs typeface="Calibri" pitchFamily="34" charset="-120"/>
-              </a:rPr>
-              <a:t>Maya Lin @Maya</a:t>
-            </a:r>
-            <a:endParaRPr lang="en-US" sz="1500" dirty="0"/>
-          </a:p>
-        </p:txBody>
-      </p:sp>
-      <p:sp>
-        <p:nvSpPr>
-          <p:cNvPr id="49" name="Text 47"/>
-          <p:cNvSpPr/>
-          <p:nvPr/>
-        </p:nvSpPr>
-        <p:spPr>
-          <a:xfrm>
-            <a:off x="8388096" y="2295144"/>
-            <a:ext cx="2950464" cy="237744"/>
-          </a:xfrm>
-          <a:prstGeom prst="rect">
-            <a:avLst/>
-          </a:prstGeom>
-          <a:noFill/>
-          <a:ln/>
-        </p:spPr>
-        <p:txBody>
-          <a:bodyPr wrap="square" lIns="0" tIns="0" rIns="0" bIns="0" rtlCol="0" anchor="ctr"/>
-          <a:lstStyle/>
-          <a:p>
-            <a:pPr indent="0" marL="0">
-              <a:buNone/>
-            </a:pPr>
-            <a:r>
-              <a:rPr lang="en-US" sz="1100" b="1" dirty="0">
-                <a:solidFill>
-                  <a:srgbClr val="6E8A1F"/>
-                </a:solidFill>
-                <a:latin typeface="Calibri" pitchFamily="34" charset="0"/>
-                <a:ea typeface="Calibri" pitchFamily="34" charset="-122"/>
-                <a:cs typeface="Calibri" pitchFamily="34" charset="-120"/>
-              </a:rPr>
-              <a:t>PulseBoard · Analytics</a:t>
-            </a:r>
-            <a:endParaRPr lang="en-US" sz="1100" dirty="0"/>
-          </a:p>
-        </p:txBody>
-      </p:sp>
-      <p:sp>
-        <p:nvSpPr>
-          <p:cNvPr id="50" name="Text 48"/>
-          <p:cNvSpPr/>
-          <p:nvPr/>
-        </p:nvSpPr>
-        <p:spPr>
-          <a:xfrm>
-            <a:off x="8388096" y="2606040"/>
-            <a:ext cx="411480" cy="457200"/>
-          </a:xfrm>
-          <a:prstGeom prst="rect">
-            <a:avLst/>
-          </a:prstGeom>
-          <a:noFill/>
-          <a:ln/>
-        </p:spPr>
-        <p:txBody>
-          <a:bodyPr wrap="square" lIns="0" tIns="0" rIns="0" bIns="0" rtlCol="0" anchor="ctr"/>
-          <a:lstStyle/>
-          <a:p>
-            <a:pPr indent="0" marL="0">
-              <a:buNone/>
-            </a:pPr>
-            <a:r>
-              <a:rPr lang="en-US" sz="2600" b="1" dirty="0">
-                <a:solidFill>
-                  <a:srgbClr val="141412"/>
-                </a:solidFill>
-                <a:latin typeface="Cambria" pitchFamily="34" charset="0"/>
-                <a:ea typeface="Cambria" pitchFamily="34" charset="-122"/>
-                <a:cs typeface="Cambria" pitchFamily="34" charset="-120"/>
-              </a:rPr>
-              <a:t>5</a:t>
-            </a:r>
-            <a:endParaRPr lang="en-US" sz="2600" dirty="0"/>
-          </a:p>
-        </p:txBody>
-      </p:sp>
-      <p:sp>
-        <p:nvSpPr>
-          <p:cNvPr id="51" name="Text 49"/>
-          <p:cNvSpPr/>
-          <p:nvPr/>
-        </p:nvSpPr>
-        <p:spPr>
-          <a:xfrm>
-            <a:off x="8845296" y="2606040"/>
-            <a:ext cx="822960" cy="457200"/>
-          </a:xfrm>
-          <a:prstGeom prst="rect">
-            <a:avLst/>
-          </a:prstGeom>
-          <a:noFill/>
-          <a:ln/>
-        </p:spPr>
-        <p:txBody>
-          <a:bodyPr wrap="square" lIns="0" tIns="0" rIns="0" bIns="0" rtlCol="0" anchor="ctr"/>
-          <a:lstStyle/>
-          <a:p>
-            <a:pPr indent="0" marL="0">
-              <a:buNone/>
-            </a:pPr>
-            <a:r>
-              <a:rPr lang="en-US" sz="1100" b="1" dirty="0">
-                <a:solidFill>
-                  <a:srgbClr val="58584F"/>
-                </a:solidFill>
-                <a:latin typeface="Calibri" pitchFamily="34" charset="0"/>
-                <a:ea typeface="Calibri" pitchFamily="34" charset="-122"/>
-                <a:cs typeface="Calibri" pitchFamily="34" charset="-120"/>
-              </a:rPr>
-              <a:t>done this</a:t>
-            </a:r>
-            <a:endParaRPr lang="en-US" sz="1100" dirty="0"/>
-          </a:p>
-          <a:p>
-            <a:pPr indent="0" marL="0">
-              <a:buNone/>
-            </a:pPr>
-            <a:r>
-              <a:rPr lang="en-US" sz="1100" b="1" dirty="0">
-                <a:solidFill>
-                  <a:srgbClr val="58584F"/>
-                </a:solidFill>
-                <a:latin typeface="Calibri" pitchFamily="34" charset="0"/>
-                <a:ea typeface="Calibri" pitchFamily="34" charset="-122"/>
-                <a:cs typeface="Calibri" pitchFamily="34" charset="-120"/>
-              </a:rPr>
-              <a:t>week</a:t>
-            </a:r>
-            <a:endParaRPr lang="en-US" sz="1100" dirty="0"/>
-          </a:p>
-        </p:txBody>
-      </p:sp>
-      <p:sp>
-        <p:nvSpPr>
-          <p:cNvPr id="52" name="Text 50"/>
-          <p:cNvSpPr/>
-          <p:nvPr/>
-        </p:nvSpPr>
-        <p:spPr>
-          <a:xfrm>
-            <a:off x="9713976" y="2606040"/>
-            <a:ext cx="411480" cy="457200"/>
-          </a:xfrm>
-          <a:prstGeom prst="rect">
-            <a:avLst/>
-          </a:prstGeom>
-          <a:noFill/>
-          <a:ln/>
-        </p:spPr>
-        <p:txBody>
-          <a:bodyPr wrap="square" lIns="0" tIns="0" rIns="0" bIns="0" rtlCol="0" anchor="ctr"/>
-          <a:lstStyle/>
-          <a:p>
-            <a:pPr indent="0" marL="0">
-              <a:buNone/>
-            </a:pPr>
-            <a:r>
-              <a:rPr lang="en-US" sz="2600" b="1" dirty="0">
-                <a:solidFill>
-                  <a:srgbClr val="141412"/>
-                </a:solidFill>
-                <a:latin typeface="Cambria" pitchFamily="34" charset="0"/>
-                <a:ea typeface="Cambria" pitchFamily="34" charset="-122"/>
-                <a:cs typeface="Cambria" pitchFamily="34" charset="-120"/>
-              </a:rPr>
-              <a:t>1</a:t>
-            </a:r>
-            <a:endParaRPr lang="en-US" sz="2600" dirty="0"/>
-          </a:p>
-        </p:txBody>
-      </p:sp>
-      <p:sp>
-        <p:nvSpPr>
-          <p:cNvPr id="53" name="Text 51"/>
-          <p:cNvSpPr/>
-          <p:nvPr/>
-        </p:nvSpPr>
-        <p:spPr>
-          <a:xfrm>
-            <a:off x="10171176" y="2606040"/>
-            <a:ext cx="731520" cy="457200"/>
-          </a:xfrm>
-          <a:prstGeom prst="rect">
-            <a:avLst/>
-          </a:prstGeom>
-          <a:noFill/>
-          <a:ln/>
-        </p:spPr>
-        <p:txBody>
-          <a:bodyPr wrap="square" lIns="0" tIns="0" rIns="0" bIns="0" rtlCol="0" anchor="ctr"/>
-          <a:lstStyle/>
-          <a:p>
-            <a:pPr indent="0" marL="0">
-              <a:buNone/>
-            </a:pPr>
-            <a:r>
-              <a:rPr lang="en-US" sz="1100" b="1" dirty="0">
-                <a:solidFill>
-                  <a:srgbClr val="58584F"/>
-                </a:solidFill>
-                <a:latin typeface="Calibri" pitchFamily="34" charset="0"/>
-                <a:ea typeface="Calibri" pitchFamily="34" charset="-122"/>
-                <a:cs typeface="Calibri" pitchFamily="34" charset="-120"/>
-              </a:rPr>
-              <a:t>open</a:t>
-            </a:r>
-            <a:endParaRPr lang="en-US" sz="1100" dirty="0"/>
-          </a:p>
-        </p:txBody>
-      </p:sp>
-      <p:sp>
-        <p:nvSpPr>
-          <p:cNvPr id="54" name="Shape 52"/>
-          <p:cNvSpPr/>
-          <p:nvPr/>
-        </p:nvSpPr>
-        <p:spPr>
-          <a:xfrm>
-            <a:off x="8388096" y="3200400"/>
-            <a:ext cx="2401824" cy="118872"/>
-          </a:xfrm>
-          <a:prstGeom prst="roundRect">
-            <a:avLst>
-              <a:gd name="adj" fmla="val 50000"/>
-            </a:avLst>
-          </a:prstGeom>
-          <a:solidFill>
-            <a:srgbClr val="E6E8DF"/>
-          </a:solidFill>
-          <a:ln/>
-        </p:spPr>
-      </p:sp>
-      <p:sp>
-        <p:nvSpPr>
-          <p:cNvPr id="55" name="Shape 53"/>
-          <p:cNvSpPr/>
-          <p:nvPr/>
-        </p:nvSpPr>
-        <p:spPr>
-          <a:xfrm>
-            <a:off x="8388096" y="3200400"/>
-            <a:ext cx="1801368" cy="118872"/>
-          </a:xfrm>
-          <a:prstGeom prst="roundRect">
-            <a:avLst>
-              <a:gd name="adj" fmla="val 50000"/>
-            </a:avLst>
-          </a:prstGeom>
-          <a:solidFill>
-            <a:srgbClr val="D6E6A0"/>
-          </a:solidFill>
-          <a:ln/>
-        </p:spPr>
-      </p:sp>
-      <p:sp>
-        <p:nvSpPr>
-          <p:cNvPr id="56" name="Text 54"/>
-          <p:cNvSpPr/>
-          <p:nvPr/>
-        </p:nvSpPr>
-        <p:spPr>
-          <a:xfrm>
-            <a:off x="10789920" y="3127248"/>
-            <a:ext cx="548640" cy="274320"/>
-          </a:xfrm>
-          <a:prstGeom prst="rect">
-            <a:avLst/>
-          </a:prstGeom>
-          <a:noFill/>
-          <a:ln/>
-        </p:spPr>
-        <p:txBody>
-          <a:bodyPr wrap="square" lIns="0" tIns="0" rIns="0" bIns="0" rtlCol="0" anchor="ctr"/>
-          <a:lstStyle/>
-          <a:p>
-            <a:pPr algn="r" indent="0" marL="0">
-              <a:buNone/>
-            </a:pPr>
-            <a:r>
-              <a:rPr lang="en-US" sz="1100" b="1" dirty="0">
-                <a:solidFill>
-                  <a:srgbClr val="141412"/>
-                </a:solidFill>
-                <a:latin typeface="Calibri" pitchFamily="34" charset="0"/>
-                <a:ea typeface="Calibri" pitchFamily="34" charset="-122"/>
-                <a:cs typeface="Calibri" pitchFamily="34" charset="-120"/>
-              </a:rPr>
-              <a:t>75%</a:t>
-            </a:r>
-            <a:endParaRPr lang="en-US" sz="1100" dirty="0"/>
-          </a:p>
-        </p:txBody>
-      </p:sp>
-      <p:sp>
-        <p:nvSpPr>
-          <p:cNvPr id="57" name="Text 55"/>
-          <p:cNvSpPr/>
-          <p:nvPr/>
-        </p:nvSpPr>
-        <p:spPr>
-          <a:xfrm>
-            <a:off x="8388096" y="3456432"/>
-            <a:ext cx="2950464" cy="548640"/>
-          </a:xfrm>
-          <a:prstGeom prst="rect">
-            <a:avLst/>
-          </a:prstGeom>
-          <a:noFill/>
-          <a:ln/>
-        </p:spPr>
-        <p:txBody>
-          <a:bodyPr wrap="square" lIns="0" tIns="0" rIns="0" bIns="0" rtlCol="0" anchor="t">
-            <a:normAutofit/>
-          </a:bodyPr>
-          <a:lstStyle/>
-          <a:p>
-            <a:pPr indent="0" marL="0">
-              <a:lnSpc>
-                <a:spcPct val="110000"/>
-              </a:lnSpc>
-              <a:buNone/>
-            </a:pPr>
-            <a:r>
-              <a:rPr lang="en-US" sz="1100" dirty="0">
-                <a:solidFill>
-                  <a:srgbClr val="58584F"/>
-                </a:solidFill>
-                <a:latin typeface="Calibri" pitchFamily="34" charset="0"/>
-                <a:ea typeface="Calibri" pitchFamily="34" charset="-122"/>
-                <a:cs typeface="Calibri" pitchFamily="34" charset="-120"/>
-              </a:rPr>
-              <a:t>Data transfer done; usage tracking rolling out.</a:t>
-            </a:r>
-            <a:endParaRPr lang="en-US" sz="1100" dirty="0"/>
-          </a:p>
-        </p:txBody>
-      </p:sp>
-      <p:sp>
-        <p:nvSpPr>
-          <p:cNvPr id="58" name="Shape 56"/>
-          <p:cNvSpPr/>
-          <p:nvPr/>
-        </p:nvSpPr>
-        <p:spPr>
-          <a:xfrm>
-            <a:off x="8388096" y="4069080"/>
-            <a:ext cx="2950464" cy="0"/>
-          </a:xfrm>
-          <a:prstGeom prst="line">
-            <a:avLst/>
-          </a:prstGeom>
-          <a:noFill/>
-          <a:ln w="9525">
-            <a:solidFill>
-              <a:srgbClr val="E0E2D8"/>
-            </a:solidFill>
-            <a:prstDash val="solid"/>
-          </a:ln>
-        </p:spPr>
-      </p:sp>
-      <p:sp>
-        <p:nvSpPr>
-          <p:cNvPr id="59" name="Shape 57"/>
-          <p:cNvSpPr/>
-          <p:nvPr/>
-        </p:nvSpPr>
-        <p:spPr>
-          <a:xfrm>
-            <a:off x="8388096" y="4270248"/>
-            <a:ext cx="118872" cy="118872"/>
-          </a:xfrm>
-          <a:prstGeom prst="ellipse">
-            <a:avLst/>
-          </a:prstGeom>
-          <a:solidFill>
-            <a:srgbClr val="A8CC3A"/>
-          </a:solidFill>
-          <a:ln/>
-        </p:spPr>
-      </p:sp>
-      <p:sp>
-        <p:nvSpPr>
-          <p:cNvPr id="60" name="Text 58"/>
-          <p:cNvSpPr/>
-          <p:nvPr/>
-        </p:nvSpPr>
-        <p:spPr>
-          <a:xfrm>
-            <a:off x="8607552" y="4206240"/>
-            <a:ext cx="2731008" cy="457200"/>
-          </a:xfrm>
-          <a:prstGeom prst="rect">
-            <a:avLst/>
-          </a:prstGeom>
-          <a:noFill/>
-          <a:ln/>
-        </p:spPr>
-        <p:txBody>
-          <a:bodyPr wrap="square" lIns="0" tIns="0" rIns="0" bIns="0" rtlCol="0" anchor="t">
-            <a:normAutofit/>
-          </a:bodyPr>
-          <a:lstStyle/>
-          <a:p>
-            <a:pPr indent="0" marL="0">
-              <a:lnSpc>
-                <a:spcPct val="105000"/>
-              </a:lnSpc>
-              <a:buNone/>
-            </a:pPr>
-            <a:r>
-              <a:rPr lang="en-US" sz="1100" dirty="0">
-                <a:solidFill>
-                  <a:srgbClr val="141412"/>
-                </a:solidFill>
-                <a:latin typeface="Calibri" pitchFamily="34" charset="0"/>
-                <a:ea typeface="Calibri" pitchFamily="34" charset="-122"/>
-                <a:cs typeface="Calibri" pitchFamily="34" charset="-120"/>
-              </a:rPr>
-              <a:t>Data transfer to new system</a:t>
-            </a:r>
-            <a:endParaRPr lang="en-US" sz="1100" dirty="0"/>
-          </a:p>
-        </p:txBody>
-      </p:sp>
-      <p:sp>
-        <p:nvSpPr>
-          <p:cNvPr id="61" name="Shape 59"/>
-          <p:cNvSpPr/>
-          <p:nvPr/>
-        </p:nvSpPr>
-        <p:spPr>
-          <a:xfrm>
-            <a:off x="8388096" y="4727448"/>
-            <a:ext cx="118872" cy="118872"/>
-          </a:xfrm>
-          <a:prstGeom prst="ellipse">
-            <a:avLst/>
-          </a:prstGeom>
-          <a:solidFill>
-            <a:srgbClr val="A8CC3A"/>
-          </a:solidFill>
-          <a:ln/>
-        </p:spPr>
-      </p:sp>
-      <p:sp>
-        <p:nvSpPr>
-          <p:cNvPr id="62" name="Text 60"/>
-          <p:cNvSpPr/>
-          <p:nvPr/>
-        </p:nvSpPr>
-        <p:spPr>
-          <a:xfrm>
-            <a:off x="8607552" y="4663440"/>
-            <a:ext cx="2731008" cy="457200"/>
-          </a:xfrm>
-          <a:prstGeom prst="rect">
-            <a:avLst/>
-          </a:prstGeom>
-          <a:noFill/>
-          <a:ln/>
-        </p:spPr>
-        <p:txBody>
-          <a:bodyPr wrap="square" lIns="0" tIns="0" rIns="0" bIns="0" rtlCol="0" anchor="t">
-            <a:normAutofit/>
-          </a:bodyPr>
-          <a:lstStyle/>
-          <a:p>
-            <a:pPr indent="0" marL="0">
-              <a:lnSpc>
-                <a:spcPct val="105000"/>
-              </a:lnSpc>
-              <a:buNone/>
-            </a:pPr>
-            <a:r>
-              <a:rPr lang="en-US" sz="1100" dirty="0">
-                <a:solidFill>
-                  <a:srgbClr val="141412"/>
-                </a:solidFill>
-                <a:latin typeface="Calibri" pitchFamily="34" charset="0"/>
-                <a:ea typeface="Calibri" pitchFamily="34" charset="-122"/>
-                <a:cs typeface="Calibri" pitchFamily="34" charset="-120"/>
-              </a:rPr>
-              <a:t>Event plan agreed</a:t>
-            </a:r>
-            <a:endParaRPr lang="en-US" sz="1100" dirty="0"/>
-          </a:p>
-        </p:txBody>
-      </p:sp>
-      <p:sp>
-        <p:nvSpPr>
-          <p:cNvPr id="63" name="Shape 61"/>
-          <p:cNvSpPr/>
-          <p:nvPr/>
-        </p:nvSpPr>
-        <p:spPr>
-          <a:xfrm>
-            <a:off x="8388096" y="5184648"/>
-            <a:ext cx="118872" cy="118872"/>
-          </a:xfrm>
-          <a:prstGeom prst="ellipse">
-            <a:avLst/>
-          </a:prstGeom>
-          <a:solidFill>
-            <a:srgbClr val="D6E6A0"/>
-          </a:solidFill>
-          <a:ln/>
-        </p:spPr>
-      </p:sp>
-      <p:sp>
-        <p:nvSpPr>
-          <p:cNvPr id="64" name="Text 62"/>
-          <p:cNvSpPr/>
-          <p:nvPr/>
-        </p:nvSpPr>
-        <p:spPr>
-          <a:xfrm>
-            <a:off x="8607552" y="5120640"/>
-            <a:ext cx="2731008" cy="457200"/>
-          </a:xfrm>
-          <a:prstGeom prst="rect">
-            <a:avLst/>
-          </a:prstGeom>
-          <a:noFill/>
-          <a:ln/>
-        </p:spPr>
-        <p:txBody>
-          <a:bodyPr wrap="square" lIns="0" tIns="0" rIns="0" bIns="0" rtlCol="0" anchor="t">
-            <a:normAutofit/>
-          </a:bodyPr>
-          <a:lstStyle/>
-          <a:p>
-            <a:pPr indent="0" marL="0">
-              <a:lnSpc>
-                <a:spcPct val="105000"/>
-              </a:lnSpc>
-              <a:buNone/>
-            </a:pPr>
-            <a:r>
-              <a:rPr lang="en-US" sz="1100" dirty="0">
-                <a:solidFill>
-                  <a:srgbClr val="141412"/>
-                </a:solidFill>
-                <a:latin typeface="Calibri" pitchFamily="34" charset="0"/>
-                <a:ea typeface="Calibri" pitchFamily="34" charset="-122"/>
-                <a:cs typeface="Calibri" pitchFamily="34" charset="-120"/>
-              </a:rPr>
-              <a:t>Usage tracking rollout</a:t>
-            </a:r>
-            <a:endParaRPr lang="en-US" sz="1100" dirty="0"/>
-          </a:p>
-        </p:txBody>
-      </p:sp>
-      <p:sp>
-        <p:nvSpPr>
-          <p:cNvPr id="65" name="Shape 63"/>
-          <p:cNvSpPr/>
-          <p:nvPr/>
-        </p:nvSpPr>
-        <p:spPr>
-          <a:xfrm>
-            <a:off x="8388096" y="5641848"/>
-            <a:ext cx="118872" cy="118872"/>
-          </a:xfrm>
-          <a:prstGeom prst="ellipse">
-            <a:avLst/>
-          </a:prstGeom>
-          <a:solidFill>
-            <a:srgbClr val="A8CC3A"/>
-          </a:solidFill>
-          <a:ln/>
-        </p:spPr>
-      </p:sp>
-      <p:sp>
-        <p:nvSpPr>
-          <p:cNvPr id="66" name="Text 64"/>
-          <p:cNvSpPr/>
-          <p:nvPr/>
-        </p:nvSpPr>
-        <p:spPr>
-          <a:xfrm>
-            <a:off x="8607552" y="5577840"/>
-            <a:ext cx="2731008" cy="457200"/>
-          </a:xfrm>
-          <a:prstGeom prst="rect">
-            <a:avLst/>
-          </a:prstGeom>
-          <a:noFill/>
-          <a:ln/>
-        </p:spPr>
-        <p:txBody>
-          <a:bodyPr wrap="square" lIns="0" tIns="0" rIns="0" bIns="0" rtlCol="0" anchor="t">
-            <a:normAutofit/>
-          </a:bodyPr>
-          <a:lstStyle/>
-          <a:p>
-            <a:pPr indent="0" marL="0">
-              <a:lnSpc>
-                <a:spcPct val="105000"/>
-              </a:lnSpc>
-              <a:buNone/>
-            </a:pPr>
-            <a:r>
-              <a:rPr lang="en-US" sz="1100" dirty="0">
-                <a:solidFill>
-                  <a:srgbClr val="141412"/>
-                </a:solidFill>
-                <a:latin typeface="Calibri" pitchFamily="34" charset="0"/>
-                <a:ea typeface="Calibri" pitchFamily="34" charset="-122"/>
-                <a:cs typeface="Calibri" pitchFamily="34" charset="-120"/>
-              </a:rPr>
-              <a:t>Code reviews, 3 features</a:t>
-            </a:r>
-            <a:endParaRPr lang="en-US" sz="1100" dirty="0"/>
-          </a:p>
-        </p:txBody>
-      </p:sp>
-      <p:sp>
-        <p:nvSpPr>
-          <p:cNvPr id="67" name="Text 65"/>
-          <p:cNvSpPr/>
-          <p:nvPr/>
-        </p:nvSpPr>
-        <p:spPr>
-          <a:xfrm>
-            <a:off x="640080" y="6309360"/>
-            <a:ext cx="10908792" cy="274320"/>
-          </a:xfrm>
-          <a:prstGeom prst="rect">
-            <a:avLst/>
-          </a:prstGeom>
-          <a:noFill/>
-          <a:ln/>
-        </p:spPr>
-        <p:txBody>
-          <a:bodyPr wrap="square" lIns="0" tIns="0" rIns="0" bIns="0" rtlCol="0" anchor="ctr"/>
-          <a:lstStyle/>
-          <a:p>
-            <a:pPr indent="0" marL="0">
-              <a:buNone/>
-            </a:pPr>
-            <a:r>
-              <a:rPr lang="en-US" sz="1100" i="1" dirty="0">
-                <a:solidFill>
-                  <a:srgbClr val="B8B8B4"/>
-                </a:solidFill>
-                <a:latin typeface="Calibri" pitchFamily="34" charset="0"/>
-                <a:ea typeface="Calibri" pitchFamily="34" charset="-122"/>
-                <a:cs typeface="Calibri" pitchFamily="34" charset="-120"/>
-              </a:rPr>
-              <a:t>Done/Open = planned tasks this week; work in review stays open until approved.</a:t>
-            </a:r>
-            <a:endParaRPr lang="en-US" sz="1100" dirty="0"/>
+              <a:t>Options: allow opt-out · clinic decides per patient · keep as today</a:t>
+            </a:r>
+            <a:endParaRPr lang="en-US" sz="1350" dirty="0"/>
           </a:p>
         </p:txBody>
       </p:sp>
@@ -13070,7 +13014,7 @@
                 <a:ea typeface="Calibri" pitchFamily="34" charset="-122"/>
                 <a:cs typeface="Calibri" pitchFamily="34" charset="-120"/>
               </a:rPr>
-              <a:t>Engineering Activity · GitHub</a:t>
+              <a:t>Team · Task Tracker</a:t>
             </a:r>
             <a:endParaRPr lang="en-US" sz="1300" dirty="0"/>
           </a:p>
@@ -13111,7 +13055,7 @@
                 <a:ea typeface="Cambria" pitchFamily="34" charset="-122"/>
                 <a:cs typeface="Cambria" pitchFamily="34" charset="-120"/>
               </a:rPr>
-              <a:t>Team Delivery Activity This Week</a:t>
+              <a:t>Developer Task Track</a:t>
             </a:r>
             <a:endParaRPr lang="en-US" sz="2800" dirty="0"/>
           </a:p>
@@ -13126,11 +13070,11 @@
         <p:spPr>
           <a:xfrm>
             <a:off x="640080" y="1783080"/>
-            <a:ext cx="7680960" cy="4434840"/>
+            <a:ext cx="3453384" cy="4434840"/>
           </a:xfrm>
           <a:prstGeom prst="roundRect">
             <a:avLst>
-              <a:gd name="adj" fmla="val 1649"/>
+              <a:gd name="adj" fmla="val 2118"/>
             </a:avLst>
           </a:prstGeom>
           <a:solidFill>
@@ -13146,32 +13090,36 @@
           </a:effectLst>
         </p:spPr>
       </p:sp>
-      <p:graphicFrame>
-        <p:nvGraphicFramePr>
-          <p:cNvPr id="5" name="Chart 0" descr=""/>
-          <p:cNvGraphicFramePr/>
-          <p:nvPr/>
-        </p:nvGraphicFramePr>
-        <p:xfrm>
-          <a:off x="777240" y="1965960"/>
-          <a:ext cx="7406640" cy="3749040"/>
-        </p:xfrm>
-        <a:graphic xmlns:a="http://schemas.openxmlformats.org/drawingml/2006/main">
-          <a:graphicData uri="http://schemas.openxmlformats.org/drawingml/2006/chart">
-            <c:chart xmlns:c="http://schemas.openxmlformats.org/drawingml/2006/chart" r:id="rId1"/>
-          </a:graphicData>
-        </a:graphic>
-      </p:graphicFrame>
-      <p:sp>
-        <p:nvSpPr>
-          <p:cNvPr id="6" name="Text 3"/>
-          <p:cNvSpPr/>
-          <p:nvPr/>
-        </p:nvSpPr>
-        <p:spPr>
-          <a:xfrm>
-            <a:off x="914400" y="5760720"/>
-            <a:ext cx="7132320" cy="320040"/>
+      <p:sp>
+        <p:nvSpPr>
+          <p:cNvPr id="5" name="Shape 3"/>
+          <p:cNvSpPr/>
+          <p:nvPr/>
+        </p:nvSpPr>
+        <p:spPr>
+          <a:xfrm>
+            <a:off x="640080" y="1783080"/>
+            <a:ext cx="82296" cy="4434840"/>
+          </a:xfrm>
+          <a:prstGeom prst="rect">
+            <a:avLst/>
+          </a:prstGeom>
+          <a:solidFill>
+            <a:srgbClr val="D6E6A0"/>
+          </a:solidFill>
+          <a:ln/>
+        </p:spPr>
+      </p:sp>
+      <p:sp>
+        <p:nvSpPr>
+          <p:cNvPr id="6" name="Text 4"/>
+          <p:cNvSpPr/>
+          <p:nvPr/>
+        </p:nvSpPr>
+        <p:spPr>
+          <a:xfrm>
+            <a:off x="932688" y="1984248"/>
+            <a:ext cx="2950464" cy="329184"/>
           </a:xfrm>
           <a:prstGeom prst="rect">
             <a:avLst/>
@@ -13187,15 +13135,54 @@
               <a:buNone/>
             </a:pPr>
             <a:r>
-              <a:rPr lang="en-US" sz="1100" i="1" dirty="0">
-                <a:solidFill>
-                  <a:srgbClr val="58584F"/>
+              <a:rPr lang="en-US" sz="1500" b="1" dirty="0">
+                <a:solidFill>
+                  <a:srgbClr val="141412"/>
                 </a:solidFill>
                 <a:latin typeface="Calibri" pitchFamily="34" charset="0"/>
                 <a:ea typeface="Calibri" pitchFamily="34" charset="-122"/>
                 <a:cs typeface="Calibri" pitchFamily="34" charset="-120"/>
               </a:rPr>
-              <a:t>Source: GitHub activity this week.</a:t>
+              <a:t>Leo Park @Leo</a:t>
+            </a:r>
+            <a:endParaRPr lang="en-US" sz="1500" dirty="0"/>
+          </a:p>
+        </p:txBody>
+      </p:sp>
+      <p:sp>
+        <p:nvSpPr>
+          <p:cNvPr id="7" name="Text 5"/>
+          <p:cNvSpPr/>
+          <p:nvPr/>
+        </p:nvSpPr>
+        <p:spPr>
+          <a:xfrm>
+            <a:off x="932688" y="2295144"/>
+            <a:ext cx="2950464" cy="237744"/>
+          </a:xfrm>
+          <a:prstGeom prst="rect">
+            <a:avLst/>
+          </a:prstGeom>
+          <a:noFill/>
+          <a:ln/>
+        </p:spPr>
+        <p:txBody>
+          <a:bodyPr wrap="square" lIns="0" tIns="0" rIns="0" bIns="0" rtlCol="0" anchor="ctr"/>
+          <a:lstStyle/>
+          <a:p>
+            <a:pPr indent="0" marL="0">
+              <a:buNone/>
+            </a:pPr>
+            <a:r>
+              <a:rPr lang="en-US" sz="1100" b="1" dirty="0">
+                <a:solidFill>
+                  <a:srgbClr val="6E8A1F"/>
+                </a:solidFill>
+                <a:latin typeface="Calibri" pitchFamily="34" charset="0"/>
+                <a:ea typeface="Calibri" pitchFamily="34" charset="-122"/>
+                <a:cs typeface="Calibri" pitchFamily="34" charset="-120"/>
+              </a:rPr>
+              <a:t>ClinicBook · Patient App</a:t>
             </a:r>
             <a:endParaRPr lang="en-US" sz="1100" dirty="0"/>
           </a:p>
@@ -13203,54 +13190,32 @@
       </p:sp>
       <p:sp>
         <p:nvSpPr>
-          <p:cNvPr id="7" name="Shape 4"/>
-          <p:cNvSpPr/>
-          <p:nvPr/>
-        </p:nvSpPr>
-        <p:spPr>
-          <a:xfrm>
-            <a:off x="8641080" y="1783080"/>
-            <a:ext cx="2907792" cy="1356360"/>
-          </a:xfrm>
-          <a:prstGeom prst="roundRect">
-            <a:avLst>
-              <a:gd name="adj" fmla="val 5393"/>
-            </a:avLst>
-          </a:prstGeom>
-          <a:solidFill>
-            <a:srgbClr val="141412"/>
-          </a:solidFill>
-          <a:ln/>
-        </p:spPr>
-      </p:sp>
-      <p:sp>
-        <p:nvSpPr>
-          <p:cNvPr id="8" name="Text 5"/>
-          <p:cNvSpPr/>
-          <p:nvPr/>
-        </p:nvSpPr>
-        <p:spPr>
-          <a:xfrm>
-            <a:off x="8869680" y="1892808"/>
-            <a:ext cx="2450592" cy="745998"/>
-          </a:xfrm>
-          <a:prstGeom prst="rect">
-            <a:avLst/>
-          </a:prstGeom>
-          <a:noFill/>
-          <a:ln/>
-        </p:spPr>
-        <p:txBody>
-          <a:bodyPr wrap="square" lIns="0" tIns="0" rIns="0" bIns="0" rtlCol="0" anchor="b"/>
+          <p:cNvPr id="8" name="Text 6"/>
+          <p:cNvSpPr/>
+          <p:nvPr/>
+        </p:nvSpPr>
+        <p:spPr>
+          <a:xfrm>
+            <a:off x="932688" y="2606040"/>
+            <a:ext cx="411480" cy="457200"/>
+          </a:xfrm>
+          <a:prstGeom prst="rect">
+            <a:avLst/>
+          </a:prstGeom>
+          <a:noFill/>
+          <a:ln/>
+        </p:spPr>
+        <p:txBody>
+          <a:bodyPr wrap="square" lIns="0" tIns="0" rIns="0" bIns="0" rtlCol="0" anchor="ctr"/>
           <a:lstStyle/>
           <a:p>
             <a:pPr indent="0" marL="0">
               <a:buNone/>
             </a:pPr>
             <a:r>
-              <a:rPr lang="en-US" sz="3200" b="1" dirty="0">
-                <a:solidFill>
-                  <a:srgbClr val="A8CC3A"/>
+              <a:rPr lang="en-US" sz="2600" b="1" dirty="0">
+                <a:solidFill>
+                  <a:srgbClr val="141412"/>
                 </a:solidFill>
                 <a:latin typeface="Cambria" pitchFamily="34" charset="0"/>
                 <a:ea typeface="Cambria" pitchFamily="34" charset="-122"/>
@@ -13258,71 +13223,289 @@
               </a:rPr>
               <a:t>3</a:t>
             </a:r>
-            <a:endParaRPr lang="en-US" sz="3200" dirty="0"/>
-          </a:p>
-        </p:txBody>
-      </p:sp>
-      <p:sp>
-        <p:nvSpPr>
-          <p:cNvPr id="9" name="Text 6"/>
-          <p:cNvSpPr/>
-          <p:nvPr/>
-        </p:nvSpPr>
-        <p:spPr>
-          <a:xfrm>
-            <a:off x="8869680" y="2596896"/>
-            <a:ext cx="2450592" cy="474726"/>
-          </a:xfrm>
-          <a:prstGeom prst="rect">
-            <a:avLst/>
-          </a:prstGeom>
-          <a:noFill/>
-          <a:ln/>
-        </p:spPr>
-        <p:txBody>
-          <a:bodyPr wrap="square" lIns="0" tIns="0" rIns="0" bIns="0" rtlCol="0" anchor="t"/>
+            <a:endParaRPr lang="en-US" sz="2600" dirty="0"/>
+          </a:p>
+        </p:txBody>
+      </p:sp>
+      <p:sp>
+        <p:nvSpPr>
+          <p:cNvPr id="9" name="Text 7"/>
+          <p:cNvSpPr/>
+          <p:nvPr/>
+        </p:nvSpPr>
+        <p:spPr>
+          <a:xfrm>
+            <a:off x="1389888" y="2606040"/>
+            <a:ext cx="822960" cy="457200"/>
+          </a:xfrm>
+          <a:prstGeom prst="rect">
+            <a:avLst/>
+          </a:prstGeom>
+          <a:noFill/>
+          <a:ln/>
+        </p:spPr>
+        <p:txBody>
+          <a:bodyPr wrap="square" lIns="0" tIns="0" rIns="0" bIns="0" rtlCol="0" anchor="ctr"/>
           <a:lstStyle/>
           <a:p>
             <a:pPr indent="0" marL="0">
               <a:buNone/>
             </a:pPr>
             <a:r>
-              <a:rPr lang="en-US" sz="1200" b="1" dirty="0">
-                <a:solidFill>
-                  <a:srgbClr val="D8D8D2"/>
+              <a:rPr lang="en-US" sz="1100" b="1" dirty="0">
+                <a:solidFill>
+                  <a:srgbClr val="58584F"/>
                 </a:solidFill>
                 <a:latin typeface="Calibri" pitchFamily="34" charset="0"/>
                 <a:ea typeface="Calibri" pitchFamily="34" charset="-122"/>
                 <a:cs typeface="Calibri" pitchFamily="34" charset="-120"/>
               </a:rPr>
-              <a:t>Features approved</a:t>
-            </a:r>
-            <a:endParaRPr lang="en-US" sz="1200" dirty="0"/>
-          </a:p>
-        </p:txBody>
-      </p:sp>
-      <p:sp>
-        <p:nvSpPr>
-          <p:cNvPr id="10" name="Shape 7"/>
-          <p:cNvSpPr/>
-          <p:nvPr/>
-        </p:nvSpPr>
-        <p:spPr>
-          <a:xfrm>
-            <a:off x="8641080" y="3322320"/>
-            <a:ext cx="2907792" cy="1356360"/>
+              <a:t>done this</a:t>
+            </a:r>
+            <a:endParaRPr lang="en-US" sz="1100" dirty="0"/>
+          </a:p>
+          <a:p>
+            <a:pPr indent="0" marL="0">
+              <a:buNone/>
+            </a:pPr>
+            <a:r>
+              <a:rPr lang="en-US" sz="1100" b="1" dirty="0">
+                <a:solidFill>
+                  <a:srgbClr val="58584F"/>
+                </a:solidFill>
+                <a:latin typeface="Calibri" pitchFamily="34" charset="0"/>
+                <a:ea typeface="Calibri" pitchFamily="34" charset="-122"/>
+                <a:cs typeface="Calibri" pitchFamily="34" charset="-120"/>
+              </a:rPr>
+              <a:t>week</a:t>
+            </a:r>
+            <a:endParaRPr lang="en-US" sz="1100" dirty="0"/>
+          </a:p>
+        </p:txBody>
+      </p:sp>
+      <p:sp>
+        <p:nvSpPr>
+          <p:cNvPr id="10" name="Text 8"/>
+          <p:cNvSpPr/>
+          <p:nvPr/>
+        </p:nvSpPr>
+        <p:spPr>
+          <a:xfrm>
+            <a:off x="2258568" y="2606040"/>
+            <a:ext cx="411480" cy="457200"/>
+          </a:xfrm>
+          <a:prstGeom prst="rect">
+            <a:avLst/>
+          </a:prstGeom>
+          <a:noFill/>
+          <a:ln/>
+        </p:spPr>
+        <p:txBody>
+          <a:bodyPr wrap="square" lIns="0" tIns="0" rIns="0" bIns="0" rtlCol="0" anchor="ctr"/>
+          <a:lstStyle/>
+          <a:p>
+            <a:pPr indent="0" marL="0">
+              <a:buNone/>
+            </a:pPr>
+            <a:r>
+              <a:rPr lang="en-US" sz="2600" b="1" dirty="0">
+                <a:solidFill>
+                  <a:srgbClr val="141412"/>
+                </a:solidFill>
+                <a:latin typeface="Cambria" pitchFamily="34" charset="0"/>
+                <a:ea typeface="Cambria" pitchFamily="34" charset="-122"/>
+                <a:cs typeface="Cambria" pitchFamily="34" charset="-120"/>
+              </a:rPr>
+              <a:t>2</a:t>
+            </a:r>
+            <a:endParaRPr lang="en-US" sz="2600" dirty="0"/>
+          </a:p>
+        </p:txBody>
+      </p:sp>
+      <p:sp>
+        <p:nvSpPr>
+          <p:cNvPr id="11" name="Text 9"/>
+          <p:cNvSpPr/>
+          <p:nvPr/>
+        </p:nvSpPr>
+        <p:spPr>
+          <a:xfrm>
+            <a:off x="2715768" y="2606040"/>
+            <a:ext cx="731520" cy="457200"/>
+          </a:xfrm>
+          <a:prstGeom prst="rect">
+            <a:avLst/>
+          </a:prstGeom>
+          <a:noFill/>
+          <a:ln/>
+        </p:spPr>
+        <p:txBody>
+          <a:bodyPr wrap="square" lIns="0" tIns="0" rIns="0" bIns="0" rtlCol="0" anchor="ctr"/>
+          <a:lstStyle/>
+          <a:p>
+            <a:pPr indent="0" marL="0">
+              <a:buNone/>
+            </a:pPr>
+            <a:r>
+              <a:rPr lang="en-US" sz="1100" b="1" dirty="0">
+                <a:solidFill>
+                  <a:srgbClr val="58584F"/>
+                </a:solidFill>
+                <a:latin typeface="Calibri" pitchFamily="34" charset="0"/>
+                <a:ea typeface="Calibri" pitchFamily="34" charset="-122"/>
+                <a:cs typeface="Calibri" pitchFamily="34" charset="-120"/>
+              </a:rPr>
+              <a:t>open</a:t>
+            </a:r>
+            <a:endParaRPr lang="en-US" sz="1100" dirty="0"/>
+          </a:p>
+        </p:txBody>
+      </p:sp>
+      <p:sp>
+        <p:nvSpPr>
+          <p:cNvPr id="12" name="Shape 10"/>
+          <p:cNvSpPr/>
+          <p:nvPr/>
+        </p:nvSpPr>
+        <p:spPr>
+          <a:xfrm>
+            <a:off x="932688" y="3200400"/>
+            <a:ext cx="2401824" cy="118872"/>
           </a:xfrm>
           <a:prstGeom prst="roundRect">
             <a:avLst>
-              <a:gd name="adj" fmla="val 5393"/>
+              <a:gd name="adj" fmla="val 50000"/>
             </a:avLst>
           </a:prstGeom>
           <a:solidFill>
-            <a:srgbClr val="FFFFFF"/>
+            <a:srgbClr val="E6E8DF"/>
           </a:solidFill>
-          <a:ln w="12700">
+          <a:ln/>
+        </p:spPr>
+      </p:sp>
+      <p:sp>
+        <p:nvSpPr>
+          <p:cNvPr id="13" name="Shape 11"/>
+          <p:cNvSpPr/>
+          <p:nvPr/>
+        </p:nvSpPr>
+        <p:spPr>
+          <a:xfrm>
+            <a:off x="932688" y="3200400"/>
+            <a:ext cx="1441094" cy="118872"/>
+          </a:xfrm>
+          <a:prstGeom prst="roundRect">
+            <a:avLst>
+              <a:gd name="adj" fmla="val 50000"/>
+            </a:avLst>
+          </a:prstGeom>
+          <a:solidFill>
+            <a:srgbClr val="D6E6A0"/>
+          </a:solidFill>
+          <a:ln/>
+        </p:spPr>
+      </p:sp>
+      <p:sp>
+        <p:nvSpPr>
+          <p:cNvPr id="14" name="Text 12"/>
+          <p:cNvSpPr/>
+          <p:nvPr/>
+        </p:nvSpPr>
+        <p:spPr>
+          <a:xfrm>
+            <a:off x="3334512" y="3127248"/>
+            <a:ext cx="548640" cy="274320"/>
+          </a:xfrm>
+          <a:prstGeom prst="rect">
+            <a:avLst/>
+          </a:prstGeom>
+          <a:noFill/>
+          <a:ln/>
+        </p:spPr>
+        <p:txBody>
+          <a:bodyPr wrap="square" lIns="0" tIns="0" rIns="0" bIns="0" rtlCol="0" anchor="ctr"/>
+          <a:lstStyle/>
+          <a:p>
+            <a:pPr algn="r" indent="0" marL="0">
+              <a:buNone/>
+            </a:pPr>
+            <a:r>
+              <a:rPr lang="en-US" sz="1100" b="1" dirty="0">
+                <a:solidFill>
+                  <a:srgbClr val="141412"/>
+                </a:solidFill>
+                <a:latin typeface="Calibri" pitchFamily="34" charset="0"/>
+                <a:ea typeface="Calibri" pitchFamily="34" charset="-122"/>
+                <a:cs typeface="Calibri" pitchFamily="34" charset="-120"/>
+              </a:rPr>
+              <a:t>60%</a:t>
+            </a:r>
+            <a:endParaRPr lang="en-US" sz="1100" dirty="0"/>
+          </a:p>
+        </p:txBody>
+      </p:sp>
+      <p:sp>
+        <p:nvSpPr>
+          <p:cNvPr id="15" name="Text 13"/>
+          <p:cNvSpPr/>
+          <p:nvPr/>
+        </p:nvSpPr>
+        <p:spPr>
+          <a:xfrm>
+            <a:off x="932688" y="3456432"/>
+            <a:ext cx="2950464" cy="548640"/>
+          </a:xfrm>
+          <a:prstGeom prst="rect">
+            <a:avLst/>
+          </a:prstGeom>
+          <a:noFill/>
+          <a:ln/>
+        </p:spPr>
+        <p:txBody>
+          <a:bodyPr wrap="square" lIns="0" tIns="0" rIns="0" bIns="0" rtlCol="0" anchor="t">
+            <a:normAutofit/>
+          </a:bodyPr>
+          <a:lstStyle/>
+          <a:p>
+            <a:pPr indent="0" marL="0">
+              <a:lnSpc>
+                <a:spcPct val="110000"/>
+              </a:lnSpc>
+              <a:buNone/>
+            </a:pPr>
+            <a:r>
+              <a:rPr lang="en-US" sz="1100" dirty="0">
+                <a:solidFill>
+                  <a:srgbClr val="58584F"/>
+                </a:solidFill>
+                <a:latin typeface="Calibri" pitchFamily="34" charset="0"/>
+                <a:ea typeface="Calibri" pitchFamily="34" charset="-122"/>
+                <a:cs typeface="Calibri" pitchFamily="34" charset="-120"/>
+              </a:rPr>
+              <a:t>Sign-in and clinic search done; booking calendar in progress.</a:t>
+            </a:r>
+            <a:endParaRPr lang="en-US" sz="1100" dirty="0"/>
+          </a:p>
+        </p:txBody>
+      </p:sp>
+      <p:sp>
+        <p:nvSpPr>
+          <p:cNvPr id="16" name="Shape 14"/>
+          <p:cNvSpPr/>
+          <p:nvPr/>
+        </p:nvSpPr>
+        <p:spPr>
+          <a:xfrm>
+            <a:off x="932688" y="4069080"/>
+            <a:ext cx="2950464" cy="0"/>
+          </a:xfrm>
+          <a:prstGeom prst="line">
+            <a:avLst/>
+          </a:prstGeom>
+          <a:noFill/>
+          <a:ln w="9525">
             <a:solidFill>
-              <a:srgbClr val="E6E8DF"/>
+              <a:srgbClr val="E0E2D8"/>
             </a:solidFill>
             <a:prstDash val="solid"/>
           </a:ln>
@@ -13330,30 +13513,413 @@
       </p:sp>
       <p:sp>
         <p:nvSpPr>
-          <p:cNvPr id="11" name="Text 8"/>
-          <p:cNvSpPr/>
-          <p:nvPr/>
-        </p:nvSpPr>
-        <p:spPr>
-          <a:xfrm>
-            <a:off x="8869680" y="3432048"/>
-            <a:ext cx="2450592" cy="745998"/>
-          </a:xfrm>
-          <a:prstGeom prst="rect">
-            <a:avLst/>
-          </a:prstGeom>
-          <a:noFill/>
-          <a:ln/>
-        </p:spPr>
-        <p:txBody>
-          <a:bodyPr wrap="square" lIns="0" tIns="0" rIns="0" bIns="0" rtlCol="0" anchor="b"/>
+          <p:cNvPr id="17" name="Shape 15"/>
+          <p:cNvSpPr/>
+          <p:nvPr/>
+        </p:nvSpPr>
+        <p:spPr>
+          <a:xfrm>
+            <a:off x="932688" y="4270248"/>
+            <a:ext cx="118872" cy="118872"/>
+          </a:xfrm>
+          <a:prstGeom prst="ellipse">
+            <a:avLst/>
+          </a:prstGeom>
+          <a:solidFill>
+            <a:srgbClr val="A8CC3A"/>
+          </a:solidFill>
+          <a:ln/>
+        </p:spPr>
+      </p:sp>
+      <p:sp>
+        <p:nvSpPr>
+          <p:cNvPr id="18" name="Text 16"/>
+          <p:cNvSpPr/>
+          <p:nvPr/>
+        </p:nvSpPr>
+        <p:spPr>
+          <a:xfrm>
+            <a:off x="1152144" y="4206240"/>
+            <a:ext cx="2731008" cy="457200"/>
+          </a:xfrm>
+          <a:prstGeom prst="rect">
+            <a:avLst/>
+          </a:prstGeom>
+          <a:noFill/>
+          <a:ln/>
+        </p:spPr>
+        <p:txBody>
+          <a:bodyPr wrap="square" lIns="0" tIns="0" rIns="0" bIns="0" rtlCol="0" anchor="t">
+            <a:normAutofit/>
+          </a:bodyPr>
           <a:lstStyle/>
           <a:p>
             <a:pPr indent="0" marL="0">
-              <a:buNone/>
-            </a:pPr>
-            <a:r>
-              <a:rPr lang="en-US" sz="3200" b="1" dirty="0">
+              <a:lnSpc>
+                <a:spcPct val="105000"/>
+              </a:lnSpc>
+              <a:buNone/>
+            </a:pPr>
+            <a:r>
+              <a:rPr lang="en-US" sz="1100" dirty="0">
+                <a:solidFill>
+                  <a:srgbClr val="141412"/>
+                </a:solidFill>
+                <a:latin typeface="Calibri" pitchFamily="34" charset="0"/>
+                <a:ea typeface="Calibri" pitchFamily="34" charset="-122"/>
+                <a:cs typeface="Calibri" pitchFamily="34" charset="-120"/>
+              </a:rPr>
+              <a:t>P1 · Accounts &amp; Sign-in (3/3)</a:t>
+            </a:r>
+            <a:endParaRPr lang="en-US" sz="1100" dirty="0"/>
+          </a:p>
+        </p:txBody>
+      </p:sp>
+      <p:sp>
+        <p:nvSpPr>
+          <p:cNvPr id="19" name="Shape 17"/>
+          <p:cNvSpPr/>
+          <p:nvPr/>
+        </p:nvSpPr>
+        <p:spPr>
+          <a:xfrm>
+            <a:off x="932688" y="4727448"/>
+            <a:ext cx="118872" cy="118872"/>
+          </a:xfrm>
+          <a:prstGeom prst="ellipse">
+            <a:avLst/>
+          </a:prstGeom>
+          <a:solidFill>
+            <a:srgbClr val="A8CC3A"/>
+          </a:solidFill>
+          <a:ln/>
+        </p:spPr>
+      </p:sp>
+      <p:sp>
+        <p:nvSpPr>
+          <p:cNvPr id="20" name="Text 18"/>
+          <p:cNvSpPr/>
+          <p:nvPr/>
+        </p:nvSpPr>
+        <p:spPr>
+          <a:xfrm>
+            <a:off x="1152144" y="4663440"/>
+            <a:ext cx="2731008" cy="457200"/>
+          </a:xfrm>
+          <a:prstGeom prst="rect">
+            <a:avLst/>
+          </a:prstGeom>
+          <a:noFill/>
+          <a:ln/>
+        </p:spPr>
+        <p:txBody>
+          <a:bodyPr wrap="square" lIns="0" tIns="0" rIns="0" bIns="0" rtlCol="0" anchor="t">
+            <a:normAutofit/>
+          </a:bodyPr>
+          <a:lstStyle/>
+          <a:p>
+            <a:pPr indent="0" marL="0">
+              <a:lnSpc>
+                <a:spcPct val="105000"/>
+              </a:lnSpc>
+              <a:buNone/>
+            </a:pPr>
+            <a:r>
+              <a:rPr lang="en-US" sz="1100" dirty="0">
+                <a:solidFill>
+                  <a:srgbClr val="141412"/>
+                </a:solidFill>
+                <a:latin typeface="Calibri" pitchFamily="34" charset="0"/>
+                <a:ea typeface="Calibri" pitchFamily="34" charset="-122"/>
+                <a:cs typeface="Calibri" pitchFamily="34" charset="-120"/>
+              </a:rPr>
+              <a:t>P2 · Clinic Search &amp; Maps (5/5)</a:t>
+            </a:r>
+            <a:endParaRPr lang="en-US" sz="1100" dirty="0"/>
+          </a:p>
+        </p:txBody>
+      </p:sp>
+      <p:sp>
+        <p:nvSpPr>
+          <p:cNvPr id="21" name="Shape 19"/>
+          <p:cNvSpPr/>
+          <p:nvPr/>
+        </p:nvSpPr>
+        <p:spPr>
+          <a:xfrm>
+            <a:off x="932688" y="5184648"/>
+            <a:ext cx="118872" cy="118872"/>
+          </a:xfrm>
+          <a:prstGeom prst="ellipse">
+            <a:avLst/>
+          </a:prstGeom>
+          <a:solidFill>
+            <a:srgbClr val="D6E6A0"/>
+          </a:solidFill>
+          <a:ln/>
+        </p:spPr>
+      </p:sp>
+      <p:sp>
+        <p:nvSpPr>
+          <p:cNvPr id="22" name="Text 20"/>
+          <p:cNvSpPr/>
+          <p:nvPr/>
+        </p:nvSpPr>
+        <p:spPr>
+          <a:xfrm>
+            <a:off x="1152144" y="5120640"/>
+            <a:ext cx="2731008" cy="457200"/>
+          </a:xfrm>
+          <a:prstGeom prst="rect">
+            <a:avLst/>
+          </a:prstGeom>
+          <a:noFill/>
+          <a:ln/>
+        </p:spPr>
+        <p:txBody>
+          <a:bodyPr wrap="square" lIns="0" tIns="0" rIns="0" bIns="0" rtlCol="0" anchor="t">
+            <a:normAutofit/>
+          </a:bodyPr>
+          <a:lstStyle/>
+          <a:p>
+            <a:pPr indent="0" marL="0">
+              <a:lnSpc>
+                <a:spcPct val="105000"/>
+              </a:lnSpc>
+              <a:buNone/>
+            </a:pPr>
+            <a:r>
+              <a:rPr lang="en-US" sz="1100" dirty="0">
+                <a:solidFill>
+                  <a:srgbClr val="141412"/>
+                </a:solidFill>
+                <a:latin typeface="Calibri" pitchFamily="34" charset="0"/>
+                <a:ea typeface="Calibri" pitchFamily="34" charset="-122"/>
+                <a:cs typeface="Calibri" pitchFamily="34" charset="-120"/>
+              </a:rPr>
+              <a:t>P3 · Booking Calendar (2/5)</a:t>
+            </a:r>
+            <a:endParaRPr lang="en-US" sz="1100" dirty="0"/>
+          </a:p>
+        </p:txBody>
+      </p:sp>
+      <p:sp>
+        <p:nvSpPr>
+          <p:cNvPr id="23" name="Shape 21"/>
+          <p:cNvSpPr/>
+          <p:nvPr/>
+        </p:nvSpPr>
+        <p:spPr>
+          <a:xfrm>
+            <a:off x="932688" y="5641848"/>
+            <a:ext cx="118872" cy="118872"/>
+          </a:xfrm>
+          <a:prstGeom prst="ellipse">
+            <a:avLst/>
+          </a:prstGeom>
+          <a:solidFill>
+            <a:srgbClr val="E6E8DF"/>
+          </a:solidFill>
+          <a:ln/>
+        </p:spPr>
+      </p:sp>
+      <p:sp>
+        <p:nvSpPr>
+          <p:cNvPr id="24" name="Text 22"/>
+          <p:cNvSpPr/>
+          <p:nvPr/>
+        </p:nvSpPr>
+        <p:spPr>
+          <a:xfrm>
+            <a:off x="1152144" y="5577840"/>
+            <a:ext cx="2731008" cy="457200"/>
+          </a:xfrm>
+          <a:prstGeom prst="rect">
+            <a:avLst/>
+          </a:prstGeom>
+          <a:noFill/>
+          <a:ln/>
+        </p:spPr>
+        <p:txBody>
+          <a:bodyPr wrap="square" lIns="0" tIns="0" rIns="0" bIns="0" rtlCol="0" anchor="t">
+            <a:normAutofit/>
+          </a:bodyPr>
+          <a:lstStyle/>
+          <a:p>
+            <a:pPr indent="0" marL="0">
+              <a:lnSpc>
+                <a:spcPct val="105000"/>
+              </a:lnSpc>
+              <a:buNone/>
+            </a:pPr>
+            <a:r>
+              <a:rPr lang="en-US" sz="1100" dirty="0">
+                <a:solidFill>
+                  <a:srgbClr val="141412"/>
+                </a:solidFill>
+                <a:latin typeface="Calibri" pitchFamily="34" charset="0"/>
+                <a:ea typeface="Calibri" pitchFamily="34" charset="-122"/>
+                <a:cs typeface="Calibri" pitchFamily="34" charset="-120"/>
+              </a:rPr>
+              <a:t>P4 · Payments &amp; Receipts (0/4)</a:t>
+            </a:r>
+            <a:endParaRPr lang="en-US" sz="1100" dirty="0"/>
+          </a:p>
+        </p:txBody>
+      </p:sp>
+      <p:sp>
+        <p:nvSpPr>
+          <p:cNvPr id="25" name="Shape 23"/>
+          <p:cNvSpPr/>
+          <p:nvPr/>
+        </p:nvSpPr>
+        <p:spPr>
+          <a:xfrm>
+            <a:off x="4367784" y="1783080"/>
+            <a:ext cx="3453384" cy="4434840"/>
+          </a:xfrm>
+          <a:prstGeom prst="roundRect">
+            <a:avLst>
+              <a:gd name="adj" fmla="val 2118"/>
+            </a:avLst>
+          </a:prstGeom>
+          <a:solidFill>
+            <a:srgbClr val="F6F7F1"/>
+          </a:solidFill>
+          <a:ln/>
+          <a:effectLst>
+            <a:outerShdw sx="100000" sy="100000" kx="0" ky="0" algn="bl" rotWithShape="0" blurRad="76200" dist="25400" dir="5400000">
+              <a:srgbClr val="000000">
+                <a:alpha val="8000"/>
+              </a:srgbClr>
+            </a:outerShdw>
+          </a:effectLst>
+        </p:spPr>
+      </p:sp>
+      <p:sp>
+        <p:nvSpPr>
+          <p:cNvPr id="26" name="Shape 24"/>
+          <p:cNvSpPr/>
+          <p:nvPr/>
+        </p:nvSpPr>
+        <p:spPr>
+          <a:xfrm>
+            <a:off x="4367784" y="1783080"/>
+            <a:ext cx="82296" cy="4434840"/>
+          </a:xfrm>
+          <a:prstGeom prst="rect">
+            <a:avLst/>
+          </a:prstGeom>
+          <a:solidFill>
+            <a:srgbClr val="D6E6A0"/>
+          </a:solidFill>
+          <a:ln/>
+        </p:spPr>
+      </p:sp>
+      <p:sp>
+        <p:nvSpPr>
+          <p:cNvPr id="27" name="Text 25"/>
+          <p:cNvSpPr/>
+          <p:nvPr/>
+        </p:nvSpPr>
+        <p:spPr>
+          <a:xfrm>
+            <a:off x="4660392" y="1984248"/>
+            <a:ext cx="2950464" cy="329184"/>
+          </a:xfrm>
+          <a:prstGeom prst="rect">
+            <a:avLst/>
+          </a:prstGeom>
+          <a:noFill/>
+          <a:ln/>
+        </p:spPr>
+        <p:txBody>
+          <a:bodyPr wrap="square" lIns="0" tIns="0" rIns="0" bIns="0" rtlCol="0" anchor="ctr"/>
+          <a:lstStyle/>
+          <a:p>
+            <a:pPr indent="0" marL="0">
+              <a:buNone/>
+            </a:pPr>
+            <a:r>
+              <a:rPr lang="en-US" sz="1500" b="1" dirty="0">
+                <a:solidFill>
+                  <a:srgbClr val="141412"/>
+                </a:solidFill>
+                <a:latin typeface="Calibri" pitchFamily="34" charset="0"/>
+                <a:ea typeface="Calibri" pitchFamily="34" charset="-122"/>
+                <a:cs typeface="Calibri" pitchFamily="34" charset="-120"/>
+              </a:rPr>
+              <a:t>Nina Rao @Nina</a:t>
+            </a:r>
+            <a:endParaRPr lang="en-US" sz="1500" dirty="0"/>
+          </a:p>
+        </p:txBody>
+      </p:sp>
+      <p:sp>
+        <p:nvSpPr>
+          <p:cNvPr id="28" name="Text 26"/>
+          <p:cNvSpPr/>
+          <p:nvPr/>
+        </p:nvSpPr>
+        <p:spPr>
+          <a:xfrm>
+            <a:off x="4660392" y="2295144"/>
+            <a:ext cx="2950464" cy="237744"/>
+          </a:xfrm>
+          <a:prstGeom prst="rect">
+            <a:avLst/>
+          </a:prstGeom>
+          <a:noFill/>
+          <a:ln/>
+        </p:spPr>
+        <p:txBody>
+          <a:bodyPr wrap="square" lIns="0" tIns="0" rIns="0" bIns="0" rtlCol="0" anchor="ctr"/>
+          <a:lstStyle/>
+          <a:p>
+            <a:pPr indent="0" marL="0">
+              <a:buNone/>
+            </a:pPr>
+            <a:r>
+              <a:rPr lang="en-US" sz="1100" b="1" dirty="0">
+                <a:solidFill>
+                  <a:srgbClr val="6E8A1F"/>
+                </a:solidFill>
+                <a:latin typeface="Calibri" pitchFamily="34" charset="0"/>
+                <a:ea typeface="Calibri" pitchFamily="34" charset="-122"/>
+                <a:cs typeface="Calibri" pitchFamily="34" charset="-120"/>
+              </a:rPr>
+              <a:t>ClinicBook · Clinic Dashboard</a:t>
+            </a:r>
+            <a:endParaRPr lang="en-US" sz="1100" dirty="0"/>
+          </a:p>
+        </p:txBody>
+      </p:sp>
+      <p:sp>
+        <p:nvSpPr>
+          <p:cNvPr id="29" name="Text 27"/>
+          <p:cNvSpPr/>
+          <p:nvPr/>
+        </p:nvSpPr>
+        <p:spPr>
+          <a:xfrm>
+            <a:off x="4660392" y="2606040"/>
+            <a:ext cx="411480" cy="457200"/>
+          </a:xfrm>
+          <a:prstGeom prst="rect">
+            <a:avLst/>
+          </a:prstGeom>
+          <a:noFill/>
+          <a:ln/>
+        </p:spPr>
+        <p:txBody>
+          <a:bodyPr wrap="square" lIns="0" tIns="0" rIns="0" bIns="0" rtlCol="0" anchor="ctr"/>
+          <a:lstStyle/>
+          <a:p>
+            <a:pPr indent="0" marL="0">
+              <a:buNone/>
+            </a:pPr>
+            <a:r>
+              <a:rPr lang="en-US" sz="2600" b="1" dirty="0">
                 <a:solidFill>
                   <a:srgbClr val="141412"/>
                 </a:solidFill>
@@ -13361,38 +13927,38 @@
                 <a:ea typeface="Cambria" pitchFamily="34" charset="-122"/>
                 <a:cs typeface="Cambria" pitchFamily="34" charset="-120"/>
               </a:rPr>
-              <a:t>2</a:t>
-            </a:r>
-            <a:endParaRPr lang="en-US" sz="3200" dirty="0"/>
-          </a:p>
-        </p:txBody>
-      </p:sp>
-      <p:sp>
-        <p:nvSpPr>
-          <p:cNvPr id="12" name="Text 9"/>
-          <p:cNvSpPr/>
-          <p:nvPr/>
-        </p:nvSpPr>
-        <p:spPr>
-          <a:xfrm>
-            <a:off x="8869680" y="4136136"/>
-            <a:ext cx="2450592" cy="474726"/>
-          </a:xfrm>
-          <a:prstGeom prst="rect">
-            <a:avLst/>
-          </a:prstGeom>
-          <a:noFill/>
-          <a:ln/>
-        </p:spPr>
-        <p:txBody>
-          <a:bodyPr wrap="square" lIns="0" tIns="0" rIns="0" bIns="0" rtlCol="0" anchor="t"/>
+              <a:t>4</a:t>
+            </a:r>
+            <a:endParaRPr lang="en-US" sz="2600" dirty="0"/>
+          </a:p>
+        </p:txBody>
+      </p:sp>
+      <p:sp>
+        <p:nvSpPr>
+          <p:cNvPr id="30" name="Text 28"/>
+          <p:cNvSpPr/>
+          <p:nvPr/>
+        </p:nvSpPr>
+        <p:spPr>
+          <a:xfrm>
+            <a:off x="5117592" y="2606040"/>
+            <a:ext cx="822960" cy="457200"/>
+          </a:xfrm>
+          <a:prstGeom prst="rect">
+            <a:avLst/>
+          </a:prstGeom>
+          <a:noFill/>
+          <a:ln/>
+        </p:spPr>
+        <p:txBody>
+          <a:bodyPr wrap="square" lIns="0" tIns="0" rIns="0" bIns="0" rtlCol="0" anchor="ctr"/>
           <a:lstStyle/>
           <a:p>
             <a:pPr indent="0" marL="0">
               <a:buNone/>
             </a:pPr>
             <a:r>
-              <a:rPr lang="en-US" sz="1200" b="1" dirty="0">
+              <a:rPr lang="en-US" sz="1100" b="1" dirty="0">
                 <a:solidFill>
                   <a:srgbClr val="58584F"/>
                 </a:solidFill>
@@ -13400,34 +13966,252 @@
                 <a:ea typeface="Calibri" pitchFamily="34" charset="-122"/>
                 <a:cs typeface="Calibri" pitchFamily="34" charset="-120"/>
               </a:rPr>
-              <a:t>In final review</a:t>
-            </a:r>
-            <a:endParaRPr lang="en-US" sz="1200" dirty="0"/>
-          </a:p>
-        </p:txBody>
-      </p:sp>
-      <p:sp>
-        <p:nvSpPr>
-          <p:cNvPr id="13" name="Shape 10"/>
-          <p:cNvSpPr/>
-          <p:nvPr/>
-        </p:nvSpPr>
-        <p:spPr>
-          <a:xfrm>
-            <a:off x="8641080" y="4861560"/>
-            <a:ext cx="2907792" cy="1356360"/>
+              <a:t>done this</a:t>
+            </a:r>
+            <a:endParaRPr lang="en-US" sz="1100" dirty="0"/>
+          </a:p>
+          <a:p>
+            <a:pPr indent="0" marL="0">
+              <a:buNone/>
+            </a:pPr>
+            <a:r>
+              <a:rPr lang="en-US" sz="1100" b="1" dirty="0">
+                <a:solidFill>
+                  <a:srgbClr val="58584F"/>
+                </a:solidFill>
+                <a:latin typeface="Calibri" pitchFamily="34" charset="0"/>
+                <a:ea typeface="Calibri" pitchFamily="34" charset="-122"/>
+                <a:cs typeface="Calibri" pitchFamily="34" charset="-120"/>
+              </a:rPr>
+              <a:t>week</a:t>
+            </a:r>
+            <a:endParaRPr lang="en-US" sz="1100" dirty="0"/>
+          </a:p>
+        </p:txBody>
+      </p:sp>
+      <p:sp>
+        <p:nvSpPr>
+          <p:cNvPr id="31" name="Text 29"/>
+          <p:cNvSpPr/>
+          <p:nvPr/>
+        </p:nvSpPr>
+        <p:spPr>
+          <a:xfrm>
+            <a:off x="5986272" y="2606040"/>
+            <a:ext cx="411480" cy="457200"/>
+          </a:xfrm>
+          <a:prstGeom prst="rect">
+            <a:avLst/>
+          </a:prstGeom>
+          <a:noFill/>
+          <a:ln/>
+        </p:spPr>
+        <p:txBody>
+          <a:bodyPr wrap="square" lIns="0" tIns="0" rIns="0" bIns="0" rtlCol="0" anchor="ctr"/>
+          <a:lstStyle/>
+          <a:p>
+            <a:pPr indent="0" marL="0">
+              <a:buNone/>
+            </a:pPr>
+            <a:r>
+              <a:rPr lang="en-US" sz="2600" b="1" dirty="0">
+                <a:solidFill>
+                  <a:srgbClr val="141412"/>
+                </a:solidFill>
+                <a:latin typeface="Cambria" pitchFamily="34" charset="0"/>
+                <a:ea typeface="Cambria" pitchFamily="34" charset="-122"/>
+                <a:cs typeface="Cambria" pitchFamily="34" charset="-120"/>
+              </a:rPr>
+              <a:t>1</a:t>
+            </a:r>
+            <a:endParaRPr lang="en-US" sz="2600" dirty="0"/>
+          </a:p>
+        </p:txBody>
+      </p:sp>
+      <p:sp>
+        <p:nvSpPr>
+          <p:cNvPr id="32" name="Text 30"/>
+          <p:cNvSpPr/>
+          <p:nvPr/>
+        </p:nvSpPr>
+        <p:spPr>
+          <a:xfrm>
+            <a:off x="6443472" y="2606040"/>
+            <a:ext cx="731520" cy="457200"/>
+          </a:xfrm>
+          <a:prstGeom prst="rect">
+            <a:avLst/>
+          </a:prstGeom>
+          <a:noFill/>
+          <a:ln/>
+        </p:spPr>
+        <p:txBody>
+          <a:bodyPr wrap="square" lIns="0" tIns="0" rIns="0" bIns="0" rtlCol="0" anchor="ctr"/>
+          <a:lstStyle/>
+          <a:p>
+            <a:pPr indent="0" marL="0">
+              <a:buNone/>
+            </a:pPr>
+            <a:r>
+              <a:rPr lang="en-US" sz="1100" b="1" dirty="0">
+                <a:solidFill>
+                  <a:srgbClr val="58584F"/>
+                </a:solidFill>
+                <a:latin typeface="Calibri" pitchFamily="34" charset="0"/>
+                <a:ea typeface="Calibri" pitchFamily="34" charset="-122"/>
+                <a:cs typeface="Calibri" pitchFamily="34" charset="-120"/>
+              </a:rPr>
+              <a:t>open</a:t>
+            </a:r>
+            <a:endParaRPr lang="en-US" sz="1100" dirty="0"/>
+          </a:p>
+        </p:txBody>
+      </p:sp>
+      <p:sp>
+        <p:nvSpPr>
+          <p:cNvPr id="33" name="Shape 31"/>
+          <p:cNvSpPr/>
+          <p:nvPr/>
+        </p:nvSpPr>
+        <p:spPr>
+          <a:xfrm>
+            <a:off x="4660392" y="3200400"/>
+            <a:ext cx="2401824" cy="118872"/>
           </a:xfrm>
           <a:prstGeom prst="roundRect">
             <a:avLst>
-              <a:gd name="adj" fmla="val 5393"/>
+              <a:gd name="adj" fmla="val 50000"/>
             </a:avLst>
           </a:prstGeom>
           <a:solidFill>
-            <a:srgbClr val="FFFFFF"/>
+            <a:srgbClr val="E6E8DF"/>
           </a:solidFill>
-          <a:ln w="12700">
+          <a:ln/>
+        </p:spPr>
+      </p:sp>
+      <p:sp>
+        <p:nvSpPr>
+          <p:cNvPr id="34" name="Shape 32"/>
+          <p:cNvSpPr/>
+          <p:nvPr/>
+        </p:nvSpPr>
+        <p:spPr>
+          <a:xfrm>
+            <a:off x="4660392" y="3200400"/>
+            <a:ext cx="1681277" cy="118872"/>
+          </a:xfrm>
+          <a:prstGeom prst="roundRect">
+            <a:avLst>
+              <a:gd name="adj" fmla="val 50000"/>
+            </a:avLst>
+          </a:prstGeom>
+          <a:solidFill>
+            <a:srgbClr val="D6E6A0"/>
+          </a:solidFill>
+          <a:ln/>
+        </p:spPr>
+      </p:sp>
+      <p:sp>
+        <p:nvSpPr>
+          <p:cNvPr id="35" name="Text 33"/>
+          <p:cNvSpPr/>
+          <p:nvPr/>
+        </p:nvSpPr>
+        <p:spPr>
+          <a:xfrm>
+            <a:off x="7062216" y="3127248"/>
+            <a:ext cx="548640" cy="274320"/>
+          </a:xfrm>
+          <a:prstGeom prst="rect">
+            <a:avLst/>
+          </a:prstGeom>
+          <a:noFill/>
+          <a:ln/>
+        </p:spPr>
+        <p:txBody>
+          <a:bodyPr wrap="square" lIns="0" tIns="0" rIns="0" bIns="0" rtlCol="0" anchor="ctr"/>
+          <a:lstStyle/>
+          <a:p>
+            <a:pPr algn="r" indent="0" marL="0">
+              <a:buNone/>
+            </a:pPr>
+            <a:r>
+              <a:rPr lang="en-US" sz="1100" b="1" dirty="0">
+                <a:solidFill>
+                  <a:srgbClr val="141412"/>
+                </a:solidFill>
+                <a:latin typeface="Calibri" pitchFamily="34" charset="0"/>
+                <a:ea typeface="Calibri" pitchFamily="34" charset="-122"/>
+                <a:cs typeface="Calibri" pitchFamily="34" charset="-120"/>
+              </a:rPr>
+              <a:t>70%</a:t>
+            </a:r>
+            <a:endParaRPr lang="en-US" sz="1100" dirty="0"/>
+          </a:p>
+        </p:txBody>
+      </p:sp>
+      <p:sp>
+        <p:nvSpPr>
+          <p:cNvPr id="36" name="Text 34"/>
+          <p:cNvSpPr/>
+          <p:nvPr/>
+        </p:nvSpPr>
+        <p:spPr>
+          <a:xfrm>
+            <a:off x="4660392" y="3456432"/>
+            <a:ext cx="2950464" cy="548640"/>
+          </a:xfrm>
+          <a:prstGeom prst="rect">
+            <a:avLst/>
+          </a:prstGeom>
+          <a:noFill/>
+          <a:ln/>
+        </p:spPr>
+        <p:txBody>
+          <a:bodyPr wrap="square" lIns="0" tIns="0" rIns="0" bIns="0" rtlCol="0" anchor="t">
+            <a:normAutofit/>
+          </a:bodyPr>
+          <a:lstStyle/>
+          <a:p>
+            <a:pPr indent="0" marL="0">
+              <a:lnSpc>
+                <a:spcPct val="110000"/>
+              </a:lnSpc>
+              <a:buNone/>
+            </a:pPr>
+            <a:r>
+              <a:rPr lang="en-US" sz="1100" dirty="0">
+                <a:solidFill>
+                  <a:srgbClr val="58584F"/>
+                </a:solidFill>
+                <a:latin typeface="Calibri" pitchFamily="34" charset="0"/>
+                <a:ea typeface="Calibri" pitchFamily="34" charset="-122"/>
+                <a:cs typeface="Calibri" pitchFamily="34" charset="-120"/>
+              </a:rPr>
+              <a:t>Onboarding and schedules done; reminders in final review.</a:t>
+            </a:r>
+            <a:endParaRPr lang="en-US" sz="1100" dirty="0"/>
+          </a:p>
+        </p:txBody>
+      </p:sp>
+      <p:sp>
+        <p:nvSpPr>
+          <p:cNvPr id="37" name="Shape 35"/>
+          <p:cNvSpPr/>
+          <p:nvPr/>
+        </p:nvSpPr>
+        <p:spPr>
+          <a:xfrm>
+            <a:off x="4660392" y="4069080"/>
+            <a:ext cx="2950464" cy="0"/>
+          </a:xfrm>
+          <a:prstGeom prst="line">
+            <a:avLst/>
+          </a:prstGeom>
+          <a:noFill/>
+          <a:ln w="9525">
             <a:solidFill>
-              <a:srgbClr val="E6E8DF"/>
+              <a:srgbClr val="E0E2D8"/>
             </a:solidFill>
             <a:prstDash val="solid"/>
           </a:ln>
@@ -13435,30 +14219,413 @@
       </p:sp>
       <p:sp>
         <p:nvSpPr>
-          <p:cNvPr id="14" name="Text 11"/>
-          <p:cNvSpPr/>
-          <p:nvPr/>
-        </p:nvSpPr>
-        <p:spPr>
-          <a:xfrm>
-            <a:off x="8869680" y="4971288"/>
-            <a:ext cx="2450592" cy="745998"/>
-          </a:xfrm>
-          <a:prstGeom prst="rect">
-            <a:avLst/>
-          </a:prstGeom>
-          <a:noFill/>
-          <a:ln/>
-        </p:spPr>
-        <p:txBody>
-          <a:bodyPr wrap="square" lIns="0" tIns="0" rIns="0" bIns="0" rtlCol="0" anchor="b"/>
+          <p:cNvPr id="38" name="Shape 36"/>
+          <p:cNvSpPr/>
+          <p:nvPr/>
+        </p:nvSpPr>
+        <p:spPr>
+          <a:xfrm>
+            <a:off x="4660392" y="4270248"/>
+            <a:ext cx="118872" cy="118872"/>
+          </a:xfrm>
+          <a:prstGeom prst="ellipse">
+            <a:avLst/>
+          </a:prstGeom>
+          <a:solidFill>
+            <a:srgbClr val="A8CC3A"/>
+          </a:solidFill>
+          <a:ln/>
+        </p:spPr>
+      </p:sp>
+      <p:sp>
+        <p:nvSpPr>
+          <p:cNvPr id="39" name="Text 37"/>
+          <p:cNvSpPr/>
+          <p:nvPr/>
+        </p:nvSpPr>
+        <p:spPr>
+          <a:xfrm>
+            <a:off x="4879848" y="4206240"/>
+            <a:ext cx="2731008" cy="457200"/>
+          </a:xfrm>
+          <a:prstGeom prst="rect">
+            <a:avLst/>
+          </a:prstGeom>
+          <a:noFill/>
+          <a:ln/>
+        </p:spPr>
+        <p:txBody>
+          <a:bodyPr wrap="square" lIns="0" tIns="0" rIns="0" bIns="0" rtlCol="0" anchor="t">
+            <a:normAutofit/>
+          </a:bodyPr>
           <a:lstStyle/>
           <a:p>
             <a:pPr indent="0" marL="0">
-              <a:buNone/>
-            </a:pPr>
-            <a:r>
-              <a:rPr lang="en-US" sz="3200" b="1" dirty="0">
+              <a:lnSpc>
+                <a:spcPct val="105000"/>
+              </a:lnSpc>
+              <a:buNone/>
+            </a:pPr>
+            <a:r>
+              <a:rPr lang="en-US" sz="1100" dirty="0">
+                <a:solidFill>
+                  <a:srgbClr val="141412"/>
+                </a:solidFill>
+                <a:latin typeface="Calibri" pitchFamily="34" charset="0"/>
+                <a:ea typeface="Calibri" pitchFamily="34" charset="-122"/>
+                <a:cs typeface="Calibri" pitchFamily="34" charset="-120"/>
+              </a:rPr>
+              <a:t>P1 · Clinic Onboarding (3/3)</a:t>
+            </a:r>
+            <a:endParaRPr lang="en-US" sz="1100" dirty="0"/>
+          </a:p>
+        </p:txBody>
+      </p:sp>
+      <p:sp>
+        <p:nvSpPr>
+          <p:cNvPr id="40" name="Shape 38"/>
+          <p:cNvSpPr/>
+          <p:nvPr/>
+        </p:nvSpPr>
+        <p:spPr>
+          <a:xfrm>
+            <a:off x="4660392" y="4727448"/>
+            <a:ext cx="118872" cy="118872"/>
+          </a:xfrm>
+          <a:prstGeom prst="ellipse">
+            <a:avLst/>
+          </a:prstGeom>
+          <a:solidFill>
+            <a:srgbClr val="A8CC3A"/>
+          </a:solidFill>
+          <a:ln/>
+        </p:spPr>
+      </p:sp>
+      <p:sp>
+        <p:nvSpPr>
+          <p:cNvPr id="41" name="Text 39"/>
+          <p:cNvSpPr/>
+          <p:nvPr/>
+        </p:nvSpPr>
+        <p:spPr>
+          <a:xfrm>
+            <a:off x="4879848" y="4663440"/>
+            <a:ext cx="2731008" cy="457200"/>
+          </a:xfrm>
+          <a:prstGeom prst="rect">
+            <a:avLst/>
+          </a:prstGeom>
+          <a:noFill/>
+          <a:ln/>
+        </p:spPr>
+        <p:txBody>
+          <a:bodyPr wrap="square" lIns="0" tIns="0" rIns="0" bIns="0" rtlCol="0" anchor="t">
+            <a:normAutofit/>
+          </a:bodyPr>
+          <a:lstStyle/>
+          <a:p>
+            <a:pPr indent="0" marL="0">
+              <a:lnSpc>
+                <a:spcPct val="105000"/>
+              </a:lnSpc>
+              <a:buNone/>
+            </a:pPr>
+            <a:r>
+              <a:rPr lang="en-US" sz="1100" dirty="0">
+                <a:solidFill>
+                  <a:srgbClr val="141412"/>
+                </a:solidFill>
+                <a:latin typeface="Calibri" pitchFamily="34" charset="0"/>
+                <a:ea typeface="Calibri" pitchFamily="34" charset="-122"/>
+                <a:cs typeface="Calibri" pitchFamily="34" charset="-120"/>
+              </a:rPr>
+              <a:t>P2 · Doctor Schedules (5/5)</a:t>
+            </a:r>
+            <a:endParaRPr lang="en-US" sz="1100" dirty="0"/>
+          </a:p>
+        </p:txBody>
+      </p:sp>
+      <p:sp>
+        <p:nvSpPr>
+          <p:cNvPr id="42" name="Shape 40"/>
+          <p:cNvSpPr/>
+          <p:nvPr/>
+        </p:nvSpPr>
+        <p:spPr>
+          <a:xfrm>
+            <a:off x="4660392" y="5184648"/>
+            <a:ext cx="118872" cy="118872"/>
+          </a:xfrm>
+          <a:prstGeom prst="ellipse">
+            <a:avLst/>
+          </a:prstGeom>
+          <a:solidFill>
+            <a:srgbClr val="D6E6A0"/>
+          </a:solidFill>
+          <a:ln/>
+        </p:spPr>
+      </p:sp>
+      <p:sp>
+        <p:nvSpPr>
+          <p:cNvPr id="43" name="Text 41"/>
+          <p:cNvSpPr/>
+          <p:nvPr/>
+        </p:nvSpPr>
+        <p:spPr>
+          <a:xfrm>
+            <a:off x="4879848" y="5120640"/>
+            <a:ext cx="2731008" cy="457200"/>
+          </a:xfrm>
+          <a:prstGeom prst="rect">
+            <a:avLst/>
+          </a:prstGeom>
+          <a:noFill/>
+          <a:ln/>
+        </p:spPr>
+        <p:txBody>
+          <a:bodyPr wrap="square" lIns="0" tIns="0" rIns="0" bIns="0" rtlCol="0" anchor="t">
+            <a:normAutofit/>
+          </a:bodyPr>
+          <a:lstStyle/>
+          <a:p>
+            <a:pPr indent="0" marL="0">
+              <a:lnSpc>
+                <a:spcPct val="105000"/>
+              </a:lnSpc>
+              <a:buNone/>
+            </a:pPr>
+            <a:r>
+              <a:rPr lang="en-US" sz="1100" dirty="0">
+                <a:solidFill>
+                  <a:srgbClr val="141412"/>
+                </a:solidFill>
+                <a:latin typeface="Calibri" pitchFamily="34" charset="0"/>
+                <a:ea typeface="Calibri" pitchFamily="34" charset="-122"/>
+                <a:cs typeface="Calibri" pitchFamily="34" charset="-120"/>
+              </a:rPr>
+              <a:t>P4 · Reminders, in review (5/5)</a:t>
+            </a:r>
+            <a:endParaRPr lang="en-US" sz="1100" dirty="0"/>
+          </a:p>
+        </p:txBody>
+      </p:sp>
+      <p:sp>
+        <p:nvSpPr>
+          <p:cNvPr id="44" name="Shape 42"/>
+          <p:cNvSpPr/>
+          <p:nvPr/>
+        </p:nvSpPr>
+        <p:spPr>
+          <a:xfrm>
+            <a:off x="4660392" y="5641848"/>
+            <a:ext cx="118872" cy="118872"/>
+          </a:xfrm>
+          <a:prstGeom prst="ellipse">
+            <a:avLst/>
+          </a:prstGeom>
+          <a:solidFill>
+            <a:srgbClr val="E6E8DF"/>
+          </a:solidFill>
+          <a:ln/>
+        </p:spPr>
+      </p:sp>
+      <p:sp>
+        <p:nvSpPr>
+          <p:cNvPr id="45" name="Text 43"/>
+          <p:cNvSpPr/>
+          <p:nvPr/>
+        </p:nvSpPr>
+        <p:spPr>
+          <a:xfrm>
+            <a:off x="4879848" y="5577840"/>
+            <a:ext cx="2731008" cy="457200"/>
+          </a:xfrm>
+          <a:prstGeom prst="rect">
+            <a:avLst/>
+          </a:prstGeom>
+          <a:noFill/>
+          <a:ln/>
+        </p:spPr>
+        <p:txBody>
+          <a:bodyPr wrap="square" lIns="0" tIns="0" rIns="0" bIns="0" rtlCol="0" anchor="t">
+            <a:normAutofit/>
+          </a:bodyPr>
+          <a:lstStyle/>
+          <a:p>
+            <a:pPr indent="0" marL="0">
+              <a:lnSpc>
+                <a:spcPct val="105000"/>
+              </a:lnSpc>
+              <a:buNone/>
+            </a:pPr>
+            <a:r>
+              <a:rPr lang="en-US" sz="1100" dirty="0">
+                <a:solidFill>
+                  <a:srgbClr val="141412"/>
+                </a:solidFill>
+                <a:latin typeface="Calibri" pitchFamily="34" charset="0"/>
+                <a:ea typeface="Calibri" pitchFamily="34" charset="-122"/>
+                <a:cs typeface="Calibri" pitchFamily="34" charset="-120"/>
+              </a:rPr>
+              <a:t>P3 · Reports &amp; Exports (0/3)</a:t>
+            </a:r>
+            <a:endParaRPr lang="en-US" sz="1100" dirty="0"/>
+          </a:p>
+        </p:txBody>
+      </p:sp>
+      <p:sp>
+        <p:nvSpPr>
+          <p:cNvPr id="46" name="Shape 44"/>
+          <p:cNvSpPr/>
+          <p:nvPr/>
+        </p:nvSpPr>
+        <p:spPr>
+          <a:xfrm>
+            <a:off x="8095488" y="1783080"/>
+            <a:ext cx="3453384" cy="4434840"/>
+          </a:xfrm>
+          <a:prstGeom prst="roundRect">
+            <a:avLst>
+              <a:gd name="adj" fmla="val 2118"/>
+            </a:avLst>
+          </a:prstGeom>
+          <a:solidFill>
+            <a:srgbClr val="F6F7F1"/>
+          </a:solidFill>
+          <a:ln/>
+          <a:effectLst>
+            <a:outerShdw sx="100000" sy="100000" kx="0" ky="0" algn="bl" rotWithShape="0" blurRad="76200" dist="25400" dir="5400000">
+              <a:srgbClr val="000000">
+                <a:alpha val="8000"/>
+              </a:srgbClr>
+            </a:outerShdw>
+          </a:effectLst>
+        </p:spPr>
+      </p:sp>
+      <p:sp>
+        <p:nvSpPr>
+          <p:cNvPr id="47" name="Shape 45"/>
+          <p:cNvSpPr/>
+          <p:nvPr/>
+        </p:nvSpPr>
+        <p:spPr>
+          <a:xfrm>
+            <a:off x="8095488" y="1783080"/>
+            <a:ext cx="82296" cy="4434840"/>
+          </a:xfrm>
+          <a:prstGeom prst="rect">
+            <a:avLst/>
+          </a:prstGeom>
+          <a:solidFill>
+            <a:srgbClr val="D6E6A0"/>
+          </a:solidFill>
+          <a:ln/>
+        </p:spPr>
+      </p:sp>
+      <p:sp>
+        <p:nvSpPr>
+          <p:cNvPr id="48" name="Text 46"/>
+          <p:cNvSpPr/>
+          <p:nvPr/>
+        </p:nvSpPr>
+        <p:spPr>
+          <a:xfrm>
+            <a:off x="8388096" y="1984248"/>
+            <a:ext cx="2950464" cy="329184"/>
+          </a:xfrm>
+          <a:prstGeom prst="rect">
+            <a:avLst/>
+          </a:prstGeom>
+          <a:noFill/>
+          <a:ln/>
+        </p:spPr>
+        <p:txBody>
+          <a:bodyPr wrap="square" lIns="0" tIns="0" rIns="0" bIns="0" rtlCol="0" anchor="ctr"/>
+          <a:lstStyle/>
+          <a:p>
+            <a:pPr indent="0" marL="0">
+              <a:buNone/>
+            </a:pPr>
+            <a:r>
+              <a:rPr lang="en-US" sz="1500" b="1" dirty="0">
+                <a:solidFill>
+                  <a:srgbClr val="141412"/>
+                </a:solidFill>
+                <a:latin typeface="Calibri" pitchFamily="34" charset="0"/>
+                <a:ea typeface="Calibri" pitchFamily="34" charset="-122"/>
+                <a:cs typeface="Calibri" pitchFamily="34" charset="-120"/>
+              </a:rPr>
+              <a:t>Maya Lin @Maya</a:t>
+            </a:r>
+            <a:endParaRPr lang="en-US" sz="1500" dirty="0"/>
+          </a:p>
+        </p:txBody>
+      </p:sp>
+      <p:sp>
+        <p:nvSpPr>
+          <p:cNvPr id="49" name="Text 47"/>
+          <p:cNvSpPr/>
+          <p:nvPr/>
+        </p:nvSpPr>
+        <p:spPr>
+          <a:xfrm>
+            <a:off x="8388096" y="2295144"/>
+            <a:ext cx="2950464" cy="237744"/>
+          </a:xfrm>
+          <a:prstGeom prst="rect">
+            <a:avLst/>
+          </a:prstGeom>
+          <a:noFill/>
+          <a:ln/>
+        </p:spPr>
+        <p:txBody>
+          <a:bodyPr wrap="square" lIns="0" tIns="0" rIns="0" bIns="0" rtlCol="0" anchor="ctr"/>
+          <a:lstStyle/>
+          <a:p>
+            <a:pPr indent="0" marL="0">
+              <a:buNone/>
+            </a:pPr>
+            <a:r>
+              <a:rPr lang="en-US" sz="1100" b="1" dirty="0">
+                <a:solidFill>
+                  <a:srgbClr val="6E8A1F"/>
+                </a:solidFill>
+                <a:latin typeface="Calibri" pitchFamily="34" charset="0"/>
+                <a:ea typeface="Calibri" pitchFamily="34" charset="-122"/>
+                <a:cs typeface="Calibri" pitchFamily="34" charset="-120"/>
+              </a:rPr>
+              <a:t>PulseBoard · Analytics</a:t>
+            </a:r>
+            <a:endParaRPr lang="en-US" sz="1100" dirty="0"/>
+          </a:p>
+        </p:txBody>
+      </p:sp>
+      <p:sp>
+        <p:nvSpPr>
+          <p:cNvPr id="50" name="Text 48"/>
+          <p:cNvSpPr/>
+          <p:nvPr/>
+        </p:nvSpPr>
+        <p:spPr>
+          <a:xfrm>
+            <a:off x="8388096" y="2606040"/>
+            <a:ext cx="411480" cy="457200"/>
+          </a:xfrm>
+          <a:prstGeom prst="rect">
+            <a:avLst/>
+          </a:prstGeom>
+          <a:noFill/>
+          <a:ln/>
+        </p:spPr>
+        <p:txBody>
+          <a:bodyPr wrap="square" lIns="0" tIns="0" rIns="0" bIns="0" rtlCol="0" anchor="ctr"/>
+          <a:lstStyle/>
+          <a:p>
+            <a:pPr indent="0" marL="0">
+              <a:buNone/>
+            </a:pPr>
+            <a:r>
+              <a:rPr lang="en-US" sz="2600" b="1" dirty="0">
                 <a:solidFill>
                   <a:srgbClr val="141412"/>
                 </a:solidFill>
@@ -13466,38 +14633,38 @@
                 <a:ea typeface="Cambria" pitchFamily="34" charset="-122"/>
                 <a:cs typeface="Cambria" pitchFamily="34" charset="-120"/>
               </a:rPr>
-              <a:t>7</a:t>
-            </a:r>
-            <a:endParaRPr lang="en-US" sz="3200" dirty="0"/>
-          </a:p>
-        </p:txBody>
-      </p:sp>
-      <p:sp>
-        <p:nvSpPr>
-          <p:cNvPr id="15" name="Text 12"/>
-          <p:cNvSpPr/>
-          <p:nvPr/>
-        </p:nvSpPr>
-        <p:spPr>
-          <a:xfrm>
-            <a:off x="8869680" y="5675376"/>
-            <a:ext cx="2450592" cy="474726"/>
-          </a:xfrm>
-          <a:prstGeom prst="rect">
-            <a:avLst/>
-          </a:prstGeom>
-          <a:noFill/>
-          <a:ln/>
-        </p:spPr>
-        <p:txBody>
-          <a:bodyPr wrap="square" lIns="0" tIns="0" rIns="0" bIns="0" rtlCol="0" anchor="t"/>
+              <a:t>5</a:t>
+            </a:r>
+            <a:endParaRPr lang="en-US" sz="2600" dirty="0"/>
+          </a:p>
+        </p:txBody>
+      </p:sp>
+      <p:sp>
+        <p:nvSpPr>
+          <p:cNvPr id="51" name="Text 49"/>
+          <p:cNvSpPr/>
+          <p:nvPr/>
+        </p:nvSpPr>
+        <p:spPr>
+          <a:xfrm>
+            <a:off x="8845296" y="2606040"/>
+            <a:ext cx="822960" cy="457200"/>
+          </a:xfrm>
+          <a:prstGeom prst="rect">
+            <a:avLst/>
+          </a:prstGeom>
+          <a:noFill/>
+          <a:ln/>
+        </p:spPr>
+        <p:txBody>
+          <a:bodyPr wrap="square" lIns="0" tIns="0" rIns="0" bIns="0" rtlCol="0" anchor="ctr"/>
           <a:lstStyle/>
           <a:p>
             <a:pPr indent="0" marL="0">
               <a:buNone/>
             </a:pPr>
             <a:r>
-              <a:rPr lang="en-US" sz="1200" b="1" dirty="0">
+              <a:rPr lang="en-US" sz="1100" b="1" dirty="0">
                 <a:solidFill>
                   <a:srgbClr val="58584F"/>
                 </a:solidFill>
@@ -13505,9 +14672,549 @@
                 <a:ea typeface="Calibri" pitchFamily="34" charset="-122"/>
                 <a:cs typeface="Calibri" pitchFamily="34" charset="-120"/>
               </a:rPr>
-              <a:t>Code reviews completed</a:t>
-            </a:r>
-            <a:endParaRPr lang="en-US" sz="1200" dirty="0"/>
+              <a:t>done this</a:t>
+            </a:r>
+            <a:endParaRPr lang="en-US" sz="1100" dirty="0"/>
+          </a:p>
+          <a:p>
+            <a:pPr indent="0" marL="0">
+              <a:buNone/>
+            </a:pPr>
+            <a:r>
+              <a:rPr lang="en-US" sz="1100" b="1" dirty="0">
+                <a:solidFill>
+                  <a:srgbClr val="58584F"/>
+                </a:solidFill>
+                <a:latin typeface="Calibri" pitchFamily="34" charset="0"/>
+                <a:ea typeface="Calibri" pitchFamily="34" charset="-122"/>
+                <a:cs typeface="Calibri" pitchFamily="34" charset="-120"/>
+              </a:rPr>
+              <a:t>week</a:t>
+            </a:r>
+            <a:endParaRPr lang="en-US" sz="1100" dirty="0"/>
+          </a:p>
+        </p:txBody>
+      </p:sp>
+      <p:sp>
+        <p:nvSpPr>
+          <p:cNvPr id="52" name="Text 50"/>
+          <p:cNvSpPr/>
+          <p:nvPr/>
+        </p:nvSpPr>
+        <p:spPr>
+          <a:xfrm>
+            <a:off x="9713976" y="2606040"/>
+            <a:ext cx="411480" cy="457200"/>
+          </a:xfrm>
+          <a:prstGeom prst="rect">
+            <a:avLst/>
+          </a:prstGeom>
+          <a:noFill/>
+          <a:ln/>
+        </p:spPr>
+        <p:txBody>
+          <a:bodyPr wrap="square" lIns="0" tIns="0" rIns="0" bIns="0" rtlCol="0" anchor="ctr"/>
+          <a:lstStyle/>
+          <a:p>
+            <a:pPr indent="0" marL="0">
+              <a:buNone/>
+            </a:pPr>
+            <a:r>
+              <a:rPr lang="en-US" sz="2600" b="1" dirty="0">
+                <a:solidFill>
+                  <a:srgbClr val="141412"/>
+                </a:solidFill>
+                <a:latin typeface="Cambria" pitchFamily="34" charset="0"/>
+                <a:ea typeface="Cambria" pitchFamily="34" charset="-122"/>
+                <a:cs typeface="Cambria" pitchFamily="34" charset="-120"/>
+              </a:rPr>
+              <a:t>1</a:t>
+            </a:r>
+            <a:endParaRPr lang="en-US" sz="2600" dirty="0"/>
+          </a:p>
+        </p:txBody>
+      </p:sp>
+      <p:sp>
+        <p:nvSpPr>
+          <p:cNvPr id="53" name="Text 51"/>
+          <p:cNvSpPr/>
+          <p:nvPr/>
+        </p:nvSpPr>
+        <p:spPr>
+          <a:xfrm>
+            <a:off x="10171176" y="2606040"/>
+            <a:ext cx="731520" cy="457200"/>
+          </a:xfrm>
+          <a:prstGeom prst="rect">
+            <a:avLst/>
+          </a:prstGeom>
+          <a:noFill/>
+          <a:ln/>
+        </p:spPr>
+        <p:txBody>
+          <a:bodyPr wrap="square" lIns="0" tIns="0" rIns="0" bIns="0" rtlCol="0" anchor="ctr"/>
+          <a:lstStyle/>
+          <a:p>
+            <a:pPr indent="0" marL="0">
+              <a:buNone/>
+            </a:pPr>
+            <a:r>
+              <a:rPr lang="en-US" sz="1100" b="1" dirty="0">
+                <a:solidFill>
+                  <a:srgbClr val="58584F"/>
+                </a:solidFill>
+                <a:latin typeface="Calibri" pitchFamily="34" charset="0"/>
+                <a:ea typeface="Calibri" pitchFamily="34" charset="-122"/>
+                <a:cs typeface="Calibri" pitchFamily="34" charset="-120"/>
+              </a:rPr>
+              <a:t>open</a:t>
+            </a:r>
+            <a:endParaRPr lang="en-US" sz="1100" dirty="0"/>
+          </a:p>
+        </p:txBody>
+      </p:sp>
+      <p:sp>
+        <p:nvSpPr>
+          <p:cNvPr id="54" name="Shape 52"/>
+          <p:cNvSpPr/>
+          <p:nvPr/>
+        </p:nvSpPr>
+        <p:spPr>
+          <a:xfrm>
+            <a:off x="8388096" y="3200400"/>
+            <a:ext cx="2401824" cy="118872"/>
+          </a:xfrm>
+          <a:prstGeom prst="roundRect">
+            <a:avLst>
+              <a:gd name="adj" fmla="val 50000"/>
+            </a:avLst>
+          </a:prstGeom>
+          <a:solidFill>
+            <a:srgbClr val="E6E8DF"/>
+          </a:solidFill>
+          <a:ln/>
+        </p:spPr>
+      </p:sp>
+      <p:sp>
+        <p:nvSpPr>
+          <p:cNvPr id="55" name="Shape 53"/>
+          <p:cNvSpPr/>
+          <p:nvPr/>
+        </p:nvSpPr>
+        <p:spPr>
+          <a:xfrm>
+            <a:off x="8388096" y="3200400"/>
+            <a:ext cx="1801368" cy="118872"/>
+          </a:xfrm>
+          <a:prstGeom prst="roundRect">
+            <a:avLst>
+              <a:gd name="adj" fmla="val 50000"/>
+            </a:avLst>
+          </a:prstGeom>
+          <a:solidFill>
+            <a:srgbClr val="D6E6A0"/>
+          </a:solidFill>
+          <a:ln/>
+        </p:spPr>
+      </p:sp>
+      <p:sp>
+        <p:nvSpPr>
+          <p:cNvPr id="56" name="Text 54"/>
+          <p:cNvSpPr/>
+          <p:nvPr/>
+        </p:nvSpPr>
+        <p:spPr>
+          <a:xfrm>
+            <a:off x="10789920" y="3127248"/>
+            <a:ext cx="548640" cy="274320"/>
+          </a:xfrm>
+          <a:prstGeom prst="rect">
+            <a:avLst/>
+          </a:prstGeom>
+          <a:noFill/>
+          <a:ln/>
+        </p:spPr>
+        <p:txBody>
+          <a:bodyPr wrap="square" lIns="0" tIns="0" rIns="0" bIns="0" rtlCol="0" anchor="ctr"/>
+          <a:lstStyle/>
+          <a:p>
+            <a:pPr algn="r" indent="0" marL="0">
+              <a:buNone/>
+            </a:pPr>
+            <a:r>
+              <a:rPr lang="en-US" sz="1100" b="1" dirty="0">
+                <a:solidFill>
+                  <a:srgbClr val="141412"/>
+                </a:solidFill>
+                <a:latin typeface="Calibri" pitchFamily="34" charset="0"/>
+                <a:ea typeface="Calibri" pitchFamily="34" charset="-122"/>
+                <a:cs typeface="Calibri" pitchFamily="34" charset="-120"/>
+              </a:rPr>
+              <a:t>75%</a:t>
+            </a:r>
+            <a:endParaRPr lang="en-US" sz="1100" dirty="0"/>
+          </a:p>
+        </p:txBody>
+      </p:sp>
+      <p:sp>
+        <p:nvSpPr>
+          <p:cNvPr id="57" name="Text 55"/>
+          <p:cNvSpPr/>
+          <p:nvPr/>
+        </p:nvSpPr>
+        <p:spPr>
+          <a:xfrm>
+            <a:off x="8388096" y="3456432"/>
+            <a:ext cx="2950464" cy="548640"/>
+          </a:xfrm>
+          <a:prstGeom prst="rect">
+            <a:avLst/>
+          </a:prstGeom>
+          <a:noFill/>
+          <a:ln/>
+        </p:spPr>
+        <p:txBody>
+          <a:bodyPr wrap="square" lIns="0" tIns="0" rIns="0" bIns="0" rtlCol="0" anchor="t">
+            <a:normAutofit/>
+          </a:bodyPr>
+          <a:lstStyle/>
+          <a:p>
+            <a:pPr indent="0" marL="0">
+              <a:lnSpc>
+                <a:spcPct val="110000"/>
+              </a:lnSpc>
+              <a:buNone/>
+            </a:pPr>
+            <a:r>
+              <a:rPr lang="en-US" sz="1100" dirty="0">
+                <a:solidFill>
+                  <a:srgbClr val="58584F"/>
+                </a:solidFill>
+                <a:latin typeface="Calibri" pitchFamily="34" charset="0"/>
+                <a:ea typeface="Calibri" pitchFamily="34" charset="-122"/>
+                <a:cs typeface="Calibri" pitchFamily="34" charset="-120"/>
+              </a:rPr>
+              <a:t>Data transfer done; usage tracking rolling out.</a:t>
+            </a:r>
+            <a:endParaRPr lang="en-US" sz="1100" dirty="0"/>
+          </a:p>
+        </p:txBody>
+      </p:sp>
+      <p:sp>
+        <p:nvSpPr>
+          <p:cNvPr id="58" name="Shape 56"/>
+          <p:cNvSpPr/>
+          <p:nvPr/>
+        </p:nvSpPr>
+        <p:spPr>
+          <a:xfrm>
+            <a:off x="8388096" y="4069080"/>
+            <a:ext cx="2950464" cy="0"/>
+          </a:xfrm>
+          <a:prstGeom prst="line">
+            <a:avLst/>
+          </a:prstGeom>
+          <a:noFill/>
+          <a:ln w="9525">
+            <a:solidFill>
+              <a:srgbClr val="E0E2D8"/>
+            </a:solidFill>
+            <a:prstDash val="solid"/>
+          </a:ln>
+        </p:spPr>
+      </p:sp>
+      <p:sp>
+        <p:nvSpPr>
+          <p:cNvPr id="59" name="Shape 57"/>
+          <p:cNvSpPr/>
+          <p:nvPr/>
+        </p:nvSpPr>
+        <p:spPr>
+          <a:xfrm>
+            <a:off x="8388096" y="4270248"/>
+            <a:ext cx="118872" cy="118872"/>
+          </a:xfrm>
+          <a:prstGeom prst="ellipse">
+            <a:avLst/>
+          </a:prstGeom>
+          <a:solidFill>
+            <a:srgbClr val="A8CC3A"/>
+          </a:solidFill>
+          <a:ln/>
+        </p:spPr>
+      </p:sp>
+      <p:sp>
+        <p:nvSpPr>
+          <p:cNvPr id="60" name="Text 58"/>
+          <p:cNvSpPr/>
+          <p:nvPr/>
+        </p:nvSpPr>
+        <p:spPr>
+          <a:xfrm>
+            <a:off x="8607552" y="4206240"/>
+            <a:ext cx="2731008" cy="457200"/>
+          </a:xfrm>
+          <a:prstGeom prst="rect">
+            <a:avLst/>
+          </a:prstGeom>
+          <a:noFill/>
+          <a:ln/>
+        </p:spPr>
+        <p:txBody>
+          <a:bodyPr wrap="square" lIns="0" tIns="0" rIns="0" bIns="0" rtlCol="0" anchor="t">
+            <a:normAutofit/>
+          </a:bodyPr>
+          <a:lstStyle/>
+          <a:p>
+            <a:pPr indent="0" marL="0">
+              <a:lnSpc>
+                <a:spcPct val="105000"/>
+              </a:lnSpc>
+              <a:buNone/>
+            </a:pPr>
+            <a:r>
+              <a:rPr lang="en-US" sz="1100" dirty="0">
+                <a:solidFill>
+                  <a:srgbClr val="141412"/>
+                </a:solidFill>
+                <a:latin typeface="Calibri" pitchFamily="34" charset="0"/>
+                <a:ea typeface="Calibri" pitchFamily="34" charset="-122"/>
+                <a:cs typeface="Calibri" pitchFamily="34" charset="-120"/>
+              </a:rPr>
+              <a:t>Data transfer to new system</a:t>
+            </a:r>
+            <a:endParaRPr lang="en-US" sz="1100" dirty="0"/>
+          </a:p>
+        </p:txBody>
+      </p:sp>
+      <p:sp>
+        <p:nvSpPr>
+          <p:cNvPr id="61" name="Shape 59"/>
+          <p:cNvSpPr/>
+          <p:nvPr/>
+        </p:nvSpPr>
+        <p:spPr>
+          <a:xfrm>
+            <a:off x="8388096" y="4727448"/>
+            <a:ext cx="118872" cy="118872"/>
+          </a:xfrm>
+          <a:prstGeom prst="ellipse">
+            <a:avLst/>
+          </a:prstGeom>
+          <a:solidFill>
+            <a:srgbClr val="A8CC3A"/>
+          </a:solidFill>
+          <a:ln/>
+        </p:spPr>
+      </p:sp>
+      <p:sp>
+        <p:nvSpPr>
+          <p:cNvPr id="62" name="Text 60"/>
+          <p:cNvSpPr/>
+          <p:nvPr/>
+        </p:nvSpPr>
+        <p:spPr>
+          <a:xfrm>
+            <a:off x="8607552" y="4663440"/>
+            <a:ext cx="2731008" cy="457200"/>
+          </a:xfrm>
+          <a:prstGeom prst="rect">
+            <a:avLst/>
+          </a:prstGeom>
+          <a:noFill/>
+          <a:ln/>
+        </p:spPr>
+        <p:txBody>
+          <a:bodyPr wrap="square" lIns="0" tIns="0" rIns="0" bIns="0" rtlCol="0" anchor="t">
+            <a:normAutofit/>
+          </a:bodyPr>
+          <a:lstStyle/>
+          <a:p>
+            <a:pPr indent="0" marL="0">
+              <a:lnSpc>
+                <a:spcPct val="105000"/>
+              </a:lnSpc>
+              <a:buNone/>
+            </a:pPr>
+            <a:r>
+              <a:rPr lang="en-US" sz="1100" dirty="0">
+                <a:solidFill>
+                  <a:srgbClr val="141412"/>
+                </a:solidFill>
+                <a:latin typeface="Calibri" pitchFamily="34" charset="0"/>
+                <a:ea typeface="Calibri" pitchFamily="34" charset="-122"/>
+                <a:cs typeface="Calibri" pitchFamily="34" charset="-120"/>
+              </a:rPr>
+              <a:t>Event plan agreed</a:t>
+            </a:r>
+            <a:endParaRPr lang="en-US" sz="1100" dirty="0"/>
+          </a:p>
+        </p:txBody>
+      </p:sp>
+      <p:sp>
+        <p:nvSpPr>
+          <p:cNvPr id="63" name="Shape 61"/>
+          <p:cNvSpPr/>
+          <p:nvPr/>
+        </p:nvSpPr>
+        <p:spPr>
+          <a:xfrm>
+            <a:off x="8388096" y="5184648"/>
+            <a:ext cx="118872" cy="118872"/>
+          </a:xfrm>
+          <a:prstGeom prst="ellipse">
+            <a:avLst/>
+          </a:prstGeom>
+          <a:solidFill>
+            <a:srgbClr val="D6E6A0"/>
+          </a:solidFill>
+          <a:ln/>
+        </p:spPr>
+      </p:sp>
+      <p:sp>
+        <p:nvSpPr>
+          <p:cNvPr id="64" name="Text 62"/>
+          <p:cNvSpPr/>
+          <p:nvPr/>
+        </p:nvSpPr>
+        <p:spPr>
+          <a:xfrm>
+            <a:off x="8607552" y="5120640"/>
+            <a:ext cx="2731008" cy="457200"/>
+          </a:xfrm>
+          <a:prstGeom prst="rect">
+            <a:avLst/>
+          </a:prstGeom>
+          <a:noFill/>
+          <a:ln/>
+        </p:spPr>
+        <p:txBody>
+          <a:bodyPr wrap="square" lIns="0" tIns="0" rIns="0" bIns="0" rtlCol="0" anchor="t">
+            <a:normAutofit/>
+          </a:bodyPr>
+          <a:lstStyle/>
+          <a:p>
+            <a:pPr indent="0" marL="0">
+              <a:lnSpc>
+                <a:spcPct val="105000"/>
+              </a:lnSpc>
+              <a:buNone/>
+            </a:pPr>
+            <a:r>
+              <a:rPr lang="en-US" sz="1100" dirty="0">
+                <a:solidFill>
+                  <a:srgbClr val="141412"/>
+                </a:solidFill>
+                <a:latin typeface="Calibri" pitchFamily="34" charset="0"/>
+                <a:ea typeface="Calibri" pitchFamily="34" charset="-122"/>
+                <a:cs typeface="Calibri" pitchFamily="34" charset="-120"/>
+              </a:rPr>
+              <a:t>Usage tracking rollout</a:t>
+            </a:r>
+            <a:endParaRPr lang="en-US" sz="1100" dirty="0"/>
+          </a:p>
+        </p:txBody>
+      </p:sp>
+      <p:sp>
+        <p:nvSpPr>
+          <p:cNvPr id="65" name="Shape 63"/>
+          <p:cNvSpPr/>
+          <p:nvPr/>
+        </p:nvSpPr>
+        <p:spPr>
+          <a:xfrm>
+            <a:off x="8388096" y="5641848"/>
+            <a:ext cx="118872" cy="118872"/>
+          </a:xfrm>
+          <a:prstGeom prst="ellipse">
+            <a:avLst/>
+          </a:prstGeom>
+          <a:solidFill>
+            <a:srgbClr val="A8CC3A"/>
+          </a:solidFill>
+          <a:ln/>
+        </p:spPr>
+      </p:sp>
+      <p:sp>
+        <p:nvSpPr>
+          <p:cNvPr id="66" name="Text 64"/>
+          <p:cNvSpPr/>
+          <p:nvPr/>
+        </p:nvSpPr>
+        <p:spPr>
+          <a:xfrm>
+            <a:off x="8607552" y="5577840"/>
+            <a:ext cx="2731008" cy="457200"/>
+          </a:xfrm>
+          <a:prstGeom prst="rect">
+            <a:avLst/>
+          </a:prstGeom>
+          <a:noFill/>
+          <a:ln/>
+        </p:spPr>
+        <p:txBody>
+          <a:bodyPr wrap="square" lIns="0" tIns="0" rIns="0" bIns="0" rtlCol="0" anchor="t">
+            <a:normAutofit/>
+          </a:bodyPr>
+          <a:lstStyle/>
+          <a:p>
+            <a:pPr indent="0" marL="0">
+              <a:lnSpc>
+                <a:spcPct val="105000"/>
+              </a:lnSpc>
+              <a:buNone/>
+            </a:pPr>
+            <a:r>
+              <a:rPr lang="en-US" sz="1100" dirty="0">
+                <a:solidFill>
+                  <a:srgbClr val="141412"/>
+                </a:solidFill>
+                <a:latin typeface="Calibri" pitchFamily="34" charset="0"/>
+                <a:ea typeface="Calibri" pitchFamily="34" charset="-122"/>
+                <a:cs typeface="Calibri" pitchFamily="34" charset="-120"/>
+              </a:rPr>
+              <a:t>Code reviews, 3 features</a:t>
+            </a:r>
+            <a:endParaRPr lang="en-US" sz="1100" dirty="0"/>
+          </a:p>
+        </p:txBody>
+      </p:sp>
+      <p:sp>
+        <p:nvSpPr>
+          <p:cNvPr id="67" name="Text 65"/>
+          <p:cNvSpPr/>
+          <p:nvPr/>
+        </p:nvSpPr>
+        <p:spPr>
+          <a:xfrm>
+            <a:off x="640080" y="6309360"/>
+            <a:ext cx="10908792" cy="274320"/>
+          </a:xfrm>
+          <a:prstGeom prst="rect">
+            <a:avLst/>
+          </a:prstGeom>
+          <a:noFill/>
+          <a:ln/>
+        </p:spPr>
+        <p:txBody>
+          <a:bodyPr wrap="square" lIns="0" tIns="0" rIns="0" bIns="0" rtlCol="0" anchor="ctr"/>
+          <a:lstStyle/>
+          <a:p>
+            <a:pPr indent="0" marL="0">
+              <a:buNone/>
+            </a:pPr>
+            <a:r>
+              <a:rPr lang="en-US" sz="1100" i="1" dirty="0">
+                <a:solidFill>
+                  <a:srgbClr val="B8B8B4"/>
+                </a:solidFill>
+                <a:latin typeface="Calibri" pitchFamily="34" charset="0"/>
+                <a:ea typeface="Calibri" pitchFamily="34" charset="-122"/>
+                <a:cs typeface="Calibri" pitchFamily="34" charset="-120"/>
+              </a:rPr>
+              <a:t>Done/Open = planned tasks this week; work in review stays open until approved.</a:t>
+            </a:r>
+            <a:endParaRPr lang="en-US" sz="1100" dirty="0"/>
           </a:p>
         </p:txBody>
       </p:sp>

--- a/src/assets/downloads/example-deck-modern.pptx
+++ b/src/assets/downloads/example-deck-modern.pptx
@@ -3663,7 +3663,7 @@
       </p:grpSpPr>
       <p:pic>
         <p:nvPicPr>
-          <p:cNvPr id="2" name="Image 0" descr="/var/folders/lw/rmylcyvd5rjfxk9g1z9rrm8w0000gq/T/showship-deck-WqaFdu/logo_trimmed.png">    </p:cNvPr>
+          <p:cNvPr id="2" name="Image 0" descr="/var/folders/lw/rmylcyvd5rjfxk9g1z9rrm8w0000gq/T/showship-deck-1VHyyi/logo_trimmed.png">    </p:cNvPr>
           <p:cNvPicPr>
             <a:picLocks noChangeAspect="1"/>
           </p:cNvPicPr>
@@ -3689,7 +3689,7 @@
       </p:pic>
       <p:pic>
         <p:nvPicPr>
-          <p:cNvPr id="3" name="Image 1" descr="/var/folders/lw/rmylcyvd5rjfxk9g1z9rrm8w0000gq/T/showship-deck-WqaFdu/logo_trimmed.png">    </p:cNvPr>
+          <p:cNvPr id="3" name="Image 1" descr="/var/folders/lw/rmylcyvd5rjfxk9g1z9rrm8w0000gq/T/showship-deck-1VHyyi/logo_trimmed.png">    </p:cNvPr>
           <p:cNvPicPr>
             <a:picLocks noChangeAspect="1"/>
           </p:cNvPicPr>
@@ -6014,7 +6014,7 @@
       </p:grpSpPr>
       <p:pic>
         <p:nvPicPr>
-          <p:cNvPr id="2" name="Image 0" descr="/var/folders/lw/rmylcyvd5rjfxk9g1z9rrm8w0000gq/T/showship-deck-WqaFdu/logo_trimmed.png">    </p:cNvPr>
+          <p:cNvPr id="2" name="Image 0" descr="/var/folders/lw/rmylcyvd5rjfxk9g1z9rrm8w0000gq/T/showship-deck-1VHyyi/logo_trimmed.png">    </p:cNvPr>
           <p:cNvPicPr>
             <a:picLocks noChangeAspect="1"/>
           </p:cNvPicPr>
@@ -6040,7 +6040,7 @@
       </p:pic>
       <p:pic>
         <p:nvPicPr>
-          <p:cNvPr id="3" name="Image 1" descr="/var/folders/lw/rmylcyvd5rjfxk9g1z9rrm8w0000gq/T/showship-deck-WqaFdu/logo_trimmed.png">    </p:cNvPr>
+          <p:cNvPr id="3" name="Image 1" descr="/var/folders/lw/rmylcyvd5rjfxk9g1z9rrm8w0000gq/T/showship-deck-1VHyyi/logo_trimmed.png">    </p:cNvPr>
           <p:cNvPicPr>
             <a:picLocks noChangeAspect="1"/>
           </p:cNvPicPr>
@@ -9886,7 +9886,7 @@
         <p:spPr>
           <a:xfrm>
             <a:off x="640080" y="1783080"/>
-            <a:ext cx="3453384" cy="4160520"/>
+            <a:ext cx="3453384" cy="3694938"/>
           </a:xfrm>
           <a:prstGeom prst="roundRect">
             <a:avLst>
@@ -10436,7 +10436,7 @@
         <p:spPr>
           <a:xfrm>
             <a:off x="4367784" y="1783080"/>
-            <a:ext cx="3453384" cy="4160520"/>
+            <a:ext cx="3453384" cy="3694938"/>
           </a:xfrm>
           <a:prstGeom prst="roundRect">
             <a:avLst>
@@ -10764,7 +10764,7 @@
         <p:spPr>
           <a:xfrm>
             <a:off x="4843272" y="4536186"/>
-            <a:ext cx="2749296" cy="390144"/>
+            <a:ext cx="2749296" cy="222504"/>
           </a:xfrm>
           <a:prstGeom prst="rect">
             <a:avLst/>
@@ -10802,7 +10802,7 @@
         </p:nvSpPr>
         <p:spPr>
           <a:xfrm>
-            <a:off x="4596384" y="4981194"/>
+            <a:off x="4596384" y="4813554"/>
             <a:ext cx="118872" cy="118872"/>
           </a:xfrm>
           <a:prstGeom prst="ellipse">
@@ -10822,7 +10822,7 @@
         </p:nvSpPr>
         <p:spPr>
           <a:xfrm>
-            <a:off x="4843272" y="4926330"/>
+            <a:off x="4843272" y="4758690"/>
             <a:ext cx="2749296" cy="222504"/>
           </a:xfrm>
           <a:prstGeom prst="rect">
@@ -10861,7 +10861,7 @@
         </p:nvSpPr>
         <p:spPr>
           <a:xfrm>
-            <a:off x="4596384" y="5203698"/>
+            <a:off x="4596384" y="5036058"/>
             <a:ext cx="118872" cy="118872"/>
           </a:xfrm>
           <a:prstGeom prst="ellipse">
@@ -10881,7 +10881,7 @@
         </p:nvSpPr>
         <p:spPr>
           <a:xfrm>
-            <a:off x="4843272" y="5148834"/>
+            <a:off x="4843272" y="4981194"/>
             <a:ext cx="2749296" cy="222504"/>
           </a:xfrm>
           <a:prstGeom prst="rect">
@@ -10921,7 +10921,7 @@
         <p:spPr>
           <a:xfrm>
             <a:off x="8095488" y="1783080"/>
-            <a:ext cx="3453384" cy="4160520"/>
+            <a:ext cx="3453384" cy="3694938"/>
           </a:xfrm>
           <a:prstGeom prst="roundRect">
             <a:avLst>
@@ -11089,7 +11089,7 @@
         <p:spPr>
           <a:xfrm>
             <a:off x="8324088" y="2871597"/>
-            <a:ext cx="2996184" cy="792480"/>
+            <a:ext cx="2996184" cy="594360"/>
           </a:xfrm>
           <a:prstGeom prst="rect">
             <a:avLst/>
@@ -11130,7 +11130,7 @@
         </p:nvSpPr>
         <p:spPr>
           <a:xfrm>
-            <a:off x="8324088" y="3801237"/>
+            <a:off x="8324088" y="3603117"/>
             <a:ext cx="2996184" cy="228600"/>
           </a:xfrm>
           <a:prstGeom prst="rect">
@@ -11169,7 +11169,7 @@
         </p:nvSpPr>
         <p:spPr>
           <a:xfrm>
-            <a:off x="8324088" y="4130421"/>
+            <a:off x="8324088" y="3932301"/>
             <a:ext cx="118872" cy="118872"/>
           </a:xfrm>
           <a:prstGeom prst="ellipse">
@@ -11191,7 +11191,7 @@
         </p:nvSpPr>
         <p:spPr>
           <a:xfrm>
-            <a:off x="8570976" y="4075557"/>
+            <a:off x="8570976" y="3877437"/>
             <a:ext cx="2749296" cy="222504"/>
           </a:xfrm>
           <a:prstGeom prst="rect">
@@ -11230,7 +11230,7 @@
         </p:nvSpPr>
         <p:spPr>
           <a:xfrm>
-            <a:off x="8324088" y="4352925"/>
+            <a:off x="8324088" y="4154805"/>
             <a:ext cx="118872" cy="118872"/>
           </a:xfrm>
           <a:prstGeom prst="ellipse">
@@ -11252,7 +11252,7 @@
         </p:nvSpPr>
         <p:spPr>
           <a:xfrm>
-            <a:off x="8570976" y="4298061"/>
+            <a:off x="8570976" y="4099941"/>
             <a:ext cx="2749296" cy="222504"/>
           </a:xfrm>
           <a:prstGeom prst="rect">
@@ -11291,7 +11291,7 @@
         </p:nvSpPr>
         <p:spPr>
           <a:xfrm>
-            <a:off x="8324088" y="4575429"/>
+            <a:off x="8324088" y="4377309"/>
             <a:ext cx="118872" cy="118872"/>
           </a:xfrm>
           <a:prstGeom prst="ellipse">
@@ -11313,7 +11313,7 @@
         </p:nvSpPr>
         <p:spPr>
           <a:xfrm>
-            <a:off x="8570976" y="4520565"/>
+            <a:off x="8570976" y="4322445"/>
             <a:ext cx="2749296" cy="222504"/>
           </a:xfrm>
           <a:prstGeom prst="rect">
@@ -11352,7 +11352,7 @@
         </p:nvSpPr>
         <p:spPr>
           <a:xfrm>
-            <a:off x="640080" y="5989320"/>
+            <a:off x="640080" y="5615178"/>
             <a:ext cx="10908792" cy="274320"/>
           </a:xfrm>
           <a:prstGeom prst="rect">

--- a/src/assets/downloads/example-deck-modern.pptx
+++ b/src/assets/downloads/example-deck-modern.pptx
@@ -3663,7 +3663,7 @@
       </p:grpSpPr>
       <p:pic>
         <p:nvPicPr>
-          <p:cNvPr id="2" name="Image 0" descr="/var/folders/lw/rmylcyvd5rjfxk9g1z9rrm8w0000gq/T/showship-deck-1VHyyi/logo_trimmed.png">    </p:cNvPr>
+          <p:cNvPr id="2" name="Image 0" descr="/var/folders/lw/rmylcyvd5rjfxk9g1z9rrm8w0000gq/T/showship-deck-hVn8b1/logo_trimmed.png">    </p:cNvPr>
           <p:cNvPicPr>
             <a:picLocks noChangeAspect="1"/>
           </p:cNvPicPr>
@@ -3689,7 +3689,7 @@
       </p:pic>
       <p:pic>
         <p:nvPicPr>
-          <p:cNvPr id="3" name="Image 1" descr="/var/folders/lw/rmylcyvd5rjfxk9g1z9rrm8w0000gq/T/showship-deck-1VHyyi/logo_trimmed.png">    </p:cNvPr>
+          <p:cNvPr id="3" name="Image 1" descr="/var/folders/lw/rmylcyvd5rjfxk9g1z9rrm8w0000gq/T/showship-deck-hVn8b1/logo_trimmed.png">    </p:cNvPr>
           <p:cNvPicPr>
             <a:picLocks noChangeAspect="1"/>
           </p:cNvPicPr>
@@ -5918,13 +5918,13 @@
                       <a:r>
                         <a:rPr lang="en-US" sz="1100" b="1" dirty="0">
                           <a:solidFill>
-                            <a:srgbClr val="141412"/>
+                            <a:srgbClr val="58584F"/>
                           </a:solidFill>
                           <a:latin typeface="Calibri" pitchFamily="34" charset="0"/>
                           <a:ea typeface="Calibri" pitchFamily="34" charset="-122"/>
                           <a:cs typeface="Calibri" pitchFamily="34" charset="-120"/>
                         </a:rPr>
-                        <a:t>DONE</a:t>
+                        <a:t>NOT STARTED</a:t>
                       </a:r>
                       <a:endParaRPr lang="en-US" sz="1100" dirty="0">
                         <a:latin typeface="Calibri" charset="0"/>
@@ -5971,7 +5971,7 @@
                       <a:tailEnd type="none" w="med" len="med"/>
                     </a:lnB>
                     <a:solidFill>
-                      <a:srgbClr val="A8CC3A"/>
+                      <a:srgbClr val="E6E8DF"/>
                     </a:solidFill>
                   </a:tcPr>
                 </a:tc>
@@ -6014,7 +6014,7 @@
       </p:grpSpPr>
       <p:pic>
         <p:nvPicPr>
-          <p:cNvPr id="2" name="Image 0" descr="/var/folders/lw/rmylcyvd5rjfxk9g1z9rrm8w0000gq/T/showship-deck-1VHyyi/logo_trimmed.png">    </p:cNvPr>
+          <p:cNvPr id="2" name="Image 0" descr="/var/folders/lw/rmylcyvd5rjfxk9g1z9rrm8w0000gq/T/showship-deck-hVn8b1/logo_trimmed.png">    </p:cNvPr>
           <p:cNvPicPr>
             <a:picLocks noChangeAspect="1"/>
           </p:cNvPicPr>
@@ -6040,7 +6040,7 @@
       </p:pic>
       <p:pic>
         <p:nvPicPr>
-          <p:cNvPr id="3" name="Image 1" descr="/var/folders/lw/rmylcyvd5rjfxk9g1z9rrm8w0000gq/T/showship-deck-1VHyyi/logo_trimmed.png">    </p:cNvPr>
+          <p:cNvPr id="3" name="Image 1" descr="/var/folders/lw/rmylcyvd5rjfxk9g1z9rrm8w0000gq/T/showship-deck-hVn8b1/logo_trimmed.png">    </p:cNvPr>
           <p:cNvPicPr>
             <a:picLocks noChangeAspect="1"/>
           </p:cNvPicPr>

--- a/src/assets/downloads/example-deck-modern.pptx
+++ b/src/assets/downloads/example-deck-modern.pptx
@@ -3663,7 +3663,7 @@
       </p:grpSpPr>
       <p:pic>
         <p:nvPicPr>
-          <p:cNvPr id="2" name="Image 0" descr="/var/folders/lw/rmylcyvd5rjfxk9g1z9rrm8w0000gq/T/showship-deck-hVn8b1/logo_trimmed.png">    </p:cNvPr>
+          <p:cNvPr id="2" name="Image 0" descr="/var/folders/lw/rmylcyvd5rjfxk9g1z9rrm8w0000gq/T/showship-deck-Uw2QYs/logo_trimmed.png">    </p:cNvPr>
           <p:cNvPicPr>
             <a:picLocks noChangeAspect="1"/>
           </p:cNvPicPr>
@@ -3689,7 +3689,7 @@
       </p:pic>
       <p:pic>
         <p:nvPicPr>
-          <p:cNvPr id="3" name="Image 1" descr="/var/folders/lw/rmylcyvd5rjfxk9g1z9rrm8w0000gq/T/showship-deck-hVn8b1/logo_trimmed.png">    </p:cNvPr>
+          <p:cNvPr id="3" name="Image 1" descr="/var/folders/lw/rmylcyvd5rjfxk9g1z9rrm8w0000gq/T/showship-deck-Uw2QYs/logo_trimmed.png">    </p:cNvPr>
           <p:cNvPicPr>
             <a:picLocks noChangeAspect="1"/>
           </p:cNvPicPr>
@@ -6014,7 +6014,7 @@
       </p:grpSpPr>
       <p:pic>
         <p:nvPicPr>
-          <p:cNvPr id="2" name="Image 0" descr="/var/folders/lw/rmylcyvd5rjfxk9g1z9rrm8w0000gq/T/showship-deck-hVn8b1/logo_trimmed.png">    </p:cNvPr>
+          <p:cNvPr id="2" name="Image 0" descr="/var/folders/lw/rmylcyvd5rjfxk9g1z9rrm8w0000gq/T/showship-deck-Uw2QYs/logo_trimmed.png">    </p:cNvPr>
           <p:cNvPicPr>
             <a:picLocks noChangeAspect="1"/>
           </p:cNvPicPr>
@@ -6040,7 +6040,7 @@
       </p:pic>
       <p:pic>
         <p:nvPicPr>
-          <p:cNvPr id="3" name="Image 1" descr="/var/folders/lw/rmylcyvd5rjfxk9g1z9rrm8w0000gq/T/showship-deck-hVn8b1/logo_trimmed.png">    </p:cNvPr>
+          <p:cNvPr id="3" name="Image 1" descr="/var/folders/lw/rmylcyvd5rjfxk9g1z9rrm8w0000gq/T/showship-deck-Uw2QYs/logo_trimmed.png">    </p:cNvPr>
           <p:cNvPicPr>
             <a:picLocks noChangeAspect="1"/>
           </p:cNvPicPr>
@@ -11894,7 +11894,7 @@
         <p:spPr>
           <a:xfrm>
             <a:off x="4389120" y="2304288"/>
-            <a:ext cx="5376672" cy="801624"/>
+            <a:ext cx="5861304" cy="801624"/>
           </a:xfrm>
           <a:prstGeom prst="rect">
             <a:avLst/>
@@ -12058,7 +12058,7 @@
         <p:spPr>
           <a:xfrm>
             <a:off x="4389120" y="3544824"/>
-            <a:ext cx="5376672" cy="801624"/>
+            <a:ext cx="5084064" cy="801624"/>
           </a:xfrm>
           <a:prstGeom prst="rect">
             <a:avLst/>
@@ -12222,7 +12222,7 @@
         <p:spPr>
           <a:xfrm>
             <a:off x="4389120" y="4785360"/>
-            <a:ext cx="5376672" cy="801624"/>
+            <a:ext cx="5861304" cy="801624"/>
           </a:xfrm>
           <a:prstGeom prst="rect">
             <a:avLst/>

--- a/src/assets/downloads/example-deck-modern.pptx
+++ b/src/assets/downloads/example-deck-modern.pptx
@@ -3663,7 +3663,7 @@
       </p:grpSpPr>
       <p:pic>
         <p:nvPicPr>
-          <p:cNvPr id="2" name="Image 0" descr="/var/folders/lw/rmylcyvd5rjfxk9g1z9rrm8w0000gq/T/showship-deck-Uw2QYs/logo_trimmed.png">    </p:cNvPr>
+          <p:cNvPr id="2" name="Image 0" descr="/var/folders/lw/rmylcyvd5rjfxk9g1z9rrm8w0000gq/T/showship-deck-rI9gri/logo_trimmed.png">    </p:cNvPr>
           <p:cNvPicPr>
             <a:picLocks noChangeAspect="1"/>
           </p:cNvPicPr>
@@ -3689,7 +3689,7 @@
       </p:pic>
       <p:pic>
         <p:nvPicPr>
-          <p:cNvPr id="3" name="Image 1" descr="/var/folders/lw/rmylcyvd5rjfxk9g1z9rrm8w0000gq/T/showship-deck-Uw2QYs/logo_trimmed.png">    </p:cNvPr>
+          <p:cNvPr id="3" name="Image 1" descr="/var/folders/lw/rmylcyvd5rjfxk9g1z9rrm8w0000gq/T/showship-deck-rI9gri/logo_trimmed.png">    </p:cNvPr>
           <p:cNvPicPr>
             <a:picLocks noChangeAspect="1"/>
           </p:cNvPicPr>
@@ -4222,8 +4222,8 @@
         </p:nvSpPr>
         <p:spPr>
           <a:xfrm>
-            <a:off x="8869680" y="1892808"/>
-            <a:ext cx="2450592" cy="745998"/>
+            <a:off x="8869680" y="1874520"/>
+            <a:ext cx="2450592" cy="651053"/>
           </a:xfrm>
           <a:prstGeom prst="rect">
             <a:avLst/>
@@ -4327,8 +4327,8 @@
         </p:nvSpPr>
         <p:spPr>
           <a:xfrm>
-            <a:off x="8869680" y="3432048"/>
-            <a:ext cx="2450592" cy="745998"/>
+            <a:off x="8869680" y="3413760"/>
+            <a:ext cx="2450592" cy="651053"/>
           </a:xfrm>
           <a:prstGeom prst="rect">
             <a:avLst/>
@@ -4432,8 +4432,8 @@
         </p:nvSpPr>
         <p:spPr>
           <a:xfrm>
-            <a:off x="8869680" y="4971288"/>
-            <a:ext cx="2450592" cy="745998"/>
+            <a:off x="8869680" y="4953000"/>
+            <a:ext cx="2450592" cy="651053"/>
           </a:xfrm>
           <a:prstGeom prst="rect">
             <a:avLst/>
@@ -6014,7 +6014,7 @@
       </p:grpSpPr>
       <p:pic>
         <p:nvPicPr>
-          <p:cNvPr id="2" name="Image 0" descr="/var/folders/lw/rmylcyvd5rjfxk9g1z9rrm8w0000gq/T/showship-deck-Uw2QYs/logo_trimmed.png">    </p:cNvPr>
+          <p:cNvPr id="2" name="Image 0" descr="/var/folders/lw/rmylcyvd5rjfxk9g1z9rrm8w0000gq/T/showship-deck-rI9gri/logo_trimmed.png">    </p:cNvPr>
           <p:cNvPicPr>
             <a:picLocks noChangeAspect="1"/>
           </p:cNvPicPr>
@@ -6040,7 +6040,7 @@
       </p:pic>
       <p:pic>
         <p:nvPicPr>
-          <p:cNvPr id="3" name="Image 1" descr="/var/folders/lw/rmylcyvd5rjfxk9g1z9rrm8w0000gq/T/showship-deck-Uw2QYs/logo_trimmed.png">    </p:cNvPr>
+          <p:cNvPr id="3" name="Image 1" descr="/var/folders/lw/rmylcyvd5rjfxk9g1z9rrm8w0000gq/T/showship-deck-rI9gri/logo_trimmed.png">    </p:cNvPr>
           <p:cNvPicPr>
             <a:picLocks noChangeAspect="1"/>
           </p:cNvPicPr>
